--- a/8주차 과제/인공지능플랫폼실습 과제_2601110288_박수용_웨어체크.pptx
+++ b/8주차 과제/인공지능플랫폼실습 과제_2601110288_박수용_웨어체크.pptx
@@ -1,26 +1,40 @@
 
 <file path=ppt/presentation.xml><?xml version="1.0" encoding="utf-8"?>
-<p:presentation xmlns:p="http://schemas.openxmlformats.org/presentationml/2006/main" embedTrueTypeFonts="1" saveSubsetFonts="1">
+<p:presentation xmlns:a="http://schemas.openxmlformats.org/drawingml/2006/main" xmlns:r="http://schemas.openxmlformats.org/officeDocument/2006/relationships" xmlns:p="http://schemas.openxmlformats.org/presentationml/2006/main" embedTrueTypeFonts="1" saveSubsetFonts="1">
   <p:sldMasterIdLst>
-    <p:sldMasterId xmlns:r="http://schemas.openxmlformats.org/officeDocument/2006/relationships" id="2147483648" r:id="R1abf6e855c56457d"/>
+    <p:sldMasterId id="2147483648" r:id="rId1"/>
   </p:sldMasterIdLst>
   <p:notesMasterIdLst>
-    <p:notesMasterId xmlns:r="http://schemas.openxmlformats.org/officeDocument/2006/relationships" r:id="Rbbbe9f846cde4d0c"/>
+    <p:notesMasterId r:id="rId7"/>
   </p:notesMasterIdLst>
   <p:sldIdLst>
-    <p:sldId xmlns:r="http://schemas.openxmlformats.org/officeDocument/2006/relationships" id="256" r:id="R6b5ff29b1c364e1e"/>
-    <p:sldId xmlns:r="http://schemas.openxmlformats.org/officeDocument/2006/relationships" id="257" r:id="Rfcca4ea31f494af4"/>
-    <p:sldId xmlns:r="http://schemas.openxmlformats.org/officeDocument/2006/relationships" id="258" r:id="Rafb1b7d3b6824160"/>
-    <p:sldId xmlns:r="http://schemas.openxmlformats.org/officeDocument/2006/relationships" id="259" r:id="Rc75be335ea124a7e"/>
-    <p:sldId xmlns:r="http://schemas.openxmlformats.org/officeDocument/2006/relationships" id="260" r:id="Rc42ede3af51d4ac0"/>
+    <p:sldId id="256" r:id="rId2"/>
+    <p:sldId id="257" r:id="rId3"/>
+    <p:sldId id="258" r:id="rId4"/>
+    <p:sldId id="259" r:id="rId5"/>
+    <p:sldId id="260" r:id="rId6"/>
   </p:sldIdLst>
   <p:sldSz cx="18288000" cy="10287000"/>
   <p:notesSz cx="6858000" cy="9144000"/>
+  <p:embeddedFontLst>
+    <p:embeddedFont>
+      <p:font typeface="Malgun Gothic" panose="020B0503020000020004" pitchFamily="50" charset="-127"/>
+      <p:regular r:id="rId8"/>
+      <p:bold r:id="rId9"/>
+    </p:embeddedFont>
+    <p:embeddedFont>
+      <p:font typeface="Calibri" panose="020F0502020204030204" pitchFamily="34" charset="0"/>
+      <p:regular r:id="rId10"/>
+      <p:bold r:id="rId11"/>
+      <p:italic r:id="rId12"/>
+      <p:boldItalic r:id="rId13"/>
+    </p:embeddedFont>
+  </p:embeddedFontLst>
   <p:defaultTextStyle>
-    <a:defPPr xmlns:a="http://schemas.openxmlformats.org/drawingml/2006/main">
+    <a:defPPr>
       <a:buNone/>
     </a:defPPr>
-    <a:lvl1pPr xmlns:a="http://schemas.openxmlformats.org/drawingml/2006/main" marL="0" algn="l" defTabSz="914400">
+    <a:lvl1pPr marL="0" algn="l" defTabSz="914400">
       <a:buNone/>
       <a:defRPr sz="1800" kern="1200">
         <a:solidFill>
@@ -31,7 +45,7 @@
         <a:cs typeface="+mn-lt"/>
       </a:defRPr>
     </a:lvl1pPr>
-    <a:lvl2pPr xmlns:a="http://schemas.openxmlformats.org/drawingml/2006/main" marL="457200" algn="l" defTabSz="914400">
+    <a:lvl2pPr marL="457200" algn="l" defTabSz="914400">
       <a:buNone/>
       <a:defRPr sz="1800" kern="1200">
         <a:solidFill>
@@ -42,7 +56,7 @@
         <a:cs typeface="+mn-lt"/>
       </a:defRPr>
     </a:lvl2pPr>
-    <a:lvl3pPr xmlns:a="http://schemas.openxmlformats.org/drawingml/2006/main" marL="914400" algn="l" defTabSz="914400">
+    <a:lvl3pPr marL="914400" algn="l" defTabSz="914400">
       <a:buNone/>
       <a:defRPr sz="1800" kern="1200">
         <a:solidFill>
@@ -53,7 +67,7 @@
         <a:cs typeface="+mn-lt"/>
       </a:defRPr>
     </a:lvl3pPr>
-    <a:lvl4pPr xmlns:a="http://schemas.openxmlformats.org/drawingml/2006/main" marL="1371600" algn="l" defTabSz="914400">
+    <a:lvl4pPr marL="1371600" algn="l" defTabSz="914400">
       <a:buNone/>
       <a:defRPr sz="1800" kern="1200">
         <a:solidFill>
@@ -64,7 +78,7 @@
         <a:cs typeface="+mn-lt"/>
       </a:defRPr>
     </a:lvl4pPr>
-    <a:lvl5pPr xmlns:a="http://schemas.openxmlformats.org/drawingml/2006/main" marL="1828800" algn="l" defTabSz="914400">
+    <a:lvl5pPr marL="1828800" algn="l" defTabSz="914400">
       <a:buNone/>
       <a:defRPr sz="1800" kern="1200">
         <a:solidFill>
@@ -75,7 +89,7 @@
         <a:cs typeface="+mn-lt"/>
       </a:defRPr>
     </a:lvl5pPr>
-    <a:lvl6pPr xmlns:a="http://schemas.openxmlformats.org/drawingml/2006/main" marL="2286000" algn="l" defTabSz="914400">
+    <a:lvl6pPr marL="2286000" algn="l" defTabSz="914400">
       <a:buNone/>
       <a:defRPr sz="1800" kern="1200">
         <a:solidFill>
@@ -86,7 +100,7 @@
         <a:cs typeface="+mn-lt"/>
       </a:defRPr>
     </a:lvl6pPr>
-    <a:lvl7pPr xmlns:a="http://schemas.openxmlformats.org/drawingml/2006/main" marL="2743200" algn="l" defTabSz="914400">
+    <a:lvl7pPr marL="2743200" algn="l" defTabSz="914400">
       <a:buNone/>
       <a:defRPr sz="1800" kern="1200">
         <a:solidFill>
@@ -97,7 +111,7 @@
         <a:cs typeface="+mn-lt"/>
       </a:defRPr>
     </a:lvl7pPr>
-    <a:lvl8pPr xmlns:a="http://schemas.openxmlformats.org/drawingml/2006/main" marL="3200400" algn="l" defTabSz="914400">
+    <a:lvl8pPr marL="3200400" algn="l" defTabSz="914400">
       <a:buNone/>
       <a:defRPr sz="1800" kern="1200">
         <a:solidFill>
@@ -108,7 +122,7 @@
         <a:cs typeface="+mn-lt"/>
       </a:defRPr>
     </a:lvl8pPr>
-    <a:lvl9pPr xmlns:a="http://schemas.openxmlformats.org/drawingml/2006/main" marL="3657600" algn="l" defTabSz="914400">
+    <a:lvl9pPr marL="3657600" algn="l" defTabSz="914400">
       <a:buNone/>
       <a:defRPr sz="1800" kern="1200">
         <a:solidFill>
@@ -120,15 +134,20 @@
       </a:defRPr>
     </a:lvl9pPr>
   </p:defaultTextStyle>
+  <p:extLst>
+    <p:ext uri="{EFAFB233-063F-42B5-8137-9DF3F51BA10A}">
+      <p15:sldGuideLst xmlns:p15="http://schemas.microsoft.com/office/powerpoint/2012/main"/>
+    </p:ext>
+  </p:extLst>
 </p:presentation>
 </file>
 
 <file path=ppt/notesMasters/notesMaster1.xml><?xml version="1.0" encoding="utf-8"?>
-<p:notesMaster xmlns:p="http://schemas.openxmlformats.org/presentationml/2006/main">
+<p:notesMaster xmlns:a="http://schemas.openxmlformats.org/drawingml/2006/main" xmlns:r="http://schemas.openxmlformats.org/officeDocument/2006/relationships" xmlns:p="http://schemas.openxmlformats.org/presentationml/2006/main">
   <p:cSld>
     <p:bg>
       <p:bgRef idx="1001">
-        <a:schemeClr xmlns:a="http://schemas.openxmlformats.org/drawingml/2006/main" val="bg1"/>
+        <a:schemeClr val="bg1"/>
       </p:bgRef>
     </p:bg>
     <p:spTree>
@@ -138,405 +157,164 @@
         <p:nvPr/>
       </p:nvGrpSpPr>
       <p:grpSpPr>
-        <a:xfrm xmlns:a="http://schemas.openxmlformats.org/drawingml/2006/main"/>
+        <a:xfrm>
+          <a:off x="0" y="0"/>
+          <a:ext cx="0" cy="0"/>
+          <a:chOff x="0" y="0"/>
+          <a:chExt cx="0" cy="0"/>
+        </a:xfrm>
       </p:grpSpPr>
       <p:sp>
         <p:nvSpPr>
           <p:cNvPr id="2" name="Header Placeholder"/>
-          <p:cNvSpPr/>
+          <p:cNvSpPr>
+            <a:spLocks noGrp="1"/>
+          </p:cNvSpPr>
           <p:nvPr>
             <p:ph type="hdr" sz="quarter"/>
           </p:nvPr>
         </p:nvSpPr>
         <p:spPr>
-          <a:prstGeom xmlns:a="http://schemas.openxmlformats.org/drawingml/2006/main" prst="rect">
+          <a:prstGeom prst="rect">
             <a:avLst/>
           </a:prstGeom>
         </p:spPr>
         <p:txBody>
-          <a:bodyPr xmlns:a="http://schemas.openxmlformats.org/drawingml/2006/main"/>
-          <a:lstStyle xmlns:a="http://schemas.openxmlformats.org/drawingml/2006/main"/>
-          <a:p xmlns:a="http://schemas.openxmlformats.org/drawingml/2006/main"/>
+          <a:bodyPr/>
+          <a:lstStyle/>
+          <a:p>
+            <a:endParaRPr/>
+          </a:p>
         </p:txBody>
       </p:sp>
       <p:sp>
         <p:nvSpPr>
           <p:cNvPr id="3" name="Date Placeholder"/>
-          <p:cNvSpPr/>
+          <p:cNvSpPr>
+            <a:spLocks noGrp="1"/>
+          </p:cNvSpPr>
           <p:nvPr>
             <p:ph type="dt" sz="quarter" idx="1"/>
           </p:nvPr>
         </p:nvSpPr>
         <p:spPr>
-          <a:prstGeom xmlns:a="http://schemas.openxmlformats.org/drawingml/2006/main" prst="rect">
+          <a:prstGeom prst="rect">
             <a:avLst/>
           </a:prstGeom>
         </p:spPr>
         <p:txBody>
-          <a:bodyPr xmlns:a="http://schemas.openxmlformats.org/drawingml/2006/main"/>
-          <a:lstStyle xmlns:a="http://schemas.openxmlformats.org/drawingml/2006/main"/>
-          <a:p xmlns:a="http://schemas.openxmlformats.org/drawingml/2006/main"/>
+          <a:bodyPr/>
+          <a:lstStyle/>
+          <a:p>
+            <a:endParaRPr/>
+          </a:p>
         </p:txBody>
       </p:sp>
       <p:sp>
         <p:nvSpPr>
           <p:cNvPr id="4" name="Slide Image Placeholder"/>
-          <p:cNvSpPr/>
+          <p:cNvSpPr>
+            <a:spLocks noGrp="1" noRot="1" noChangeAspect="1"/>
+          </p:cNvSpPr>
           <p:nvPr>
             <p:ph type="sldImg" idx="2"/>
           </p:nvPr>
         </p:nvSpPr>
         <p:spPr>
-          <a:prstGeom xmlns:a="http://schemas.openxmlformats.org/drawingml/2006/main" prst="rect">
+          <a:prstGeom prst="rect">
             <a:avLst/>
           </a:prstGeom>
         </p:spPr>
         <p:txBody>
-          <a:bodyPr xmlns:a="http://schemas.openxmlformats.org/drawingml/2006/main"/>
-          <a:lstStyle xmlns:a="http://schemas.openxmlformats.org/drawingml/2006/main"/>
-          <a:p xmlns:a="http://schemas.openxmlformats.org/drawingml/2006/main"/>
+          <a:bodyPr/>
+          <a:lstStyle/>
+          <a:p>
+            <a:endParaRPr/>
+          </a:p>
         </p:txBody>
       </p:sp>
       <p:sp>
         <p:nvSpPr>
           <p:cNvPr id="5" name="Notes Placeholder"/>
-          <p:cNvSpPr/>
+          <p:cNvSpPr>
+            <a:spLocks noGrp="1"/>
+          </p:cNvSpPr>
           <p:nvPr>
             <p:ph type="body" sz="quarter" idx="3"/>
           </p:nvPr>
         </p:nvSpPr>
         <p:spPr>
-          <a:prstGeom xmlns:a="http://schemas.openxmlformats.org/drawingml/2006/main" prst="rect">
+          <a:prstGeom prst="rect">
             <a:avLst/>
           </a:prstGeom>
         </p:spPr>
         <p:txBody>
-          <a:bodyPr xmlns:a="http://schemas.openxmlformats.org/drawingml/2006/main"/>
-          <a:lstStyle xmlns:a="http://schemas.openxmlformats.org/drawingml/2006/main"/>
-          <a:p xmlns:a="http://schemas.openxmlformats.org/drawingml/2006/main"/>
+          <a:bodyPr/>
+          <a:lstStyle/>
+          <a:p>
+            <a:endParaRPr/>
+          </a:p>
         </p:txBody>
       </p:sp>
       <p:sp>
         <p:nvSpPr>
           <p:cNvPr id="6" name="Footer Placeholder"/>
-          <p:cNvSpPr/>
+          <p:cNvSpPr>
+            <a:spLocks noGrp="1"/>
+          </p:cNvSpPr>
           <p:nvPr>
             <p:ph type="ftr" sz="quarter" idx="4"/>
           </p:nvPr>
         </p:nvSpPr>
         <p:spPr>
-          <a:prstGeom xmlns:a="http://schemas.openxmlformats.org/drawingml/2006/main" prst="rect">
+          <a:prstGeom prst="rect">
             <a:avLst/>
           </a:prstGeom>
         </p:spPr>
         <p:txBody>
-          <a:bodyPr xmlns:a="http://schemas.openxmlformats.org/drawingml/2006/main"/>
-          <a:lstStyle xmlns:a="http://schemas.openxmlformats.org/drawingml/2006/main"/>
-          <a:p xmlns:a="http://schemas.openxmlformats.org/drawingml/2006/main"/>
+          <a:bodyPr/>
+          <a:lstStyle/>
+          <a:p>
+            <a:endParaRPr/>
+          </a:p>
         </p:txBody>
       </p:sp>
       <p:sp>
         <p:nvSpPr>
           <p:cNvPr id="7" name="Slide Number Placeholder"/>
-          <p:cNvSpPr/>
+          <p:cNvSpPr>
+            <a:spLocks noGrp="1"/>
+          </p:cNvSpPr>
           <p:nvPr>
             <p:ph type="sldNum" sz="quarter" idx="5"/>
           </p:nvPr>
         </p:nvSpPr>
         <p:spPr>
-          <a:prstGeom xmlns:a="http://schemas.openxmlformats.org/drawingml/2006/main" prst="rect">
+          <a:prstGeom prst="rect">
             <a:avLst/>
           </a:prstGeom>
         </p:spPr>
         <p:txBody>
-          <a:bodyPr xmlns:a="http://schemas.openxmlformats.org/drawingml/2006/main"/>
-          <a:lstStyle xmlns:a="http://schemas.openxmlformats.org/drawingml/2006/main"/>
-          <a:p xmlns:a="http://schemas.openxmlformats.org/drawingml/2006/main"/>
+          <a:bodyPr/>
+          <a:lstStyle/>
+          <a:p>
+            <a:endParaRPr/>
+          </a:p>
         </p:txBody>
       </p:sp>
     </p:spTree>
   </p:cSld>
   <p:clrMap bg1="lt1" tx1="dk1" bg2="lt2" tx2="dk2" accent1="accent1" accent2="accent2" accent3="accent3" accent4="accent4" accent5="accent5" accent6="accent6" hlink="hlink" folHlink="folHlink"/>
   <p:notesStyle>
-    <a:lvl1pPr xmlns:a="http://schemas.openxmlformats.org/drawingml/2006/main" marL="0" algn="l" defTabSz="914400" rtl="0" eaLnBrk="1" latinLnBrk="0" hangingPunct="1">
+    <a:lvl1pPr marL="0" algn="l" defTabSz="914400" rtl="0" eaLnBrk="1" latinLnBrk="0" hangingPunct="1">
       <a:defRPr sz="1200" kern="1200"/>
     </a:lvl1pPr>
   </p:notesStyle>
 </p:notesMaster>
 </file>
 
-<file path=ppt/notesMasters/theme/theme3.xml><?xml version="1.0" encoding="utf-8"?>
-<a:theme xmlns:a="http://schemas.openxmlformats.org/drawingml/2006/main" name="Office Theme">
-  <a:themeElements>
-    <a:clrScheme name="Office">
-      <a:dk1>
-        <a:sysClr val="windowText" lastClr="000000"/>
-      </a:dk1>
-      <a:lt1>
-        <a:sysClr val="window" lastClr="FFFFFF"/>
-      </a:lt1>
-      <a:dk2>
-        <a:srgbClr val="1F497D"/>
-      </a:dk2>
-      <a:lt2>
-        <a:srgbClr val="EEECE1"/>
-      </a:lt2>
-      <a:accent1>
-        <a:srgbClr val="4F81BD"/>
-      </a:accent1>
-      <a:accent2>
-        <a:srgbClr val="C0504D"/>
-      </a:accent2>
-      <a:accent3>
-        <a:srgbClr val="9BBB59"/>
-      </a:accent3>
-      <a:accent4>
-        <a:srgbClr val="8064A2"/>
-      </a:accent4>
-      <a:accent5>
-        <a:srgbClr val="4BACC6"/>
-      </a:accent5>
-      <a:accent6>
-        <a:srgbClr val="F79646"/>
-      </a:accent6>
-      <a:hlink>
-        <a:srgbClr val="0000FF"/>
-      </a:hlink>
-      <a:folHlink>
-        <a:srgbClr val="800080"/>
-      </a:folHlink>
-    </a:clrScheme>
-    <a:fontScheme name="Office">
-      <a:majorFont>
-        <a:latin typeface="Calibri"/>
-        <a:ea typeface=""/>
-        <a:cs typeface=""/>
-        <a:font script="Jpan" typeface="ＭＳ Ｐゴシック"/>
-        <a:font script="Hang" typeface="맑은 고딕"/>
-        <a:font script="Hans" typeface="宋体"/>
-        <a:font script="Hant" typeface="新細明體"/>
-        <a:font script="Arab" typeface="Times New Roman"/>
-        <a:font script="Hebr" typeface="Times New Roman"/>
-        <a:font script="Thai" typeface="Angsana New"/>
-        <a:font script="Ethi" typeface="Nyala"/>
-        <a:font script="Beng" typeface="Vrinda"/>
-        <a:font script="Gujr" typeface="Shruti"/>
-        <a:font script="Khmr" typeface="MoolBoran"/>
-        <a:font script="Knda" typeface="Tunga"/>
-        <a:font script="Guru" typeface="Raavi"/>
-        <a:font script="Cans" typeface="Euphemia"/>
-        <a:font script="Cher" typeface="Plantagenet Cherokee"/>
-        <a:font script="Yiii" typeface="Microsoft Yi Baiti"/>
-        <a:font script="Tibt" typeface="Microsoft Himalaya"/>
-        <a:font script="Thaa" typeface="MV Boli"/>
-        <a:font script="Deva" typeface="Mangal"/>
-        <a:font script="Telu" typeface="Gautami"/>
-        <a:font script="Taml" typeface="Latha"/>
-        <a:font script="Syrc" typeface="Estrangelo Edessa"/>
-        <a:font script="Orya" typeface="Kalinga"/>
-        <a:font script="Mlym" typeface="Kartika"/>
-        <a:font script="Laoo" typeface="DokChampa"/>
-        <a:font script="Sinh" typeface="Iskoola Pota"/>
-        <a:font script="Mong" typeface="Mongolian Baiti"/>
-        <a:font script="Viet" typeface="Times New Roman"/>
-        <a:font script="Uigh" typeface="Microsoft Uighur"/>
-      </a:majorFont>
-      <a:minorFont>
-        <a:latin typeface="Calibri"/>
-        <a:ea typeface=""/>
-        <a:cs typeface=""/>
-        <a:font script="Jpan" typeface="ＭＳ Ｐゴシック"/>
-        <a:font script="Hang" typeface="맑은 고딕"/>
-        <a:font script="Hans" typeface="宋体"/>
-        <a:font script="Hant" typeface="新細明體"/>
-        <a:font script="Arab" typeface="Arial"/>
-        <a:font script="Hebr" typeface="Arial"/>
-        <a:font script="Thai" typeface="Cordia New"/>
-        <a:font script="Ethi" typeface="Nyala"/>
-        <a:font script="Beng" typeface="Vrinda"/>
-        <a:font script="Gujr" typeface="Shruti"/>
-        <a:font script="Khmr" typeface="DaunPenh"/>
-        <a:font script="Knda" typeface="Tunga"/>
-        <a:font script="Guru" typeface="Raavi"/>
-        <a:font script="Cans" typeface="Euphemia"/>
-        <a:font script="Cher" typeface="Plantagenet Cherokee"/>
-        <a:font script="Yiii" typeface="Microsoft Yi Baiti"/>
-        <a:font script="Tibt" typeface="Microsoft Himalaya"/>
-        <a:font script="Thaa" typeface="MV Boli"/>
-        <a:font script="Deva" typeface="Mangal"/>
-        <a:font script="Telu" typeface="Gautami"/>
-        <a:font script="Taml" typeface="Latha"/>
-        <a:font script="Syrc" typeface="Estrangelo Edessa"/>
-        <a:font script="Orya" typeface="Kalinga"/>
-        <a:font script="Mlym" typeface="Kartika"/>
-        <a:font script="Laoo" typeface="DokChampa"/>
-        <a:font script="Sinh" typeface="Iskoola Pota"/>
-        <a:font script="Mong" typeface="Mongolian Baiti"/>
-        <a:font script="Viet" typeface="Arial"/>
-        <a:font script="Uigh" typeface="Microsoft Uighur"/>
-      </a:minorFont>
-    </a:fontScheme>
-    <a:fmtScheme name="Office">
-      <a:fillStyleLst>
-        <a:solidFill>
-          <a:schemeClr val="phClr"/>
-        </a:solidFill>
-        <a:gradFill rotWithShape="1">
-          <a:gsLst>
-            <a:gs pos="0">
-              <a:schemeClr val="phClr">
-                <a:tint val="50000"/>
-                <a:satMod val="300000"/>
-              </a:schemeClr>
-            </a:gs>
-            <a:gs pos="35000">
-              <a:schemeClr val="phClr">
-                <a:tint val="37000"/>
-                <a:satMod val="300000"/>
-              </a:schemeClr>
-            </a:gs>
-            <a:gs pos="100000">
-              <a:schemeClr val="phClr">
-                <a:tint val="15000"/>
-                <a:satMod val="350000"/>
-              </a:schemeClr>
-            </a:gs>
-          </a:gsLst>
-          <a:lin ang="16200000" scaled="1"/>
-        </a:gradFill>
-        <a:gradFill rotWithShape="1">
-          <a:gsLst>
-            <a:gs pos="0">
-              <a:schemeClr val="phClr">
-                <a:shade val="51000"/>
-                <a:satMod val="130000"/>
-              </a:schemeClr>
-            </a:gs>
-            <a:gs pos="80000">
-              <a:schemeClr val="phClr">
-                <a:shade val="93000"/>
-                <a:satMod val="130000"/>
-              </a:schemeClr>
-            </a:gs>
-            <a:gs pos="100000">
-              <a:schemeClr val="phClr">
-                <a:shade val="94000"/>
-                <a:satMod val="135000"/>
-              </a:schemeClr>
-            </a:gs>
-          </a:gsLst>
-          <a:lin ang="16200000" scaled="0"/>
-        </a:gradFill>
-      </a:fillStyleLst>
-      <a:lnStyleLst>
-        <a:ln w="9525">
-          <a:solidFill>
-            <a:schemeClr val="phClr">
-              <a:shade val="95000"/>
-              <a:satMod val="105000"/>
-            </a:schemeClr>
-          </a:solidFill>
-          <a:prstDash val="solid"/>
-        </a:ln>
-        <a:ln w="25400">
-          <a:solidFill>
-            <a:schemeClr val="phClr"/>
-          </a:solidFill>
-          <a:prstDash val="solid"/>
-        </a:ln>
-        <a:ln w="38100">
-          <a:solidFill>
-            <a:schemeClr val="phClr"/>
-          </a:solidFill>
-          <a:prstDash val="solid"/>
-        </a:ln>
-      </a:lnStyleLst>
-      <a:effectStyleLst>
-        <a:effectStyle>
-          <a:effectLst>
-            <a:outerShdw blurRad="40000" dist="20000" dir="5400000" rotWithShape="0">
-              <a:srgbClr val="000000">
-                <a:alpha val="38000"/>
-              </a:srgbClr>
-            </a:outerShdw>
-          </a:effectLst>
-        </a:effectStyle>
-        <a:effectStyle>
-          <a:effectLst>
-            <a:outerShdw blurRad="40000" dist="23000" dir="5400000" rotWithShape="0">
-              <a:srgbClr val="000000">
-                <a:alpha val="35000"/>
-              </a:srgbClr>
-            </a:outerShdw>
-          </a:effectLst>
-        </a:effectStyle>
-        <a:effectStyle>
-          <a:effectLst>
-            <a:outerShdw blurRad="40000" dist="23000" dir="5400000" rotWithShape="0">
-              <a:srgbClr val="000000">
-                <a:alpha val="35000"/>
-              </a:srgbClr>
-            </a:outerShdw>
-          </a:effectLst>
-        </a:effectStyle>
-      </a:effectStyleLst>
-      <a:bgFillStyleLst>
-        <a:solidFill>
-          <a:schemeClr val="phClr"/>
-        </a:solidFill>
-        <a:gradFill rotWithShape="1">
-          <a:gsLst>
-            <a:gs pos="0">
-              <a:schemeClr val="phClr">
-                <a:tint val="40000"/>
-                <a:satMod val="350000"/>
-              </a:schemeClr>
-            </a:gs>
-            <a:gs pos="40000">
-              <a:schemeClr val="phClr">
-                <a:tint val="45000"/>
-                <a:shade val="99000"/>
-                <a:satMod val="350000"/>
-              </a:schemeClr>
-            </a:gs>
-            <a:gs pos="100000">
-              <a:schemeClr val="phClr">
-                <a:shade val="20000"/>
-                <a:satMod val="255000"/>
-              </a:schemeClr>
-            </a:gs>
-          </a:gsLst>
-          <a:path path="circle">
-            <a:fillToRect l="50000" t="-80000" r="50000" b="180000"/>
-          </a:path>
-        </a:gradFill>
-        <a:gradFill rotWithShape="1">
-          <a:gsLst>
-            <a:gs pos="0">
-              <a:schemeClr val="phClr">
-                <a:tint val="80000"/>
-                <a:satMod val="300000"/>
-              </a:schemeClr>
-            </a:gs>
-            <a:gs pos="100000">
-              <a:schemeClr val="phClr">
-                <a:shade val="30000"/>
-                <a:satMod val="200000"/>
-              </a:schemeClr>
-            </a:gs>
-          </a:gsLst>
-          <a:path path="circle">
-            <a:fillToRect l="50000" t="50000" r="50000" b="50000"/>
-          </a:path>
-        </a:gradFill>
-      </a:bgFillStyleLst>
-    </a:fmtScheme>
-  </a:themeElements>
-</a:theme>
-</file>
-
 <file path=ppt/notesSlides/notesSlide1.xml><?xml version="1.0" encoding="utf-8"?>
-<p:notes xmlns:p="http://schemas.openxmlformats.org/presentationml/2006/main">
+<p:notes xmlns:a="http://schemas.openxmlformats.org/drawingml/2006/main" xmlns:r="http://schemas.openxmlformats.org/officeDocument/2006/relationships" xmlns:p="http://schemas.openxmlformats.org/presentationml/2006/main">
   <p:cSld>
     <p:spTree>
       <p:nvGrpSpPr>
@@ -545,16 +323,21 @@
         <p:nvPr/>
       </p:nvGrpSpPr>
       <p:grpSpPr>
-        <a:xfrm xmlns:a="http://schemas.openxmlformats.org/drawingml/2006/main"/>
+        <a:xfrm>
+          <a:off x="0" y="0"/>
+          <a:ext cx="0" cy="0"/>
+          <a:chOff x="0" y="0"/>
+          <a:chExt cx="0" cy="0"/>
+        </a:xfrm>
       </p:grpSpPr>
       <p:sp>
         <p:nvSpPr>
           <p:cNvPr id="2" name="Slide Image Placeholder 1"/>
           <p:cNvSpPr>
-            <a:spLocks xmlns:a="http://schemas.openxmlformats.org/drawingml/2006/main" noGrp="1"/>
-          </p:cNvSpPr>
-          <p:nvPr>
-            <p:ph type="sldImg" idx="0"/>
+            <a:spLocks noGrp="1" noRot="1" noChangeAspect="1"/>
+          </p:cNvSpPr>
+          <p:nvPr>
+            <p:ph type="sldImg"/>
           </p:nvPr>
         </p:nvSpPr>
         <p:spPr/>
@@ -563,7 +346,7 @@
         <p:nvSpPr>
           <p:cNvPr id="3" name="Notes Placeholder 2"/>
           <p:cNvSpPr>
-            <a:spLocks xmlns:a="http://schemas.openxmlformats.org/drawingml/2006/main" noGrp="1"/>
+            <a:spLocks noGrp="1"/>
           </p:cNvSpPr>
           <p:nvPr>
             <p:ph type="body" idx="1"/>
@@ -571,9 +354,9 @@
         </p:nvSpPr>
         <p:spPr/>
         <p:txBody>
-          <a:bodyPr xmlns:a="http://schemas.openxmlformats.org/drawingml/2006/main"/>
-          <a:lstStyle xmlns:a="http://schemas.openxmlformats.org/drawingml/2006/main"/>
-          <a:p xmlns:a="http://schemas.openxmlformats.org/drawingml/2006/main">
+          <a:bodyPr/>
+          <a:lstStyle/>
+          <a:p>
             <a:endParaRPr/>
           </a:p>
         </p:txBody>
@@ -582,7 +365,7 @@
         <p:nvSpPr>
           <p:cNvPr id="4" name="Slide Number Placeholder 3"/>
           <p:cNvSpPr>
-            <a:spLocks xmlns:a="http://schemas.openxmlformats.org/drawingml/2006/main" noGrp="1"/>
+            <a:spLocks noGrp="1"/>
           </p:cNvSpPr>
           <p:nvPr>
             <p:ph type="sldNum" idx="5"/>
@@ -590,21 +373,23 @@
         </p:nvSpPr>
         <p:spPr/>
         <p:txBody>
-          <a:bodyPr xmlns:a="http://schemas.openxmlformats.org/drawingml/2006/main"/>
-          <a:lstStyle xmlns:a="http://schemas.openxmlformats.org/drawingml/2006/main"/>
-          <a:p xmlns:a="http://schemas.openxmlformats.org/drawingml/2006/main"/>
+          <a:bodyPr/>
+          <a:lstStyle/>
+          <a:p>
+            <a:endParaRPr/>
+          </a:p>
         </p:txBody>
       </p:sp>
     </p:spTree>
   </p:cSld>
   <p:clrMapOvr>
-    <a:masterClrMapping xmlns:a="http://schemas.openxmlformats.org/drawingml/2006/main"/>
+    <a:masterClrMapping/>
   </p:clrMapOvr>
 </p:notes>
 </file>
 
 <file path=ppt/notesSlides/notesSlide2.xml><?xml version="1.0" encoding="utf-8"?>
-<p:notes xmlns:p="http://schemas.openxmlformats.org/presentationml/2006/main">
+<p:notes xmlns:a="http://schemas.openxmlformats.org/drawingml/2006/main" xmlns:r="http://schemas.openxmlformats.org/officeDocument/2006/relationships" xmlns:p="http://schemas.openxmlformats.org/presentationml/2006/main">
   <p:cSld>
     <p:spTree>
       <p:nvGrpSpPr>
@@ -613,16 +398,21 @@
         <p:nvPr/>
       </p:nvGrpSpPr>
       <p:grpSpPr>
-        <a:xfrm xmlns:a="http://schemas.openxmlformats.org/drawingml/2006/main"/>
+        <a:xfrm>
+          <a:off x="0" y="0"/>
+          <a:ext cx="0" cy="0"/>
+          <a:chOff x="0" y="0"/>
+          <a:chExt cx="0" cy="0"/>
+        </a:xfrm>
       </p:grpSpPr>
       <p:sp>
         <p:nvSpPr>
           <p:cNvPr id="2" name="Slide Image Placeholder 1"/>
           <p:cNvSpPr>
-            <a:spLocks xmlns:a="http://schemas.openxmlformats.org/drawingml/2006/main" noGrp="1"/>
-          </p:cNvSpPr>
-          <p:nvPr>
-            <p:ph type="sldImg" idx="0"/>
+            <a:spLocks noGrp="1" noRot="1" noChangeAspect="1"/>
+          </p:cNvSpPr>
+          <p:nvPr>
+            <p:ph type="sldImg"/>
           </p:nvPr>
         </p:nvSpPr>
         <p:spPr/>
@@ -631,7 +421,7 @@
         <p:nvSpPr>
           <p:cNvPr id="3" name="Notes Placeholder 2"/>
           <p:cNvSpPr>
-            <a:spLocks xmlns:a="http://schemas.openxmlformats.org/drawingml/2006/main" noGrp="1"/>
+            <a:spLocks noGrp="1"/>
           </p:cNvSpPr>
           <p:nvPr>
             <p:ph type="body" idx="1"/>
@@ -639,9 +429,9 @@
         </p:nvSpPr>
         <p:spPr/>
         <p:txBody>
-          <a:bodyPr xmlns:a="http://schemas.openxmlformats.org/drawingml/2006/main"/>
-          <a:lstStyle xmlns:a="http://schemas.openxmlformats.org/drawingml/2006/main"/>
-          <a:p xmlns:a="http://schemas.openxmlformats.org/drawingml/2006/main">
+          <a:bodyPr/>
+          <a:lstStyle/>
+          <a:p>
             <a:endParaRPr/>
           </a:p>
         </p:txBody>
@@ -650,7 +440,7 @@
         <p:nvSpPr>
           <p:cNvPr id="4" name="Slide Number Placeholder 3"/>
           <p:cNvSpPr>
-            <a:spLocks xmlns:a="http://schemas.openxmlformats.org/drawingml/2006/main" noGrp="1"/>
+            <a:spLocks noGrp="1"/>
           </p:cNvSpPr>
           <p:nvPr>
             <p:ph type="sldNum" idx="5"/>
@@ -658,21 +448,23 @@
         </p:nvSpPr>
         <p:spPr/>
         <p:txBody>
-          <a:bodyPr xmlns:a="http://schemas.openxmlformats.org/drawingml/2006/main"/>
-          <a:lstStyle xmlns:a="http://schemas.openxmlformats.org/drawingml/2006/main"/>
-          <a:p xmlns:a="http://schemas.openxmlformats.org/drawingml/2006/main"/>
+          <a:bodyPr/>
+          <a:lstStyle/>
+          <a:p>
+            <a:endParaRPr/>
+          </a:p>
         </p:txBody>
       </p:sp>
     </p:spTree>
   </p:cSld>
   <p:clrMapOvr>
-    <a:masterClrMapping xmlns:a="http://schemas.openxmlformats.org/drawingml/2006/main"/>
+    <a:masterClrMapping/>
   </p:clrMapOvr>
 </p:notes>
 </file>
 
 <file path=ppt/notesSlides/notesSlide3.xml><?xml version="1.0" encoding="utf-8"?>
-<p:notes xmlns:p="http://schemas.openxmlformats.org/presentationml/2006/main">
+<p:notes xmlns:a="http://schemas.openxmlformats.org/drawingml/2006/main" xmlns:r="http://schemas.openxmlformats.org/officeDocument/2006/relationships" xmlns:p="http://schemas.openxmlformats.org/presentationml/2006/main">
   <p:cSld>
     <p:spTree>
       <p:nvGrpSpPr>
@@ -681,16 +473,21 @@
         <p:nvPr/>
       </p:nvGrpSpPr>
       <p:grpSpPr>
-        <a:xfrm xmlns:a="http://schemas.openxmlformats.org/drawingml/2006/main"/>
+        <a:xfrm>
+          <a:off x="0" y="0"/>
+          <a:ext cx="0" cy="0"/>
+          <a:chOff x="0" y="0"/>
+          <a:chExt cx="0" cy="0"/>
+        </a:xfrm>
       </p:grpSpPr>
       <p:sp>
         <p:nvSpPr>
           <p:cNvPr id="2" name="Slide Image Placeholder 1"/>
           <p:cNvSpPr>
-            <a:spLocks xmlns:a="http://schemas.openxmlformats.org/drawingml/2006/main" noGrp="1"/>
-          </p:cNvSpPr>
-          <p:nvPr>
-            <p:ph type="sldImg" idx="0"/>
+            <a:spLocks noGrp="1" noRot="1" noChangeAspect="1"/>
+          </p:cNvSpPr>
+          <p:nvPr>
+            <p:ph type="sldImg"/>
           </p:nvPr>
         </p:nvSpPr>
         <p:spPr/>
@@ -699,7 +496,7 @@
         <p:nvSpPr>
           <p:cNvPr id="3" name="Notes Placeholder 2"/>
           <p:cNvSpPr>
-            <a:spLocks xmlns:a="http://schemas.openxmlformats.org/drawingml/2006/main" noGrp="1"/>
+            <a:spLocks noGrp="1"/>
           </p:cNvSpPr>
           <p:nvPr>
             <p:ph type="body" idx="1"/>
@@ -707,40 +504,42 @@
         </p:nvSpPr>
         <p:spPr/>
         <p:txBody>
-          <a:bodyPr xmlns:a="http://schemas.openxmlformats.org/drawingml/2006/main"/>
-          <a:lstStyle xmlns:a="http://schemas.openxmlformats.org/drawingml/2006/main"/>
-          <a:p xmlns:a="http://schemas.openxmlformats.org/drawingml/2006/main">
+          <a:bodyPr/>
+          <a:lstStyle/>
+          <a:p>
+            <a:endParaRPr dirty="0"/>
+          </a:p>
+        </p:txBody>
+      </p:sp>
+      <p:sp>
+        <p:nvSpPr>
+          <p:cNvPr id="4" name="Slide Number Placeholder 3"/>
+          <p:cNvSpPr>
+            <a:spLocks noGrp="1"/>
+          </p:cNvSpPr>
+          <p:nvPr>
+            <p:ph type="sldNum" idx="5"/>
+          </p:nvPr>
+        </p:nvSpPr>
+        <p:spPr/>
+        <p:txBody>
+          <a:bodyPr/>
+          <a:lstStyle/>
+          <a:p>
             <a:endParaRPr/>
           </a:p>
-        </p:txBody>
-      </p:sp>
-      <p:sp>
-        <p:nvSpPr>
-          <p:cNvPr id="4" name="Slide Number Placeholder 3"/>
-          <p:cNvSpPr>
-            <a:spLocks xmlns:a="http://schemas.openxmlformats.org/drawingml/2006/main" noGrp="1"/>
-          </p:cNvSpPr>
-          <p:nvPr>
-            <p:ph type="sldNum" idx="5"/>
-          </p:nvPr>
-        </p:nvSpPr>
-        <p:spPr/>
-        <p:txBody>
-          <a:bodyPr xmlns:a="http://schemas.openxmlformats.org/drawingml/2006/main"/>
-          <a:lstStyle xmlns:a="http://schemas.openxmlformats.org/drawingml/2006/main"/>
-          <a:p xmlns:a="http://schemas.openxmlformats.org/drawingml/2006/main"/>
         </p:txBody>
       </p:sp>
     </p:spTree>
   </p:cSld>
   <p:clrMapOvr>
-    <a:masterClrMapping xmlns:a="http://schemas.openxmlformats.org/drawingml/2006/main"/>
+    <a:masterClrMapping/>
   </p:clrMapOvr>
 </p:notes>
 </file>
 
 <file path=ppt/notesSlides/notesSlide4.xml><?xml version="1.0" encoding="utf-8"?>
-<p:notes xmlns:p="http://schemas.openxmlformats.org/presentationml/2006/main">
+<p:notes xmlns:a="http://schemas.openxmlformats.org/drawingml/2006/main" xmlns:r="http://schemas.openxmlformats.org/officeDocument/2006/relationships" xmlns:p="http://schemas.openxmlformats.org/presentationml/2006/main">
   <p:cSld>
     <p:spTree>
       <p:nvGrpSpPr>
@@ -749,16 +548,21 @@
         <p:nvPr/>
       </p:nvGrpSpPr>
       <p:grpSpPr>
-        <a:xfrm xmlns:a="http://schemas.openxmlformats.org/drawingml/2006/main"/>
+        <a:xfrm>
+          <a:off x="0" y="0"/>
+          <a:ext cx="0" cy="0"/>
+          <a:chOff x="0" y="0"/>
+          <a:chExt cx="0" cy="0"/>
+        </a:xfrm>
       </p:grpSpPr>
       <p:sp>
         <p:nvSpPr>
           <p:cNvPr id="2" name="Slide Image Placeholder 1"/>
           <p:cNvSpPr>
-            <a:spLocks xmlns:a="http://schemas.openxmlformats.org/drawingml/2006/main" noGrp="1"/>
-          </p:cNvSpPr>
-          <p:nvPr>
-            <p:ph type="sldImg" idx="0"/>
+            <a:spLocks noGrp="1" noRot="1" noChangeAspect="1"/>
+          </p:cNvSpPr>
+          <p:nvPr>
+            <p:ph type="sldImg"/>
           </p:nvPr>
         </p:nvSpPr>
         <p:spPr/>
@@ -767,7 +571,7 @@
         <p:nvSpPr>
           <p:cNvPr id="3" name="Notes Placeholder 2"/>
           <p:cNvSpPr>
-            <a:spLocks xmlns:a="http://schemas.openxmlformats.org/drawingml/2006/main" noGrp="1"/>
+            <a:spLocks noGrp="1"/>
           </p:cNvSpPr>
           <p:nvPr>
             <p:ph type="body" idx="1"/>
@@ -775,9 +579,9 @@
         </p:nvSpPr>
         <p:spPr/>
         <p:txBody>
-          <a:bodyPr xmlns:a="http://schemas.openxmlformats.org/drawingml/2006/main"/>
-          <a:lstStyle xmlns:a="http://schemas.openxmlformats.org/drawingml/2006/main"/>
-          <a:p xmlns:a="http://schemas.openxmlformats.org/drawingml/2006/main">
+          <a:bodyPr/>
+          <a:lstStyle/>
+          <a:p>
             <a:endParaRPr/>
           </a:p>
         </p:txBody>
@@ -786,7 +590,7 @@
         <p:nvSpPr>
           <p:cNvPr id="4" name="Slide Number Placeholder 3"/>
           <p:cNvSpPr>
-            <a:spLocks xmlns:a="http://schemas.openxmlformats.org/drawingml/2006/main" noGrp="1"/>
+            <a:spLocks noGrp="1"/>
           </p:cNvSpPr>
           <p:nvPr>
             <p:ph type="sldNum" idx="5"/>
@@ -794,21 +598,23 @@
         </p:nvSpPr>
         <p:spPr/>
         <p:txBody>
-          <a:bodyPr xmlns:a="http://schemas.openxmlformats.org/drawingml/2006/main"/>
-          <a:lstStyle xmlns:a="http://schemas.openxmlformats.org/drawingml/2006/main"/>
-          <a:p xmlns:a="http://schemas.openxmlformats.org/drawingml/2006/main"/>
+          <a:bodyPr/>
+          <a:lstStyle/>
+          <a:p>
+            <a:endParaRPr/>
+          </a:p>
         </p:txBody>
       </p:sp>
     </p:spTree>
   </p:cSld>
   <p:clrMapOvr>
-    <a:masterClrMapping xmlns:a="http://schemas.openxmlformats.org/drawingml/2006/main"/>
+    <a:masterClrMapping/>
   </p:clrMapOvr>
 </p:notes>
 </file>
 
 <file path=ppt/notesSlides/notesSlide5.xml><?xml version="1.0" encoding="utf-8"?>
-<p:notes xmlns:p="http://schemas.openxmlformats.org/presentationml/2006/main">
+<p:notes xmlns:a="http://schemas.openxmlformats.org/drawingml/2006/main" xmlns:r="http://schemas.openxmlformats.org/officeDocument/2006/relationships" xmlns:p="http://schemas.openxmlformats.org/presentationml/2006/main">
   <p:cSld>
     <p:spTree>
       <p:nvGrpSpPr>
@@ -817,16 +623,21 @@
         <p:nvPr/>
       </p:nvGrpSpPr>
       <p:grpSpPr>
-        <a:xfrm xmlns:a="http://schemas.openxmlformats.org/drawingml/2006/main"/>
+        <a:xfrm>
+          <a:off x="0" y="0"/>
+          <a:ext cx="0" cy="0"/>
+          <a:chOff x="0" y="0"/>
+          <a:chExt cx="0" cy="0"/>
+        </a:xfrm>
       </p:grpSpPr>
       <p:sp>
         <p:nvSpPr>
           <p:cNvPr id="2" name="Slide Image Placeholder 1"/>
           <p:cNvSpPr>
-            <a:spLocks xmlns:a="http://schemas.openxmlformats.org/drawingml/2006/main" noGrp="1"/>
-          </p:cNvSpPr>
-          <p:nvPr>
-            <p:ph type="sldImg" idx="0"/>
+            <a:spLocks noGrp="1" noRot="1" noChangeAspect="1"/>
+          </p:cNvSpPr>
+          <p:nvPr>
+            <p:ph type="sldImg"/>
           </p:nvPr>
         </p:nvSpPr>
         <p:spPr/>
@@ -835,7 +646,7 @@
         <p:nvSpPr>
           <p:cNvPr id="3" name="Notes Placeholder 2"/>
           <p:cNvSpPr>
-            <a:spLocks xmlns:a="http://schemas.openxmlformats.org/drawingml/2006/main" noGrp="1"/>
+            <a:spLocks noGrp="1"/>
           </p:cNvSpPr>
           <p:nvPr>
             <p:ph type="body" idx="1"/>
@@ -843,9 +654,9 @@
         </p:nvSpPr>
         <p:spPr/>
         <p:txBody>
-          <a:bodyPr xmlns:a="http://schemas.openxmlformats.org/drawingml/2006/main"/>
-          <a:lstStyle xmlns:a="http://schemas.openxmlformats.org/drawingml/2006/main"/>
-          <a:p xmlns:a="http://schemas.openxmlformats.org/drawingml/2006/main">
+          <a:bodyPr/>
+          <a:lstStyle/>
+          <a:p>
             <a:endParaRPr/>
           </a:p>
         </p:txBody>
@@ -854,7 +665,7 @@
         <p:nvSpPr>
           <p:cNvPr id="4" name="Slide Number Placeholder 3"/>
           <p:cNvSpPr>
-            <a:spLocks xmlns:a="http://schemas.openxmlformats.org/drawingml/2006/main" noGrp="1"/>
+            <a:spLocks noGrp="1"/>
           </p:cNvSpPr>
           <p:nvPr>
             <p:ph type="sldNum" idx="5"/>
@@ -862,21 +673,23 @@
         </p:nvSpPr>
         <p:spPr/>
         <p:txBody>
-          <a:bodyPr xmlns:a="http://schemas.openxmlformats.org/drawingml/2006/main"/>
-          <a:lstStyle xmlns:a="http://schemas.openxmlformats.org/drawingml/2006/main"/>
-          <a:p xmlns:a="http://schemas.openxmlformats.org/drawingml/2006/main"/>
+          <a:bodyPr/>
+          <a:lstStyle/>
+          <a:p>
+            <a:endParaRPr/>
+          </a:p>
         </p:txBody>
       </p:sp>
     </p:spTree>
   </p:cSld>
   <p:clrMapOvr>
-    <a:masterClrMapping xmlns:a="http://schemas.openxmlformats.org/drawingml/2006/main"/>
+    <a:masterClrMapping/>
   </p:clrMapOvr>
 </p:notes>
 </file>
 
 <file path=ppt/slideLayouts/slideLayout1.xml><?xml version="1.0" encoding="utf-8"?>
-<p:sldLayout xmlns:p="http://schemas.openxmlformats.org/presentationml/2006/main" type="title" preserve="1">
+<p:sldLayout xmlns:a="http://schemas.openxmlformats.org/drawingml/2006/main" xmlns:r="http://schemas.openxmlformats.org/officeDocument/2006/relationships" xmlns:p="http://schemas.openxmlformats.org/presentationml/2006/main" type="title" preserve="1">
   <p:cSld name="Title Slide">
     <p:spTree>
       <p:nvGrpSpPr>
@@ -885,34 +698,39 @@
         <p:nvPr/>
       </p:nvGrpSpPr>
       <p:grpSpPr>
-        <a:xfrm xmlns:a="http://schemas.openxmlformats.org/drawingml/2006/main"/>
+        <a:xfrm>
+          <a:off x="0" y="0"/>
+          <a:ext cx="0" cy="0"/>
+          <a:chOff x="0" y="0"/>
+          <a:chExt cx="0" cy="0"/>
+        </a:xfrm>
       </p:grpSpPr>
       <p:sp>
         <p:nvSpPr>
           <p:cNvPr id="2" name="Title 1">
-            <a:extLst xmlns:a="http://schemas.openxmlformats.org/drawingml/2006/main">
+            <a:extLst>
               <a:ext uri="{FF2B5EF4-FFF2-40B4-BE49-F238E27FC236}">
                 <a16:creationId xmlns:a16="http://schemas.microsoft.com/office/drawing/2014/main" id="{23C455EA-F2DF-49E5-A480-1E0148B116ED}"/>
               </a:ext>
             </a:extLst>
           </p:cNvPr>
           <p:cNvSpPr>
-            <a:spLocks xmlns:a="http://schemas.openxmlformats.org/drawingml/2006/main" noGrp="1"/>
-          </p:cNvSpPr>
-          <p:nvPr>
-            <p:ph type="ctrTitle" idx="0"/>
+            <a:spLocks noGrp="1"/>
+          </p:cNvSpPr>
+          <p:nvPr>
+            <p:ph type="ctrTitle"/>
           </p:nvPr>
         </p:nvSpPr>
         <p:spPr>
-          <a:xfrm xmlns:a="http://schemas.openxmlformats.org/drawingml/2006/main">
+          <a:xfrm>
             <a:off x="685800" y="2130425"/>
             <a:ext cx="7772400" cy="1470025"/>
           </a:xfrm>
         </p:spPr>
         <p:txBody>
-          <a:bodyPr xmlns:a="http://schemas.openxmlformats.org/drawingml/2006/main"/>
-          <a:lstStyle xmlns:a="http://schemas.openxmlformats.org/drawingml/2006/main"/>
-          <a:p xmlns:a="http://schemas.openxmlformats.org/drawingml/2006/main">
+          <a:bodyPr/>
+          <a:lstStyle/>
+          <a:p>
             <a:r>
               <a:t>Click to edit Master title style</a:t>
             </a:r>
@@ -922,28 +740,28 @@
       <p:sp>
         <p:nvSpPr>
           <p:cNvPr id="3" name="Subtitle 2">
-            <a:extLst xmlns:a="http://schemas.openxmlformats.org/drawingml/2006/main">
+            <a:extLst>
               <a:ext uri="{FF2B5EF4-FFF2-40B4-BE49-F238E27FC236}">
                 <a16:creationId xmlns:a16="http://schemas.microsoft.com/office/drawing/2014/main" id="{65C57C57-7108-48AE-8482-E2EBC28C7CBA}"/>
               </a:ext>
             </a:extLst>
           </p:cNvPr>
           <p:cNvSpPr>
-            <a:spLocks xmlns:a="http://schemas.openxmlformats.org/drawingml/2006/main" noGrp="1"/>
+            <a:spLocks noGrp="1"/>
           </p:cNvSpPr>
           <p:nvPr>
             <p:ph type="subTitle" idx="1"/>
           </p:nvPr>
         </p:nvSpPr>
         <p:spPr>
-          <a:xfrm xmlns:a="http://schemas.openxmlformats.org/drawingml/2006/main">
+          <a:xfrm>
             <a:off x="1371600" y="3886200"/>
             <a:ext cx="6400800" cy="1752600"/>
           </a:xfrm>
         </p:spPr>
         <p:txBody>
-          <a:bodyPr xmlns:a="http://schemas.openxmlformats.org/drawingml/2006/main"/>
-          <a:lstStyle xmlns:a="http://schemas.openxmlformats.org/drawingml/2006/main">
+          <a:bodyPr/>
+          <a:lstStyle>
             <a:lvl1pPr marL="0" indent="0" algn="ctr">
               <a:buNone/>
               <a:defRPr>
@@ -1035,7 +853,7 @@
               </a:defRPr>
             </a:lvl9pPr>
           </a:lstStyle>
-          <a:p xmlns:a="http://schemas.openxmlformats.org/drawingml/2006/main">
+          <a:p>
             <a:r>
               <a:t>Click to edit Master subtitle style</a:t>
             </a:r>
@@ -1045,14 +863,14 @@
       <p:sp>
         <p:nvSpPr>
           <p:cNvPr id="4" name="Date Placeholder 3">
-            <a:extLst xmlns:a="http://schemas.openxmlformats.org/drawingml/2006/main">
+            <a:extLst>
               <a:ext uri="{FF2B5EF4-FFF2-40B4-BE49-F238E27FC236}">
                 <a16:creationId xmlns:a16="http://schemas.microsoft.com/office/drawing/2014/main" id="{DE546BDF-8B59-4237-938D-378112080A73}"/>
               </a:ext>
             </a:extLst>
           </p:cNvPr>
           <p:cNvSpPr>
-            <a:spLocks xmlns:a="http://schemas.openxmlformats.org/drawingml/2006/main" noGrp="1"/>
+            <a:spLocks noGrp="1"/>
           </p:cNvSpPr>
           <p:nvPr>
             <p:ph type="dt" idx="10"/>
@@ -1060,11 +878,11 @@
         </p:nvSpPr>
         <p:spPr/>
         <p:txBody>
-          <a:bodyPr xmlns:a="http://schemas.openxmlformats.org/drawingml/2006/main"/>
-          <a:lstStyle xmlns:a="http://schemas.openxmlformats.org/drawingml/2006/main"/>
-          <a:p xmlns:a="http://schemas.openxmlformats.org/drawingml/2006/main">
+          <a:bodyPr/>
+          <a:lstStyle/>
+          <a:p>
             <a:fld id="{1D8BD707-D9CF-40AE-B4C6-C98DA3205C09}" type="datetimeFigureOut">
-              <a:t>2026-09-30</a:t>
+              <a:t>2026-10-06</a:t>
             </a:fld>
             <a:endParaRPr/>
           </a:p>
@@ -1073,14 +891,14 @@
       <p:sp>
         <p:nvSpPr>
           <p:cNvPr id="5" name="Footer Placeholder 4">
-            <a:extLst xmlns:a="http://schemas.openxmlformats.org/drawingml/2006/main">
+            <a:extLst>
               <a:ext uri="{FF2B5EF4-FFF2-40B4-BE49-F238E27FC236}">
                 <a16:creationId xmlns:a16="http://schemas.microsoft.com/office/drawing/2014/main" id="{51FEA10E-00D0-43D3-85B1-9EE5326DFDFD}"/>
               </a:ext>
             </a:extLst>
           </p:cNvPr>
           <p:cNvSpPr>
-            <a:spLocks xmlns:a="http://schemas.openxmlformats.org/drawingml/2006/main" noGrp="1"/>
+            <a:spLocks noGrp="1"/>
           </p:cNvSpPr>
           <p:nvPr>
             <p:ph type="ftr" idx="11"/>
@@ -1088,9 +906,9 @@
         </p:nvSpPr>
         <p:spPr/>
         <p:txBody>
-          <a:bodyPr xmlns:a="http://schemas.openxmlformats.org/drawingml/2006/main"/>
-          <a:lstStyle xmlns:a="http://schemas.openxmlformats.org/drawingml/2006/main"/>
-          <a:p xmlns:a="http://schemas.openxmlformats.org/drawingml/2006/main">
+          <a:bodyPr/>
+          <a:lstStyle/>
+          <a:p>
             <a:endParaRPr/>
           </a:p>
         </p:txBody>
@@ -1098,14 +916,14 @@
       <p:sp>
         <p:nvSpPr>
           <p:cNvPr id="6" name="Slide Number Placeholder 5">
-            <a:extLst xmlns:a="http://schemas.openxmlformats.org/drawingml/2006/main">
+            <a:extLst>
               <a:ext uri="{FF2B5EF4-FFF2-40B4-BE49-F238E27FC236}">
                 <a16:creationId xmlns:a16="http://schemas.microsoft.com/office/drawing/2014/main" id="{0472DD85-2AD9-49C6-964F-0D6984E4D0A6}"/>
               </a:ext>
             </a:extLst>
           </p:cNvPr>
           <p:cNvSpPr>
-            <a:spLocks xmlns:a="http://schemas.openxmlformats.org/drawingml/2006/main" noGrp="1"/>
+            <a:spLocks noGrp="1"/>
           </p:cNvSpPr>
           <p:nvPr>
             <p:ph type="sldNum" idx="12"/>
@@ -1113,9 +931,9 @@
         </p:nvSpPr>
         <p:spPr/>
         <p:txBody>
-          <a:bodyPr xmlns:a="http://schemas.openxmlformats.org/drawingml/2006/main"/>
-          <a:lstStyle xmlns:a="http://schemas.openxmlformats.org/drawingml/2006/main"/>
-          <a:p xmlns:a="http://schemas.openxmlformats.org/drawingml/2006/main">
+          <a:bodyPr/>
+          <a:lstStyle/>
+          <a:p>
             <a:fld id="{B6F15528-21DE-4FAA-801E-634DDDAF4B2B}" type="slidenum">
               <a:t>‹#›</a:t>
             </a:fld>
@@ -1125,11 +943,14 @@
       </p:sp>
     </p:spTree>
   </p:cSld>
+  <p:clrMapOvr>
+    <a:masterClrMapping/>
+  </p:clrMapOvr>
 </p:sldLayout>
 </file>
 
 <file path=ppt/slideLayouts/slideLayout10.xml><?xml version="1.0" encoding="utf-8"?>
-<p:sldLayout xmlns:p="http://schemas.openxmlformats.org/presentationml/2006/main" type="vertTx" preserve="1">
+<p:sldLayout xmlns:a="http://schemas.openxmlformats.org/drawingml/2006/main" xmlns:r="http://schemas.openxmlformats.org/officeDocument/2006/relationships" xmlns:p="http://schemas.openxmlformats.org/presentationml/2006/main" type="vertTx" preserve="1">
   <p:cSld name="Title and Vertical Text">
     <p:spTree>
       <p:nvGrpSpPr>
@@ -1138,29 +959,34 @@
         <p:nvPr/>
       </p:nvGrpSpPr>
       <p:grpSpPr>
-        <a:xfrm xmlns:a="http://schemas.openxmlformats.org/drawingml/2006/main"/>
+        <a:xfrm>
+          <a:off x="0" y="0"/>
+          <a:ext cx="0" cy="0"/>
+          <a:chOff x="0" y="0"/>
+          <a:chExt cx="0" cy="0"/>
+        </a:xfrm>
       </p:grpSpPr>
       <p:sp>
         <p:nvSpPr>
           <p:cNvPr id="2" name="Title 1">
-            <a:extLst xmlns:a="http://schemas.openxmlformats.org/drawingml/2006/main">
+            <a:extLst>
               <a:ext uri="{FF2B5EF4-FFF2-40B4-BE49-F238E27FC236}">
                 <a16:creationId xmlns:a16="http://schemas.microsoft.com/office/drawing/2014/main" id="{A004772D-AE63-4E68-B993-A1D9AFCD1963}"/>
               </a:ext>
             </a:extLst>
           </p:cNvPr>
           <p:cNvSpPr>
-            <a:spLocks xmlns:a="http://schemas.openxmlformats.org/drawingml/2006/main" noGrp="1"/>
-          </p:cNvSpPr>
-          <p:nvPr>
-            <p:ph type="title" idx="0"/>
+            <a:spLocks noGrp="1"/>
+          </p:cNvSpPr>
+          <p:nvPr>
+            <p:ph type="title"/>
           </p:nvPr>
         </p:nvSpPr>
         <p:spPr/>
         <p:txBody>
-          <a:bodyPr xmlns:a="http://schemas.openxmlformats.org/drawingml/2006/main"/>
-          <a:lstStyle xmlns:a="http://schemas.openxmlformats.org/drawingml/2006/main"/>
-          <a:p xmlns:a="http://schemas.openxmlformats.org/drawingml/2006/main">
+          <a:bodyPr/>
+          <a:lstStyle/>
+          <a:p>
             <a:r>
               <a:t>Click to edit Master title style</a:t>
             </a:r>
@@ -1170,14 +996,14 @@
       <p:sp>
         <p:nvSpPr>
           <p:cNvPr id="3" name="Vertical Text Placeholder 2">
-            <a:extLst xmlns:a="http://schemas.openxmlformats.org/drawingml/2006/main">
+            <a:extLst>
               <a:ext uri="{FF2B5EF4-FFF2-40B4-BE49-F238E27FC236}">
                 <a16:creationId xmlns:a16="http://schemas.microsoft.com/office/drawing/2014/main" id="{0A0E54A9-EBED-46F6-AB73-072F37D12517}"/>
               </a:ext>
             </a:extLst>
           </p:cNvPr>
           <p:cNvSpPr>
-            <a:spLocks xmlns:a="http://schemas.openxmlformats.org/drawingml/2006/main" noGrp="1"/>
+            <a:spLocks noGrp="1"/>
           </p:cNvSpPr>
           <p:nvPr>
             <p:ph type="body" idx="1"/>
@@ -1185,9 +1011,9 @@
         </p:nvSpPr>
         <p:spPr/>
         <p:txBody>
-          <a:bodyPr xmlns:a="http://schemas.openxmlformats.org/drawingml/2006/main" vert="eaVert"/>
-          <a:lstStyle xmlns:a="http://schemas.openxmlformats.org/drawingml/2006/main"/>
-          <a:p xmlns:a="http://schemas.openxmlformats.org/drawingml/2006/main">
+          <a:bodyPr vert="eaVert"/>
+          <a:lstStyle/>
+          <a:p>
             <a:pPr lvl="0">
               <a:buNone/>
             </a:pPr>
@@ -1195,7 +1021,7 @@
               <a:t>Click to edit Master text styles</a:t>
             </a:r>
           </a:p>
-          <a:p xmlns:a="http://schemas.openxmlformats.org/drawingml/2006/main">
+          <a:p>
             <a:pPr lvl="1">
               <a:buNone/>
             </a:pPr>
@@ -1203,7 +1029,7 @@
               <a:t>Second level</a:t>
             </a:r>
           </a:p>
-          <a:p xmlns:a="http://schemas.openxmlformats.org/drawingml/2006/main">
+          <a:p>
             <a:pPr lvl="2">
               <a:buNone/>
             </a:pPr>
@@ -1211,7 +1037,7 @@
               <a:t>Third level</a:t>
             </a:r>
           </a:p>
-          <a:p xmlns:a="http://schemas.openxmlformats.org/drawingml/2006/main">
+          <a:p>
             <a:pPr lvl="3">
               <a:buNone/>
             </a:pPr>
@@ -1219,7 +1045,7 @@
               <a:t>Fourth level</a:t>
             </a:r>
           </a:p>
-          <a:p xmlns:a="http://schemas.openxmlformats.org/drawingml/2006/main">
+          <a:p>
             <a:pPr lvl="4">
               <a:buNone/>
             </a:pPr>
@@ -1232,14 +1058,14 @@
       <p:sp>
         <p:nvSpPr>
           <p:cNvPr id="4" name="Date Placeholder 3">
-            <a:extLst xmlns:a="http://schemas.openxmlformats.org/drawingml/2006/main">
+            <a:extLst>
               <a:ext uri="{FF2B5EF4-FFF2-40B4-BE49-F238E27FC236}">
                 <a16:creationId xmlns:a16="http://schemas.microsoft.com/office/drawing/2014/main" id="{4C9D9B1C-297C-4DFE-8DF6-36322E06C571}"/>
               </a:ext>
             </a:extLst>
           </p:cNvPr>
           <p:cNvSpPr>
-            <a:spLocks xmlns:a="http://schemas.openxmlformats.org/drawingml/2006/main" noGrp="1"/>
+            <a:spLocks noGrp="1"/>
           </p:cNvSpPr>
           <p:nvPr>
             <p:ph type="dt" idx="10"/>
@@ -1247,11 +1073,11 @@
         </p:nvSpPr>
         <p:spPr/>
         <p:txBody>
-          <a:bodyPr xmlns:a="http://schemas.openxmlformats.org/drawingml/2006/main"/>
-          <a:lstStyle xmlns:a="http://schemas.openxmlformats.org/drawingml/2006/main"/>
-          <a:p xmlns:a="http://schemas.openxmlformats.org/drawingml/2006/main">
+          <a:bodyPr/>
+          <a:lstStyle/>
+          <a:p>
             <a:fld id="{1D8BD707-D9CF-40AE-B4C6-C98DA3205C09}" type="datetimeFigureOut">
-              <a:t>2026-09-30</a:t>
+              <a:t>2026-10-06</a:t>
             </a:fld>
             <a:endParaRPr/>
           </a:p>
@@ -1260,14 +1086,14 @@
       <p:sp>
         <p:nvSpPr>
           <p:cNvPr id="5" name="Footer Placeholder 4">
-            <a:extLst xmlns:a="http://schemas.openxmlformats.org/drawingml/2006/main">
+            <a:extLst>
               <a:ext uri="{FF2B5EF4-FFF2-40B4-BE49-F238E27FC236}">
                 <a16:creationId xmlns:a16="http://schemas.microsoft.com/office/drawing/2014/main" id="{F59BC02B-8E4D-4BA8-B07E-C01255AAA6B1}"/>
               </a:ext>
             </a:extLst>
           </p:cNvPr>
           <p:cNvSpPr>
-            <a:spLocks xmlns:a="http://schemas.openxmlformats.org/drawingml/2006/main" noGrp="1"/>
+            <a:spLocks noGrp="1"/>
           </p:cNvSpPr>
           <p:nvPr>
             <p:ph type="ftr" idx="11"/>
@@ -1275,9 +1101,9 @@
         </p:nvSpPr>
         <p:spPr/>
         <p:txBody>
-          <a:bodyPr xmlns:a="http://schemas.openxmlformats.org/drawingml/2006/main"/>
-          <a:lstStyle xmlns:a="http://schemas.openxmlformats.org/drawingml/2006/main"/>
-          <a:p xmlns:a="http://schemas.openxmlformats.org/drawingml/2006/main">
+          <a:bodyPr/>
+          <a:lstStyle/>
+          <a:p>
             <a:endParaRPr/>
           </a:p>
         </p:txBody>
@@ -1285,14 +1111,14 @@
       <p:sp>
         <p:nvSpPr>
           <p:cNvPr id="6" name="Slide Number Placeholder 5">
-            <a:extLst xmlns:a="http://schemas.openxmlformats.org/drawingml/2006/main">
+            <a:extLst>
               <a:ext uri="{FF2B5EF4-FFF2-40B4-BE49-F238E27FC236}">
                 <a16:creationId xmlns:a16="http://schemas.microsoft.com/office/drawing/2014/main" id="{1A0FB45C-95DA-4E78-B88B-33721DF69A78}"/>
               </a:ext>
             </a:extLst>
           </p:cNvPr>
           <p:cNvSpPr>
-            <a:spLocks xmlns:a="http://schemas.openxmlformats.org/drawingml/2006/main" noGrp="1"/>
+            <a:spLocks noGrp="1"/>
           </p:cNvSpPr>
           <p:nvPr>
             <p:ph type="sldNum" idx="12"/>
@@ -1300,9 +1126,9 @@
         </p:nvSpPr>
         <p:spPr/>
         <p:txBody>
-          <a:bodyPr xmlns:a="http://schemas.openxmlformats.org/drawingml/2006/main"/>
-          <a:lstStyle xmlns:a="http://schemas.openxmlformats.org/drawingml/2006/main"/>
-          <a:p xmlns:a="http://schemas.openxmlformats.org/drawingml/2006/main">
+          <a:bodyPr/>
+          <a:lstStyle/>
+          <a:p>
             <a:fld id="{B6F15528-21DE-4FAA-801E-634DDDAF4B2B}" type="slidenum">
               <a:t>‹#›</a:t>
             </a:fld>
@@ -1312,11 +1138,14 @@
       </p:sp>
     </p:spTree>
   </p:cSld>
+  <p:clrMapOvr>
+    <a:masterClrMapping/>
+  </p:clrMapOvr>
 </p:sldLayout>
 </file>
 
 <file path=ppt/slideLayouts/slideLayout11.xml><?xml version="1.0" encoding="utf-8"?>
-<p:sldLayout xmlns:p="http://schemas.openxmlformats.org/presentationml/2006/main" type="vertTitleAndTx" preserve="1">
+<p:sldLayout xmlns:a="http://schemas.openxmlformats.org/drawingml/2006/main" xmlns:r="http://schemas.openxmlformats.org/officeDocument/2006/relationships" xmlns:p="http://schemas.openxmlformats.org/presentationml/2006/main" type="vertTitleAndTx" preserve="1">
   <p:cSld name="Vertical Title and Text">
     <p:spTree>
       <p:nvGrpSpPr>
@@ -1325,34 +1154,39 @@
         <p:nvPr/>
       </p:nvGrpSpPr>
       <p:grpSpPr>
-        <a:xfrm xmlns:a="http://schemas.openxmlformats.org/drawingml/2006/main"/>
+        <a:xfrm>
+          <a:off x="0" y="0"/>
+          <a:ext cx="0" cy="0"/>
+          <a:chOff x="0" y="0"/>
+          <a:chExt cx="0" cy="0"/>
+        </a:xfrm>
       </p:grpSpPr>
       <p:sp>
         <p:nvSpPr>
           <p:cNvPr id="2" name="Vertical Title 1">
-            <a:extLst xmlns:a="http://schemas.openxmlformats.org/drawingml/2006/main">
+            <a:extLst>
               <a:ext uri="{FF2B5EF4-FFF2-40B4-BE49-F238E27FC236}">
                 <a16:creationId xmlns:a16="http://schemas.microsoft.com/office/drawing/2014/main" id="{D07EE316-2F27-4A90-9CF0-8A42CA5936CA}"/>
               </a:ext>
             </a:extLst>
           </p:cNvPr>
           <p:cNvSpPr>
-            <a:spLocks xmlns:a="http://schemas.openxmlformats.org/drawingml/2006/main" noGrp="1"/>
-          </p:cNvSpPr>
-          <p:nvPr>
-            <p:ph type="title" idx="0"/>
+            <a:spLocks noGrp="1"/>
+          </p:cNvSpPr>
+          <p:nvPr>
+            <p:ph type="title"/>
           </p:nvPr>
         </p:nvSpPr>
         <p:spPr>
-          <a:xfrm xmlns:a="http://schemas.openxmlformats.org/drawingml/2006/main">
+          <a:xfrm>
             <a:off x="6629400" y="274638"/>
             <a:ext cx="2057400" cy="5851525"/>
           </a:xfrm>
         </p:spPr>
         <p:txBody>
-          <a:bodyPr xmlns:a="http://schemas.openxmlformats.org/drawingml/2006/main" vert="eaVert"/>
-          <a:lstStyle xmlns:a="http://schemas.openxmlformats.org/drawingml/2006/main"/>
-          <a:p xmlns:a="http://schemas.openxmlformats.org/drawingml/2006/main">
+          <a:bodyPr vert="eaVert"/>
+          <a:lstStyle/>
+          <a:p>
             <a:r>
               <a:t>Click to edit Master title style</a:t>
             </a:r>
@@ -1362,29 +1196,29 @@
       <p:sp>
         <p:nvSpPr>
           <p:cNvPr id="3" name="Vertical Text Placeholder 2">
-            <a:extLst xmlns:a="http://schemas.openxmlformats.org/drawingml/2006/main">
+            <a:extLst>
               <a:ext uri="{FF2B5EF4-FFF2-40B4-BE49-F238E27FC236}">
                 <a16:creationId xmlns:a16="http://schemas.microsoft.com/office/drawing/2014/main" id="{252E753B-7881-4926-A0BD-B7EC48C6BCC1}"/>
               </a:ext>
             </a:extLst>
           </p:cNvPr>
           <p:cNvSpPr>
-            <a:spLocks xmlns:a="http://schemas.openxmlformats.org/drawingml/2006/main" noGrp="1"/>
+            <a:spLocks noGrp="1"/>
           </p:cNvSpPr>
           <p:nvPr>
             <p:ph type="body" idx="1"/>
           </p:nvPr>
         </p:nvSpPr>
         <p:spPr>
-          <a:xfrm xmlns:a="http://schemas.openxmlformats.org/drawingml/2006/main">
+          <a:xfrm>
             <a:off x="457200" y="274638"/>
             <a:ext cx="6019800" cy="5851525"/>
           </a:xfrm>
         </p:spPr>
         <p:txBody>
-          <a:bodyPr xmlns:a="http://schemas.openxmlformats.org/drawingml/2006/main" vert="eaVert"/>
-          <a:lstStyle xmlns:a="http://schemas.openxmlformats.org/drawingml/2006/main"/>
-          <a:p xmlns:a="http://schemas.openxmlformats.org/drawingml/2006/main">
+          <a:bodyPr vert="eaVert"/>
+          <a:lstStyle/>
+          <a:p>
             <a:pPr lvl="0">
               <a:buNone/>
             </a:pPr>
@@ -1392,7 +1226,7 @@
               <a:t>Click to edit Master text styles</a:t>
             </a:r>
           </a:p>
-          <a:p xmlns:a="http://schemas.openxmlformats.org/drawingml/2006/main">
+          <a:p>
             <a:pPr lvl="1">
               <a:buNone/>
             </a:pPr>
@@ -1400,7 +1234,7 @@
               <a:t>Second level</a:t>
             </a:r>
           </a:p>
-          <a:p xmlns:a="http://schemas.openxmlformats.org/drawingml/2006/main">
+          <a:p>
             <a:pPr lvl="2">
               <a:buNone/>
             </a:pPr>
@@ -1408,7 +1242,7 @@
               <a:t>Third level</a:t>
             </a:r>
           </a:p>
-          <a:p xmlns:a="http://schemas.openxmlformats.org/drawingml/2006/main">
+          <a:p>
             <a:pPr lvl="3">
               <a:buNone/>
             </a:pPr>
@@ -1416,7 +1250,7 @@
               <a:t>Fourth level</a:t>
             </a:r>
           </a:p>
-          <a:p xmlns:a="http://schemas.openxmlformats.org/drawingml/2006/main">
+          <a:p>
             <a:pPr lvl="4">
               <a:buNone/>
             </a:pPr>
@@ -1429,14 +1263,14 @@
       <p:sp>
         <p:nvSpPr>
           <p:cNvPr id="4" name="Date Placeholder 3">
-            <a:extLst xmlns:a="http://schemas.openxmlformats.org/drawingml/2006/main">
+            <a:extLst>
               <a:ext uri="{FF2B5EF4-FFF2-40B4-BE49-F238E27FC236}">
                 <a16:creationId xmlns:a16="http://schemas.microsoft.com/office/drawing/2014/main" id="{E84A438F-0068-4FFE-A8F0-7662DA319FC0}"/>
               </a:ext>
             </a:extLst>
           </p:cNvPr>
           <p:cNvSpPr>
-            <a:spLocks xmlns:a="http://schemas.openxmlformats.org/drawingml/2006/main" noGrp="1"/>
+            <a:spLocks noGrp="1"/>
           </p:cNvSpPr>
           <p:nvPr>
             <p:ph type="dt" idx="10"/>
@@ -1444,11 +1278,11 @@
         </p:nvSpPr>
         <p:spPr/>
         <p:txBody>
-          <a:bodyPr xmlns:a="http://schemas.openxmlformats.org/drawingml/2006/main"/>
-          <a:lstStyle xmlns:a="http://schemas.openxmlformats.org/drawingml/2006/main"/>
-          <a:p xmlns:a="http://schemas.openxmlformats.org/drawingml/2006/main">
+          <a:bodyPr/>
+          <a:lstStyle/>
+          <a:p>
             <a:fld id="{1D8BD707-D9CF-40AE-B4C6-C98DA3205C09}" type="datetimeFigureOut">
-              <a:t>2026-09-30</a:t>
+              <a:t>2026-10-06</a:t>
             </a:fld>
             <a:endParaRPr/>
           </a:p>
@@ -1457,14 +1291,14 @@
       <p:sp>
         <p:nvSpPr>
           <p:cNvPr id="5" name="Footer Placeholder 4">
-            <a:extLst xmlns:a="http://schemas.openxmlformats.org/drawingml/2006/main">
+            <a:extLst>
               <a:ext uri="{FF2B5EF4-FFF2-40B4-BE49-F238E27FC236}">
                 <a16:creationId xmlns:a16="http://schemas.microsoft.com/office/drawing/2014/main" id="{FA77849F-079B-41CF-9073-82B7D6A66AB0}"/>
               </a:ext>
             </a:extLst>
           </p:cNvPr>
           <p:cNvSpPr>
-            <a:spLocks xmlns:a="http://schemas.openxmlformats.org/drawingml/2006/main" noGrp="1"/>
+            <a:spLocks noGrp="1"/>
           </p:cNvSpPr>
           <p:nvPr>
             <p:ph type="ftr" idx="11"/>
@@ -1472,9 +1306,9 @@
         </p:nvSpPr>
         <p:spPr/>
         <p:txBody>
-          <a:bodyPr xmlns:a="http://schemas.openxmlformats.org/drawingml/2006/main"/>
-          <a:lstStyle xmlns:a="http://schemas.openxmlformats.org/drawingml/2006/main"/>
-          <a:p xmlns:a="http://schemas.openxmlformats.org/drawingml/2006/main">
+          <a:bodyPr/>
+          <a:lstStyle/>
+          <a:p>
             <a:endParaRPr/>
           </a:p>
         </p:txBody>
@@ -1482,14 +1316,14 @@
       <p:sp>
         <p:nvSpPr>
           <p:cNvPr id="6" name="Slide Number Placeholder 5">
-            <a:extLst xmlns:a="http://schemas.openxmlformats.org/drawingml/2006/main">
+            <a:extLst>
               <a:ext uri="{FF2B5EF4-FFF2-40B4-BE49-F238E27FC236}">
                 <a16:creationId xmlns:a16="http://schemas.microsoft.com/office/drawing/2014/main" id="{309DA3C8-E3F1-4304-B4E0-090E0A47A0DD}"/>
               </a:ext>
             </a:extLst>
           </p:cNvPr>
           <p:cNvSpPr>
-            <a:spLocks xmlns:a="http://schemas.openxmlformats.org/drawingml/2006/main" noGrp="1"/>
+            <a:spLocks noGrp="1"/>
           </p:cNvSpPr>
           <p:nvPr>
             <p:ph type="sldNum" idx="12"/>
@@ -1497,9 +1331,9 @@
         </p:nvSpPr>
         <p:spPr/>
         <p:txBody>
-          <a:bodyPr xmlns:a="http://schemas.openxmlformats.org/drawingml/2006/main"/>
-          <a:lstStyle xmlns:a="http://schemas.openxmlformats.org/drawingml/2006/main"/>
-          <a:p xmlns:a="http://schemas.openxmlformats.org/drawingml/2006/main">
+          <a:bodyPr/>
+          <a:lstStyle/>
+          <a:p>
             <a:fld id="{B6F15528-21DE-4FAA-801E-634DDDAF4B2B}" type="slidenum">
               <a:t>‹#›</a:t>
             </a:fld>
@@ -1509,11 +1343,14 @@
       </p:sp>
     </p:spTree>
   </p:cSld>
+  <p:clrMapOvr>
+    <a:masterClrMapping/>
+  </p:clrMapOvr>
 </p:sldLayout>
 </file>
 
 <file path=ppt/slideLayouts/slideLayout2.xml><?xml version="1.0" encoding="utf-8"?>
-<p:sldLayout xmlns:p="http://schemas.openxmlformats.org/presentationml/2006/main" type="obj" preserve="1">
+<p:sldLayout xmlns:a="http://schemas.openxmlformats.org/drawingml/2006/main" xmlns:r="http://schemas.openxmlformats.org/officeDocument/2006/relationships" xmlns:p="http://schemas.openxmlformats.org/presentationml/2006/main" type="obj" preserve="1">
   <p:cSld name="Title and Content">
     <p:spTree>
       <p:nvGrpSpPr>
@@ -1522,29 +1359,34 @@
         <p:nvPr/>
       </p:nvGrpSpPr>
       <p:grpSpPr>
-        <a:xfrm xmlns:a="http://schemas.openxmlformats.org/drawingml/2006/main"/>
+        <a:xfrm>
+          <a:off x="0" y="0"/>
+          <a:ext cx="0" cy="0"/>
+          <a:chOff x="0" y="0"/>
+          <a:chExt cx="0" cy="0"/>
+        </a:xfrm>
       </p:grpSpPr>
       <p:sp>
         <p:nvSpPr>
           <p:cNvPr id="2" name="Title 1">
-            <a:extLst xmlns:a="http://schemas.openxmlformats.org/drawingml/2006/main">
+            <a:extLst>
               <a:ext uri="{FF2B5EF4-FFF2-40B4-BE49-F238E27FC236}">
                 <a16:creationId xmlns:a16="http://schemas.microsoft.com/office/drawing/2014/main" id="{BC3CD8F5-6E8A-425F-A9FD-02C3B2641EEA}"/>
               </a:ext>
             </a:extLst>
           </p:cNvPr>
           <p:cNvSpPr>
-            <a:spLocks xmlns:a="http://schemas.openxmlformats.org/drawingml/2006/main" noGrp="1"/>
-          </p:cNvSpPr>
-          <p:nvPr>
-            <p:ph type="title" idx="0"/>
+            <a:spLocks noGrp="1"/>
+          </p:cNvSpPr>
+          <p:nvPr>
+            <p:ph type="title"/>
           </p:nvPr>
         </p:nvSpPr>
         <p:spPr/>
         <p:txBody>
-          <a:bodyPr xmlns:a="http://schemas.openxmlformats.org/drawingml/2006/main"/>
-          <a:lstStyle xmlns:a="http://schemas.openxmlformats.org/drawingml/2006/main"/>
-          <a:p xmlns:a="http://schemas.openxmlformats.org/drawingml/2006/main">
+          <a:bodyPr/>
+          <a:lstStyle/>
+          <a:p>
             <a:r>
               <a:t>Click to edit Master title style</a:t>
             </a:r>
@@ -1554,14 +1396,14 @@
       <p:sp>
         <p:nvSpPr>
           <p:cNvPr id="3" name="Content Placeholder 2">
-            <a:extLst xmlns:a="http://schemas.openxmlformats.org/drawingml/2006/main">
+            <a:extLst>
               <a:ext uri="{FF2B5EF4-FFF2-40B4-BE49-F238E27FC236}">
                 <a16:creationId xmlns:a16="http://schemas.microsoft.com/office/drawing/2014/main" id="{60BA0D3C-1AE6-4147-B62C-4299C74F66C2}"/>
               </a:ext>
             </a:extLst>
           </p:cNvPr>
           <p:cNvSpPr>
-            <a:spLocks xmlns:a="http://schemas.openxmlformats.org/drawingml/2006/main" noGrp="1"/>
+            <a:spLocks noGrp="1"/>
           </p:cNvSpPr>
           <p:nvPr>
             <p:ph idx="1"/>
@@ -1569,9 +1411,9 @@
         </p:nvSpPr>
         <p:spPr/>
         <p:txBody>
-          <a:bodyPr xmlns:a="http://schemas.openxmlformats.org/drawingml/2006/main"/>
-          <a:lstStyle xmlns:a="http://schemas.openxmlformats.org/drawingml/2006/main"/>
-          <a:p xmlns:a="http://schemas.openxmlformats.org/drawingml/2006/main">
+          <a:bodyPr/>
+          <a:lstStyle/>
+          <a:p>
             <a:pPr lvl="0">
               <a:buNone/>
             </a:pPr>
@@ -1579,7 +1421,7 @@
               <a:t>Click to edit Master text styles</a:t>
             </a:r>
           </a:p>
-          <a:p xmlns:a="http://schemas.openxmlformats.org/drawingml/2006/main">
+          <a:p>
             <a:pPr lvl="1">
               <a:buNone/>
             </a:pPr>
@@ -1587,7 +1429,7 @@
               <a:t>Second level</a:t>
             </a:r>
           </a:p>
-          <a:p xmlns:a="http://schemas.openxmlformats.org/drawingml/2006/main">
+          <a:p>
             <a:pPr lvl="2">
               <a:buNone/>
             </a:pPr>
@@ -1595,7 +1437,7 @@
               <a:t>Third level</a:t>
             </a:r>
           </a:p>
-          <a:p xmlns:a="http://schemas.openxmlformats.org/drawingml/2006/main">
+          <a:p>
             <a:pPr lvl="3">
               <a:buNone/>
             </a:pPr>
@@ -1603,7 +1445,7 @@
               <a:t>Fourth level</a:t>
             </a:r>
           </a:p>
-          <a:p xmlns:a="http://schemas.openxmlformats.org/drawingml/2006/main">
+          <a:p>
             <a:pPr lvl="4">
               <a:buNone/>
             </a:pPr>
@@ -1616,14 +1458,14 @@
       <p:sp>
         <p:nvSpPr>
           <p:cNvPr id="4" name="Date Placeholder 3">
-            <a:extLst xmlns:a="http://schemas.openxmlformats.org/drawingml/2006/main">
+            <a:extLst>
               <a:ext uri="{FF2B5EF4-FFF2-40B4-BE49-F238E27FC236}">
                 <a16:creationId xmlns:a16="http://schemas.microsoft.com/office/drawing/2014/main" id="{A48EC7E4-D6E6-4352-B569-7C32DAB912C9}"/>
               </a:ext>
             </a:extLst>
           </p:cNvPr>
           <p:cNvSpPr>
-            <a:spLocks xmlns:a="http://schemas.openxmlformats.org/drawingml/2006/main" noGrp="1"/>
+            <a:spLocks noGrp="1"/>
           </p:cNvSpPr>
           <p:nvPr>
             <p:ph type="dt" idx="10"/>
@@ -1631,11 +1473,11 @@
         </p:nvSpPr>
         <p:spPr/>
         <p:txBody>
-          <a:bodyPr xmlns:a="http://schemas.openxmlformats.org/drawingml/2006/main"/>
-          <a:lstStyle xmlns:a="http://schemas.openxmlformats.org/drawingml/2006/main"/>
-          <a:p xmlns:a="http://schemas.openxmlformats.org/drawingml/2006/main">
+          <a:bodyPr/>
+          <a:lstStyle/>
+          <a:p>
             <a:fld id="{1D8BD707-D9CF-40AE-B4C6-C98DA3205C09}" type="datetimeFigureOut">
-              <a:t>2026-09-30</a:t>
+              <a:t>2026-10-06</a:t>
             </a:fld>
             <a:endParaRPr/>
           </a:p>
@@ -1644,14 +1486,14 @@
       <p:sp>
         <p:nvSpPr>
           <p:cNvPr id="5" name="Footer Placeholder 4">
-            <a:extLst xmlns:a="http://schemas.openxmlformats.org/drawingml/2006/main">
+            <a:extLst>
               <a:ext uri="{FF2B5EF4-FFF2-40B4-BE49-F238E27FC236}">
                 <a16:creationId xmlns:a16="http://schemas.microsoft.com/office/drawing/2014/main" id="{F447F410-EA27-42F9-A091-3CC25BBFDA12}"/>
               </a:ext>
             </a:extLst>
           </p:cNvPr>
           <p:cNvSpPr>
-            <a:spLocks xmlns:a="http://schemas.openxmlformats.org/drawingml/2006/main" noGrp="1"/>
+            <a:spLocks noGrp="1"/>
           </p:cNvSpPr>
           <p:nvPr>
             <p:ph type="ftr" idx="11"/>
@@ -1659,9 +1501,9 @@
         </p:nvSpPr>
         <p:spPr/>
         <p:txBody>
-          <a:bodyPr xmlns:a="http://schemas.openxmlformats.org/drawingml/2006/main"/>
-          <a:lstStyle xmlns:a="http://schemas.openxmlformats.org/drawingml/2006/main"/>
-          <a:p xmlns:a="http://schemas.openxmlformats.org/drawingml/2006/main">
+          <a:bodyPr/>
+          <a:lstStyle/>
+          <a:p>
             <a:endParaRPr/>
           </a:p>
         </p:txBody>
@@ -1669,14 +1511,14 @@
       <p:sp>
         <p:nvSpPr>
           <p:cNvPr id="6" name="Slide Number Placeholder 5">
-            <a:extLst xmlns:a="http://schemas.openxmlformats.org/drawingml/2006/main">
+            <a:extLst>
               <a:ext uri="{FF2B5EF4-FFF2-40B4-BE49-F238E27FC236}">
                 <a16:creationId xmlns:a16="http://schemas.microsoft.com/office/drawing/2014/main" id="{BAE05BA6-390A-4999-86A2-72214F049F15}"/>
               </a:ext>
             </a:extLst>
           </p:cNvPr>
           <p:cNvSpPr>
-            <a:spLocks xmlns:a="http://schemas.openxmlformats.org/drawingml/2006/main" noGrp="1"/>
+            <a:spLocks noGrp="1"/>
           </p:cNvSpPr>
           <p:nvPr>
             <p:ph type="sldNum" idx="12"/>
@@ -1684,9 +1526,9 @@
         </p:nvSpPr>
         <p:spPr/>
         <p:txBody>
-          <a:bodyPr xmlns:a="http://schemas.openxmlformats.org/drawingml/2006/main"/>
-          <a:lstStyle xmlns:a="http://schemas.openxmlformats.org/drawingml/2006/main"/>
-          <a:p xmlns:a="http://schemas.openxmlformats.org/drawingml/2006/main">
+          <a:bodyPr/>
+          <a:lstStyle/>
+          <a:p>
             <a:fld id="{B6F15528-21DE-4FAA-801E-634DDDAF4B2B}" type="slidenum">
               <a:t>‹#›</a:t>
             </a:fld>
@@ -1696,11 +1538,14 @@
       </p:sp>
     </p:spTree>
   </p:cSld>
+  <p:clrMapOvr>
+    <a:masterClrMapping/>
+  </p:clrMapOvr>
 </p:sldLayout>
 </file>
 
 <file path=ppt/slideLayouts/slideLayout3.xml><?xml version="1.0" encoding="utf-8"?>
-<p:sldLayout xmlns:p="http://schemas.openxmlformats.org/presentationml/2006/main" type="secHead" preserve="1">
+<p:sldLayout xmlns:a="http://schemas.openxmlformats.org/drawingml/2006/main" xmlns:r="http://schemas.openxmlformats.org/officeDocument/2006/relationships" xmlns:p="http://schemas.openxmlformats.org/presentationml/2006/main" type="secHead" preserve="1">
   <p:cSld name="Section Header">
     <p:spTree>
       <p:nvGrpSpPr>
@@ -1709,39 +1554,44 @@
         <p:nvPr/>
       </p:nvGrpSpPr>
       <p:grpSpPr>
-        <a:xfrm xmlns:a="http://schemas.openxmlformats.org/drawingml/2006/main"/>
+        <a:xfrm>
+          <a:off x="0" y="0"/>
+          <a:ext cx="0" cy="0"/>
+          <a:chOff x="0" y="0"/>
+          <a:chExt cx="0" cy="0"/>
+        </a:xfrm>
       </p:grpSpPr>
       <p:sp>
         <p:nvSpPr>
           <p:cNvPr id="2" name="Title 1">
-            <a:extLst xmlns:a="http://schemas.openxmlformats.org/drawingml/2006/main">
+            <a:extLst>
               <a:ext uri="{FF2B5EF4-FFF2-40B4-BE49-F238E27FC236}">
                 <a16:creationId xmlns:a16="http://schemas.microsoft.com/office/drawing/2014/main" id="{E00BF531-D04E-41ED-B4C3-7F164FABAE04}"/>
               </a:ext>
             </a:extLst>
           </p:cNvPr>
           <p:cNvSpPr>
-            <a:spLocks xmlns:a="http://schemas.openxmlformats.org/drawingml/2006/main" noGrp="1"/>
-          </p:cNvSpPr>
-          <p:nvPr>
-            <p:ph type="title" idx="0"/>
+            <a:spLocks noGrp="1"/>
+          </p:cNvSpPr>
+          <p:nvPr>
+            <p:ph type="title"/>
           </p:nvPr>
         </p:nvSpPr>
         <p:spPr>
-          <a:xfrm xmlns:a="http://schemas.openxmlformats.org/drawingml/2006/main">
+          <a:xfrm>
             <a:off x="722313" y="4406900"/>
             <a:ext cx="7772400" cy="1362075"/>
           </a:xfrm>
         </p:spPr>
         <p:txBody>
-          <a:bodyPr xmlns:a="http://schemas.openxmlformats.org/drawingml/2006/main" anchor="t"/>
-          <a:lstStyle xmlns:a="http://schemas.openxmlformats.org/drawingml/2006/main">
+          <a:bodyPr anchor="t"/>
+          <a:lstStyle>
             <a:lvl1pPr algn="l">
               <a:buNone/>
               <a:defRPr sz="4000" b="1" cap="all"/>
             </a:lvl1pPr>
           </a:lstStyle>
-          <a:p xmlns:a="http://schemas.openxmlformats.org/drawingml/2006/main">
+          <a:p>
             <a:r>
               <a:t>Click to edit Master title style</a:t>
             </a:r>
@@ -1751,28 +1601,28 @@
       <p:sp>
         <p:nvSpPr>
           <p:cNvPr id="3" name="Text Placeholder 2">
-            <a:extLst xmlns:a="http://schemas.openxmlformats.org/drawingml/2006/main">
+            <a:extLst>
               <a:ext uri="{FF2B5EF4-FFF2-40B4-BE49-F238E27FC236}">
                 <a16:creationId xmlns:a16="http://schemas.microsoft.com/office/drawing/2014/main" id="{B7749E7B-20E4-465D-AEE2-2B49A8B9A824}"/>
               </a:ext>
             </a:extLst>
           </p:cNvPr>
           <p:cNvSpPr>
-            <a:spLocks xmlns:a="http://schemas.openxmlformats.org/drawingml/2006/main" noGrp="1"/>
+            <a:spLocks noGrp="1"/>
           </p:cNvSpPr>
           <p:nvPr>
             <p:ph type="body" idx="1"/>
           </p:nvPr>
         </p:nvSpPr>
         <p:spPr>
-          <a:xfrm xmlns:a="http://schemas.openxmlformats.org/drawingml/2006/main">
+          <a:xfrm>
             <a:off x="722313" y="2906713"/>
             <a:ext cx="7772400" cy="1500187"/>
           </a:xfrm>
         </p:spPr>
         <p:txBody>
-          <a:bodyPr xmlns:a="http://schemas.openxmlformats.org/drawingml/2006/main" anchor="b"/>
-          <a:lstStyle xmlns:a="http://schemas.openxmlformats.org/drawingml/2006/main">
+          <a:bodyPr anchor="b"/>
+          <a:lstStyle>
             <a:lvl1pPr marL="0" indent="0">
               <a:buNone/>
               <a:defRPr sz="2000">
@@ -1864,7 +1714,7 @@
               </a:defRPr>
             </a:lvl9pPr>
           </a:lstStyle>
-          <a:p xmlns:a="http://schemas.openxmlformats.org/drawingml/2006/main">
+          <a:p>
             <a:pPr lvl="0">
               <a:buNone/>
             </a:pPr>
@@ -1877,14 +1727,14 @@
       <p:sp>
         <p:nvSpPr>
           <p:cNvPr id="4" name="Date Placeholder 3">
-            <a:extLst xmlns:a="http://schemas.openxmlformats.org/drawingml/2006/main">
+            <a:extLst>
               <a:ext uri="{FF2B5EF4-FFF2-40B4-BE49-F238E27FC236}">
                 <a16:creationId xmlns:a16="http://schemas.microsoft.com/office/drawing/2014/main" id="{B7C66B0D-99DE-475A-BF5B-B913C7699620}"/>
               </a:ext>
             </a:extLst>
           </p:cNvPr>
           <p:cNvSpPr>
-            <a:spLocks xmlns:a="http://schemas.openxmlformats.org/drawingml/2006/main" noGrp="1"/>
+            <a:spLocks noGrp="1"/>
           </p:cNvSpPr>
           <p:nvPr>
             <p:ph type="dt" idx="10"/>
@@ -1892,11 +1742,11 @@
         </p:nvSpPr>
         <p:spPr/>
         <p:txBody>
-          <a:bodyPr xmlns:a="http://schemas.openxmlformats.org/drawingml/2006/main"/>
-          <a:lstStyle xmlns:a="http://schemas.openxmlformats.org/drawingml/2006/main"/>
-          <a:p xmlns:a="http://schemas.openxmlformats.org/drawingml/2006/main">
+          <a:bodyPr/>
+          <a:lstStyle/>
+          <a:p>
             <a:fld id="{1D8BD707-D9CF-40AE-B4C6-C98DA3205C09}" type="datetimeFigureOut">
-              <a:t>2026-09-30</a:t>
+              <a:t>2026-10-06</a:t>
             </a:fld>
             <a:endParaRPr/>
           </a:p>
@@ -1905,14 +1755,14 @@
       <p:sp>
         <p:nvSpPr>
           <p:cNvPr id="5" name="Footer Placeholder 4">
-            <a:extLst xmlns:a="http://schemas.openxmlformats.org/drawingml/2006/main">
+            <a:extLst>
               <a:ext uri="{FF2B5EF4-FFF2-40B4-BE49-F238E27FC236}">
                 <a16:creationId xmlns:a16="http://schemas.microsoft.com/office/drawing/2014/main" id="{A52E7177-FDE9-46ED-804A-C4E79ECAE51A}"/>
               </a:ext>
             </a:extLst>
           </p:cNvPr>
           <p:cNvSpPr>
-            <a:spLocks xmlns:a="http://schemas.openxmlformats.org/drawingml/2006/main" noGrp="1"/>
+            <a:spLocks noGrp="1"/>
           </p:cNvSpPr>
           <p:nvPr>
             <p:ph type="ftr" idx="11"/>
@@ -1920,9 +1770,9 @@
         </p:nvSpPr>
         <p:spPr/>
         <p:txBody>
-          <a:bodyPr xmlns:a="http://schemas.openxmlformats.org/drawingml/2006/main"/>
-          <a:lstStyle xmlns:a="http://schemas.openxmlformats.org/drawingml/2006/main"/>
-          <a:p xmlns:a="http://schemas.openxmlformats.org/drawingml/2006/main">
+          <a:bodyPr/>
+          <a:lstStyle/>
+          <a:p>
             <a:endParaRPr/>
           </a:p>
         </p:txBody>
@@ -1930,14 +1780,14 @@
       <p:sp>
         <p:nvSpPr>
           <p:cNvPr id="6" name="Slide Number Placeholder 5">
-            <a:extLst xmlns:a="http://schemas.openxmlformats.org/drawingml/2006/main">
+            <a:extLst>
               <a:ext uri="{FF2B5EF4-FFF2-40B4-BE49-F238E27FC236}">
                 <a16:creationId xmlns:a16="http://schemas.microsoft.com/office/drawing/2014/main" id="{9821420E-EBF7-424B-B763-7A9B8C4AFDC3}"/>
               </a:ext>
             </a:extLst>
           </p:cNvPr>
           <p:cNvSpPr>
-            <a:spLocks xmlns:a="http://schemas.openxmlformats.org/drawingml/2006/main" noGrp="1"/>
+            <a:spLocks noGrp="1"/>
           </p:cNvSpPr>
           <p:nvPr>
             <p:ph type="sldNum" idx="12"/>
@@ -1945,9 +1795,9 @@
         </p:nvSpPr>
         <p:spPr/>
         <p:txBody>
-          <a:bodyPr xmlns:a="http://schemas.openxmlformats.org/drawingml/2006/main"/>
-          <a:lstStyle xmlns:a="http://schemas.openxmlformats.org/drawingml/2006/main"/>
-          <a:p xmlns:a="http://schemas.openxmlformats.org/drawingml/2006/main">
+          <a:bodyPr/>
+          <a:lstStyle/>
+          <a:p>
             <a:fld id="{B6F15528-21DE-4FAA-801E-634DDDAF4B2B}" type="slidenum">
               <a:t>‹#›</a:t>
             </a:fld>
@@ -1957,11 +1807,14 @@
       </p:sp>
     </p:spTree>
   </p:cSld>
+  <p:clrMapOvr>
+    <a:masterClrMapping/>
+  </p:clrMapOvr>
 </p:sldLayout>
 </file>
 
 <file path=ppt/slideLayouts/slideLayout4.xml><?xml version="1.0" encoding="utf-8"?>
-<p:sldLayout xmlns:p="http://schemas.openxmlformats.org/presentationml/2006/main" type="twoObj" preserve="1">
+<p:sldLayout xmlns:a="http://schemas.openxmlformats.org/drawingml/2006/main" xmlns:r="http://schemas.openxmlformats.org/officeDocument/2006/relationships" xmlns:p="http://schemas.openxmlformats.org/presentationml/2006/main" type="twoObj" preserve="1">
   <p:cSld name="Two Content">
     <p:spTree>
       <p:nvGrpSpPr>
@@ -1970,29 +1823,34 @@
         <p:nvPr/>
       </p:nvGrpSpPr>
       <p:grpSpPr>
-        <a:xfrm xmlns:a="http://schemas.openxmlformats.org/drawingml/2006/main"/>
+        <a:xfrm>
+          <a:off x="0" y="0"/>
+          <a:ext cx="0" cy="0"/>
+          <a:chOff x="0" y="0"/>
+          <a:chExt cx="0" cy="0"/>
+        </a:xfrm>
       </p:grpSpPr>
       <p:sp>
         <p:nvSpPr>
           <p:cNvPr id="2" name="Title 1">
-            <a:extLst xmlns:a="http://schemas.openxmlformats.org/drawingml/2006/main">
+            <a:extLst>
               <a:ext uri="{FF2B5EF4-FFF2-40B4-BE49-F238E27FC236}">
                 <a16:creationId xmlns:a16="http://schemas.microsoft.com/office/drawing/2014/main" id="{DD6534F1-A979-452C-875D-247D3C061706}"/>
               </a:ext>
             </a:extLst>
           </p:cNvPr>
           <p:cNvSpPr>
-            <a:spLocks xmlns:a="http://schemas.openxmlformats.org/drawingml/2006/main" noGrp="1"/>
-          </p:cNvSpPr>
-          <p:nvPr>
-            <p:ph type="title" idx="0"/>
+            <a:spLocks noGrp="1"/>
+          </p:cNvSpPr>
+          <p:nvPr>
+            <p:ph type="title"/>
           </p:nvPr>
         </p:nvSpPr>
         <p:spPr/>
         <p:txBody>
-          <a:bodyPr xmlns:a="http://schemas.openxmlformats.org/drawingml/2006/main"/>
-          <a:lstStyle xmlns:a="http://schemas.openxmlformats.org/drawingml/2006/main"/>
-          <a:p xmlns:a="http://schemas.openxmlformats.org/drawingml/2006/main">
+          <a:bodyPr/>
+          <a:lstStyle/>
+          <a:p>
             <a:r>
               <a:t>Click to edit Master title style</a:t>
             </a:r>
@@ -2002,28 +1860,28 @@
       <p:sp>
         <p:nvSpPr>
           <p:cNvPr id="3" name="Content Placeholder 2">
-            <a:extLst xmlns:a="http://schemas.openxmlformats.org/drawingml/2006/main">
+            <a:extLst>
               <a:ext uri="{FF2B5EF4-FFF2-40B4-BE49-F238E27FC236}">
                 <a16:creationId xmlns:a16="http://schemas.microsoft.com/office/drawing/2014/main" id="{34261581-1020-4847-B24B-719B8D5E4857}"/>
               </a:ext>
             </a:extLst>
           </p:cNvPr>
           <p:cNvSpPr>
-            <a:spLocks xmlns:a="http://schemas.openxmlformats.org/drawingml/2006/main" noGrp="1"/>
+            <a:spLocks noGrp="1"/>
           </p:cNvSpPr>
           <p:nvPr>
             <p:ph idx="1"/>
           </p:nvPr>
         </p:nvSpPr>
         <p:spPr>
-          <a:xfrm xmlns:a="http://schemas.openxmlformats.org/drawingml/2006/main">
+          <a:xfrm>
             <a:off x="457200" y="1600200"/>
             <a:ext cx="4038600" cy="4525963"/>
           </a:xfrm>
         </p:spPr>
         <p:txBody>
-          <a:bodyPr xmlns:a="http://schemas.openxmlformats.org/drawingml/2006/main"/>
-          <a:lstStyle xmlns:a="http://schemas.openxmlformats.org/drawingml/2006/main">
+          <a:bodyPr/>
+          <a:lstStyle>
             <a:lvl1pPr>
               <a:buNone/>
               <a:defRPr sz="2800"/>
@@ -2061,7 +1919,7 @@
               <a:defRPr sz="1800"/>
             </a:lvl9pPr>
           </a:lstStyle>
-          <a:p xmlns:a="http://schemas.openxmlformats.org/drawingml/2006/main">
+          <a:p>
             <a:pPr lvl="0">
               <a:buNone/>
             </a:pPr>
@@ -2069,7 +1927,7 @@
               <a:t>Click to edit Master text styles</a:t>
             </a:r>
           </a:p>
-          <a:p xmlns:a="http://schemas.openxmlformats.org/drawingml/2006/main">
+          <a:p>
             <a:pPr lvl="1">
               <a:buNone/>
             </a:pPr>
@@ -2077,7 +1935,7 @@
               <a:t>Second level</a:t>
             </a:r>
           </a:p>
-          <a:p xmlns:a="http://schemas.openxmlformats.org/drawingml/2006/main">
+          <a:p>
             <a:pPr lvl="2">
               <a:buNone/>
             </a:pPr>
@@ -2085,7 +1943,7 @@
               <a:t>Third level</a:t>
             </a:r>
           </a:p>
-          <a:p xmlns:a="http://schemas.openxmlformats.org/drawingml/2006/main">
+          <a:p>
             <a:pPr lvl="3">
               <a:buNone/>
             </a:pPr>
@@ -2093,7 +1951,7 @@
               <a:t>Fourth level</a:t>
             </a:r>
           </a:p>
-          <a:p xmlns:a="http://schemas.openxmlformats.org/drawingml/2006/main">
+          <a:p>
             <a:pPr lvl="4">
               <a:buNone/>
             </a:pPr>
@@ -2106,28 +1964,28 @@
       <p:sp>
         <p:nvSpPr>
           <p:cNvPr id="4" name="Content Placeholder 3">
-            <a:extLst xmlns:a="http://schemas.openxmlformats.org/drawingml/2006/main">
+            <a:extLst>
               <a:ext uri="{FF2B5EF4-FFF2-40B4-BE49-F238E27FC236}">
                 <a16:creationId xmlns:a16="http://schemas.microsoft.com/office/drawing/2014/main" id="{D4DAE2FC-63D4-4757-9D5E-72A2DCBBDBE0}"/>
               </a:ext>
             </a:extLst>
           </p:cNvPr>
           <p:cNvSpPr>
-            <a:spLocks xmlns:a="http://schemas.openxmlformats.org/drawingml/2006/main" noGrp="1"/>
+            <a:spLocks noGrp="1"/>
           </p:cNvSpPr>
           <p:nvPr>
             <p:ph idx="2"/>
           </p:nvPr>
         </p:nvSpPr>
         <p:spPr>
-          <a:xfrm xmlns:a="http://schemas.openxmlformats.org/drawingml/2006/main">
+          <a:xfrm>
             <a:off x="4648200" y="1600200"/>
             <a:ext cx="4038600" cy="4525963"/>
           </a:xfrm>
         </p:spPr>
         <p:txBody>
-          <a:bodyPr xmlns:a="http://schemas.openxmlformats.org/drawingml/2006/main"/>
-          <a:lstStyle xmlns:a="http://schemas.openxmlformats.org/drawingml/2006/main">
+          <a:bodyPr/>
+          <a:lstStyle>
             <a:lvl1pPr>
               <a:buNone/>
               <a:defRPr sz="2800"/>
@@ -2165,7 +2023,7 @@
               <a:defRPr sz="1800"/>
             </a:lvl9pPr>
           </a:lstStyle>
-          <a:p xmlns:a="http://schemas.openxmlformats.org/drawingml/2006/main">
+          <a:p>
             <a:pPr lvl="0">
               <a:buNone/>
             </a:pPr>
@@ -2173,7 +2031,7 @@
               <a:t>Click to edit Master text styles</a:t>
             </a:r>
           </a:p>
-          <a:p xmlns:a="http://schemas.openxmlformats.org/drawingml/2006/main">
+          <a:p>
             <a:pPr lvl="1">
               <a:buNone/>
             </a:pPr>
@@ -2181,7 +2039,7 @@
               <a:t>Second level</a:t>
             </a:r>
           </a:p>
-          <a:p xmlns:a="http://schemas.openxmlformats.org/drawingml/2006/main">
+          <a:p>
             <a:pPr lvl="2">
               <a:buNone/>
             </a:pPr>
@@ -2189,7 +2047,7 @@
               <a:t>Third level</a:t>
             </a:r>
           </a:p>
-          <a:p xmlns:a="http://schemas.openxmlformats.org/drawingml/2006/main">
+          <a:p>
             <a:pPr lvl="3">
               <a:buNone/>
             </a:pPr>
@@ -2197,7 +2055,7 @@
               <a:t>Fourth level</a:t>
             </a:r>
           </a:p>
-          <a:p xmlns:a="http://schemas.openxmlformats.org/drawingml/2006/main">
+          <a:p>
             <a:pPr lvl="4">
               <a:buNone/>
             </a:pPr>
@@ -2210,14 +2068,14 @@
       <p:sp>
         <p:nvSpPr>
           <p:cNvPr id="5" name="Date Placeholder 4">
-            <a:extLst xmlns:a="http://schemas.openxmlformats.org/drawingml/2006/main">
+            <a:extLst>
               <a:ext uri="{FF2B5EF4-FFF2-40B4-BE49-F238E27FC236}">
                 <a16:creationId xmlns:a16="http://schemas.microsoft.com/office/drawing/2014/main" id="{9AA04AC3-6EFF-44B5-B9B0-088BBEF7D302}"/>
               </a:ext>
             </a:extLst>
           </p:cNvPr>
           <p:cNvSpPr>
-            <a:spLocks xmlns:a="http://schemas.openxmlformats.org/drawingml/2006/main" noGrp="1"/>
+            <a:spLocks noGrp="1"/>
           </p:cNvSpPr>
           <p:nvPr>
             <p:ph type="dt" idx="10"/>
@@ -2225,11 +2083,11 @@
         </p:nvSpPr>
         <p:spPr/>
         <p:txBody>
-          <a:bodyPr xmlns:a="http://schemas.openxmlformats.org/drawingml/2006/main"/>
-          <a:lstStyle xmlns:a="http://schemas.openxmlformats.org/drawingml/2006/main"/>
-          <a:p xmlns:a="http://schemas.openxmlformats.org/drawingml/2006/main">
+          <a:bodyPr/>
+          <a:lstStyle/>
+          <a:p>
             <a:fld id="{1D8BD707-D9CF-40AE-B4C6-C98DA3205C09}" type="datetimeFigureOut">
-              <a:t>2026-09-30</a:t>
+              <a:t>2026-10-06</a:t>
             </a:fld>
             <a:endParaRPr/>
           </a:p>
@@ -2238,14 +2096,14 @@
       <p:sp>
         <p:nvSpPr>
           <p:cNvPr id="6" name="Footer Placeholder 5">
-            <a:extLst xmlns:a="http://schemas.openxmlformats.org/drawingml/2006/main">
+            <a:extLst>
               <a:ext uri="{FF2B5EF4-FFF2-40B4-BE49-F238E27FC236}">
                 <a16:creationId xmlns:a16="http://schemas.microsoft.com/office/drawing/2014/main" id="{22BF17F7-3ACB-4C78-A644-F245FE654549}"/>
               </a:ext>
             </a:extLst>
           </p:cNvPr>
           <p:cNvSpPr>
-            <a:spLocks xmlns:a="http://schemas.openxmlformats.org/drawingml/2006/main" noGrp="1"/>
+            <a:spLocks noGrp="1"/>
           </p:cNvSpPr>
           <p:nvPr>
             <p:ph type="ftr" idx="11"/>
@@ -2253,9 +2111,9 @@
         </p:nvSpPr>
         <p:spPr/>
         <p:txBody>
-          <a:bodyPr xmlns:a="http://schemas.openxmlformats.org/drawingml/2006/main"/>
-          <a:lstStyle xmlns:a="http://schemas.openxmlformats.org/drawingml/2006/main"/>
-          <a:p xmlns:a="http://schemas.openxmlformats.org/drawingml/2006/main">
+          <a:bodyPr/>
+          <a:lstStyle/>
+          <a:p>
             <a:endParaRPr/>
           </a:p>
         </p:txBody>
@@ -2263,14 +2121,14 @@
       <p:sp>
         <p:nvSpPr>
           <p:cNvPr id="7" name="Slide Number Placeholder 6">
-            <a:extLst xmlns:a="http://schemas.openxmlformats.org/drawingml/2006/main">
+            <a:extLst>
               <a:ext uri="{FF2B5EF4-FFF2-40B4-BE49-F238E27FC236}">
                 <a16:creationId xmlns:a16="http://schemas.microsoft.com/office/drawing/2014/main" id="{4F5A8B4F-169D-4E9B-87B0-85DAB97C7BDA}"/>
               </a:ext>
             </a:extLst>
           </p:cNvPr>
           <p:cNvSpPr>
-            <a:spLocks xmlns:a="http://schemas.openxmlformats.org/drawingml/2006/main" noGrp="1"/>
+            <a:spLocks noGrp="1"/>
           </p:cNvSpPr>
           <p:nvPr>
             <p:ph type="sldNum" idx="12"/>
@@ -2278,9 +2136,9 @@
         </p:nvSpPr>
         <p:spPr/>
         <p:txBody>
-          <a:bodyPr xmlns:a="http://schemas.openxmlformats.org/drawingml/2006/main"/>
-          <a:lstStyle xmlns:a="http://schemas.openxmlformats.org/drawingml/2006/main"/>
-          <a:p xmlns:a="http://schemas.openxmlformats.org/drawingml/2006/main">
+          <a:bodyPr/>
+          <a:lstStyle/>
+          <a:p>
             <a:fld id="{B6F15528-21DE-4FAA-801E-634DDDAF4B2B}" type="slidenum">
               <a:t>‹#›</a:t>
             </a:fld>
@@ -2290,11 +2148,14 @@
       </p:sp>
     </p:spTree>
   </p:cSld>
+  <p:clrMapOvr>
+    <a:masterClrMapping/>
+  </p:clrMapOvr>
 </p:sldLayout>
 </file>
 
 <file path=ppt/slideLayouts/slideLayout5.xml><?xml version="1.0" encoding="utf-8"?>
-<p:sldLayout xmlns:p="http://schemas.openxmlformats.org/presentationml/2006/main" type="twoTxTwoObj" preserve="1">
+<p:sldLayout xmlns:a="http://schemas.openxmlformats.org/drawingml/2006/main" xmlns:r="http://schemas.openxmlformats.org/officeDocument/2006/relationships" xmlns:p="http://schemas.openxmlformats.org/presentationml/2006/main" type="twoTxTwoObj" preserve="1">
   <p:cSld name="Comparison">
     <p:spTree>
       <p:nvGrpSpPr>
@@ -2303,34 +2164,39 @@
         <p:nvPr/>
       </p:nvGrpSpPr>
       <p:grpSpPr>
-        <a:xfrm xmlns:a="http://schemas.openxmlformats.org/drawingml/2006/main"/>
+        <a:xfrm>
+          <a:off x="0" y="0"/>
+          <a:ext cx="0" cy="0"/>
+          <a:chOff x="0" y="0"/>
+          <a:chExt cx="0" cy="0"/>
+        </a:xfrm>
       </p:grpSpPr>
       <p:sp>
         <p:nvSpPr>
           <p:cNvPr id="2" name="Title 1">
-            <a:extLst xmlns:a="http://schemas.openxmlformats.org/drawingml/2006/main">
+            <a:extLst>
               <a:ext uri="{FF2B5EF4-FFF2-40B4-BE49-F238E27FC236}">
                 <a16:creationId xmlns:a16="http://schemas.microsoft.com/office/drawing/2014/main" id="{6A70D916-9E3D-408F-86FE-B57CD45F489E}"/>
               </a:ext>
             </a:extLst>
           </p:cNvPr>
           <p:cNvSpPr>
-            <a:spLocks xmlns:a="http://schemas.openxmlformats.org/drawingml/2006/main" noGrp="1"/>
-          </p:cNvSpPr>
-          <p:nvPr>
-            <p:ph type="title" idx="0"/>
+            <a:spLocks noGrp="1"/>
+          </p:cNvSpPr>
+          <p:nvPr>
+            <p:ph type="title"/>
           </p:nvPr>
         </p:nvSpPr>
         <p:spPr/>
         <p:txBody>
-          <a:bodyPr xmlns:a="http://schemas.openxmlformats.org/drawingml/2006/main"/>
-          <a:lstStyle xmlns:a="http://schemas.openxmlformats.org/drawingml/2006/main">
+          <a:bodyPr/>
+          <a:lstStyle>
             <a:lvl1pPr>
               <a:buNone/>
               <a:defRPr/>
             </a:lvl1pPr>
           </a:lstStyle>
-          <a:p xmlns:a="http://schemas.openxmlformats.org/drawingml/2006/main">
+          <a:p>
             <a:r>
               <a:t>Click to edit Master title style</a:t>
             </a:r>
@@ -2340,28 +2206,28 @@
       <p:sp>
         <p:nvSpPr>
           <p:cNvPr id="3" name="Text Placeholder 2">
-            <a:extLst xmlns:a="http://schemas.openxmlformats.org/drawingml/2006/main">
+            <a:extLst>
               <a:ext uri="{FF2B5EF4-FFF2-40B4-BE49-F238E27FC236}">
                 <a16:creationId xmlns:a16="http://schemas.microsoft.com/office/drawing/2014/main" id="{6ED89484-955F-44B0-BE9B-24FF3A3180CD}"/>
               </a:ext>
             </a:extLst>
           </p:cNvPr>
           <p:cNvSpPr>
-            <a:spLocks xmlns:a="http://schemas.openxmlformats.org/drawingml/2006/main" noGrp="1"/>
+            <a:spLocks noGrp="1"/>
           </p:cNvSpPr>
           <p:nvPr>
             <p:ph type="body" idx="1"/>
           </p:nvPr>
         </p:nvSpPr>
         <p:spPr>
-          <a:xfrm xmlns:a="http://schemas.openxmlformats.org/drawingml/2006/main">
+          <a:xfrm>
             <a:off x="457200" y="1535113"/>
             <a:ext cx="4040188" cy="639762"/>
           </a:xfrm>
         </p:spPr>
         <p:txBody>
-          <a:bodyPr xmlns:a="http://schemas.openxmlformats.org/drawingml/2006/main" anchor="b"/>
-          <a:lstStyle xmlns:a="http://schemas.openxmlformats.org/drawingml/2006/main">
+          <a:bodyPr anchor="b"/>
+          <a:lstStyle>
             <a:lvl1pPr marL="0" indent="0">
               <a:buNone/>
               <a:defRPr sz="2400" b="1"/>
@@ -2399,7 +2265,7 @@
               <a:defRPr sz="1600" b="1"/>
             </a:lvl9pPr>
           </a:lstStyle>
-          <a:p xmlns:a="http://schemas.openxmlformats.org/drawingml/2006/main">
+          <a:p>
             <a:pPr lvl="0">
               <a:buNone/>
             </a:pPr>
@@ -2412,28 +2278,28 @@
       <p:sp>
         <p:nvSpPr>
           <p:cNvPr id="4" name="Content Placeholder 3">
-            <a:extLst xmlns:a="http://schemas.openxmlformats.org/drawingml/2006/main">
+            <a:extLst>
               <a:ext uri="{FF2B5EF4-FFF2-40B4-BE49-F238E27FC236}">
                 <a16:creationId xmlns:a16="http://schemas.microsoft.com/office/drawing/2014/main" id="{DF607789-59FC-42B2-AE02-3729FB9B8A1F}"/>
               </a:ext>
             </a:extLst>
           </p:cNvPr>
           <p:cNvSpPr>
-            <a:spLocks xmlns:a="http://schemas.openxmlformats.org/drawingml/2006/main" noGrp="1"/>
+            <a:spLocks noGrp="1"/>
           </p:cNvSpPr>
           <p:nvPr>
             <p:ph idx="2"/>
           </p:nvPr>
         </p:nvSpPr>
         <p:spPr>
-          <a:xfrm xmlns:a="http://schemas.openxmlformats.org/drawingml/2006/main">
+          <a:xfrm>
             <a:off x="457200" y="2174875"/>
             <a:ext cx="4040188" cy="3951288"/>
           </a:xfrm>
         </p:spPr>
         <p:txBody>
-          <a:bodyPr xmlns:a="http://schemas.openxmlformats.org/drawingml/2006/main"/>
-          <a:lstStyle xmlns:a="http://schemas.openxmlformats.org/drawingml/2006/main">
+          <a:bodyPr/>
+          <a:lstStyle>
             <a:lvl1pPr>
               <a:buNone/>
               <a:defRPr sz="2400"/>
@@ -2471,7 +2337,7 @@
               <a:defRPr sz="1600"/>
             </a:lvl9pPr>
           </a:lstStyle>
-          <a:p xmlns:a="http://schemas.openxmlformats.org/drawingml/2006/main">
+          <a:p>
             <a:pPr lvl="0">
               <a:buNone/>
             </a:pPr>
@@ -2479,7 +2345,7 @@
               <a:t>Click to edit Master text styles</a:t>
             </a:r>
           </a:p>
-          <a:p xmlns:a="http://schemas.openxmlformats.org/drawingml/2006/main">
+          <a:p>
             <a:pPr lvl="1">
               <a:buNone/>
             </a:pPr>
@@ -2487,7 +2353,7 @@
               <a:t>Second level</a:t>
             </a:r>
           </a:p>
-          <a:p xmlns:a="http://schemas.openxmlformats.org/drawingml/2006/main">
+          <a:p>
             <a:pPr lvl="2">
               <a:buNone/>
             </a:pPr>
@@ -2495,7 +2361,7 @@
               <a:t>Third level</a:t>
             </a:r>
           </a:p>
-          <a:p xmlns:a="http://schemas.openxmlformats.org/drawingml/2006/main">
+          <a:p>
             <a:pPr lvl="3">
               <a:buNone/>
             </a:pPr>
@@ -2503,7 +2369,7 @@
               <a:t>Fourth level</a:t>
             </a:r>
           </a:p>
-          <a:p xmlns:a="http://schemas.openxmlformats.org/drawingml/2006/main">
+          <a:p>
             <a:pPr lvl="4">
               <a:buNone/>
             </a:pPr>
@@ -2516,28 +2382,28 @@
       <p:sp>
         <p:nvSpPr>
           <p:cNvPr id="5" name="Text Placeholder 4">
-            <a:extLst xmlns:a="http://schemas.openxmlformats.org/drawingml/2006/main">
+            <a:extLst>
               <a:ext uri="{FF2B5EF4-FFF2-40B4-BE49-F238E27FC236}">
                 <a16:creationId xmlns:a16="http://schemas.microsoft.com/office/drawing/2014/main" id="{5515B9A8-D3BE-41DF-9000-FF4F9415C166}"/>
               </a:ext>
             </a:extLst>
           </p:cNvPr>
           <p:cNvSpPr>
-            <a:spLocks xmlns:a="http://schemas.openxmlformats.org/drawingml/2006/main" noGrp="1"/>
+            <a:spLocks noGrp="1"/>
           </p:cNvSpPr>
           <p:nvPr>
             <p:ph type="body" idx="3"/>
           </p:nvPr>
         </p:nvSpPr>
         <p:spPr>
-          <a:xfrm xmlns:a="http://schemas.openxmlformats.org/drawingml/2006/main">
+          <a:xfrm>
             <a:off x="4645025" y="1535113"/>
             <a:ext cx="4041775" cy="639762"/>
           </a:xfrm>
         </p:spPr>
         <p:txBody>
-          <a:bodyPr xmlns:a="http://schemas.openxmlformats.org/drawingml/2006/main" anchor="b"/>
-          <a:lstStyle xmlns:a="http://schemas.openxmlformats.org/drawingml/2006/main">
+          <a:bodyPr anchor="b"/>
+          <a:lstStyle>
             <a:lvl1pPr marL="0" indent="0">
               <a:buNone/>
               <a:defRPr sz="2400" b="1"/>
@@ -2575,7 +2441,7 @@
               <a:defRPr sz="1600" b="1"/>
             </a:lvl9pPr>
           </a:lstStyle>
-          <a:p xmlns:a="http://schemas.openxmlformats.org/drawingml/2006/main">
+          <a:p>
             <a:pPr lvl="0">
               <a:buNone/>
             </a:pPr>
@@ -2588,28 +2454,28 @@
       <p:sp>
         <p:nvSpPr>
           <p:cNvPr id="6" name="Content Placeholder 5">
-            <a:extLst xmlns:a="http://schemas.openxmlformats.org/drawingml/2006/main">
+            <a:extLst>
               <a:ext uri="{FF2B5EF4-FFF2-40B4-BE49-F238E27FC236}">
                 <a16:creationId xmlns:a16="http://schemas.microsoft.com/office/drawing/2014/main" id="{A802FA51-41DA-466B-9A51-270B9DC49E27}"/>
               </a:ext>
             </a:extLst>
           </p:cNvPr>
           <p:cNvSpPr>
-            <a:spLocks xmlns:a="http://schemas.openxmlformats.org/drawingml/2006/main" noGrp="1"/>
+            <a:spLocks noGrp="1"/>
           </p:cNvSpPr>
           <p:nvPr>
             <p:ph idx="4"/>
           </p:nvPr>
         </p:nvSpPr>
         <p:spPr>
-          <a:xfrm xmlns:a="http://schemas.openxmlformats.org/drawingml/2006/main">
+          <a:xfrm>
             <a:off x="4645025" y="2174875"/>
             <a:ext cx="4041775" cy="3951288"/>
           </a:xfrm>
         </p:spPr>
         <p:txBody>
-          <a:bodyPr xmlns:a="http://schemas.openxmlformats.org/drawingml/2006/main"/>
-          <a:lstStyle xmlns:a="http://schemas.openxmlformats.org/drawingml/2006/main">
+          <a:bodyPr/>
+          <a:lstStyle>
             <a:lvl1pPr>
               <a:buNone/>
               <a:defRPr sz="2400"/>
@@ -2647,7 +2513,7 @@
               <a:defRPr sz="1600"/>
             </a:lvl9pPr>
           </a:lstStyle>
-          <a:p xmlns:a="http://schemas.openxmlformats.org/drawingml/2006/main">
+          <a:p>
             <a:pPr lvl="0">
               <a:buNone/>
             </a:pPr>
@@ -2655,7 +2521,7 @@
               <a:t>Click to edit Master text styles</a:t>
             </a:r>
           </a:p>
-          <a:p xmlns:a="http://schemas.openxmlformats.org/drawingml/2006/main">
+          <a:p>
             <a:pPr lvl="1">
               <a:buNone/>
             </a:pPr>
@@ -2663,7 +2529,7 @@
               <a:t>Second level</a:t>
             </a:r>
           </a:p>
-          <a:p xmlns:a="http://schemas.openxmlformats.org/drawingml/2006/main">
+          <a:p>
             <a:pPr lvl="2">
               <a:buNone/>
             </a:pPr>
@@ -2671,7 +2537,7 @@
               <a:t>Third level</a:t>
             </a:r>
           </a:p>
-          <a:p xmlns:a="http://schemas.openxmlformats.org/drawingml/2006/main">
+          <a:p>
             <a:pPr lvl="3">
               <a:buNone/>
             </a:pPr>
@@ -2679,7 +2545,7 @@
               <a:t>Fourth level</a:t>
             </a:r>
           </a:p>
-          <a:p xmlns:a="http://schemas.openxmlformats.org/drawingml/2006/main">
+          <a:p>
             <a:pPr lvl="4">
               <a:buNone/>
             </a:pPr>
@@ -2692,14 +2558,14 @@
       <p:sp>
         <p:nvSpPr>
           <p:cNvPr id="7" name="Date Placeholder 6">
-            <a:extLst xmlns:a="http://schemas.openxmlformats.org/drawingml/2006/main">
+            <a:extLst>
               <a:ext uri="{FF2B5EF4-FFF2-40B4-BE49-F238E27FC236}">
                 <a16:creationId xmlns:a16="http://schemas.microsoft.com/office/drawing/2014/main" id="{A7238F09-B2D3-45D0-851D-E117036FC627}"/>
               </a:ext>
             </a:extLst>
           </p:cNvPr>
           <p:cNvSpPr>
-            <a:spLocks xmlns:a="http://schemas.openxmlformats.org/drawingml/2006/main" noGrp="1"/>
+            <a:spLocks noGrp="1"/>
           </p:cNvSpPr>
           <p:nvPr>
             <p:ph type="dt" idx="10"/>
@@ -2707,11 +2573,11 @@
         </p:nvSpPr>
         <p:spPr/>
         <p:txBody>
-          <a:bodyPr xmlns:a="http://schemas.openxmlformats.org/drawingml/2006/main"/>
-          <a:lstStyle xmlns:a="http://schemas.openxmlformats.org/drawingml/2006/main"/>
-          <a:p xmlns:a="http://schemas.openxmlformats.org/drawingml/2006/main">
+          <a:bodyPr/>
+          <a:lstStyle/>
+          <a:p>
             <a:fld id="{1D8BD707-D9CF-40AE-B4C6-C98DA3205C09}" type="datetimeFigureOut">
-              <a:t>2026-09-30</a:t>
+              <a:t>2026-10-06</a:t>
             </a:fld>
             <a:endParaRPr/>
           </a:p>
@@ -2720,14 +2586,14 @@
       <p:sp>
         <p:nvSpPr>
           <p:cNvPr id="8" name="Footer Placeholder 7">
-            <a:extLst xmlns:a="http://schemas.openxmlformats.org/drawingml/2006/main">
+            <a:extLst>
               <a:ext uri="{FF2B5EF4-FFF2-40B4-BE49-F238E27FC236}">
                 <a16:creationId xmlns:a16="http://schemas.microsoft.com/office/drawing/2014/main" id="{EBBAAACC-5609-479E-9B7B-BA4EDD3B4C15}"/>
               </a:ext>
             </a:extLst>
           </p:cNvPr>
           <p:cNvSpPr>
-            <a:spLocks xmlns:a="http://schemas.openxmlformats.org/drawingml/2006/main" noGrp="1"/>
+            <a:spLocks noGrp="1"/>
           </p:cNvSpPr>
           <p:nvPr>
             <p:ph type="ftr" idx="11"/>
@@ -2735,9 +2601,9 @@
         </p:nvSpPr>
         <p:spPr/>
         <p:txBody>
-          <a:bodyPr xmlns:a="http://schemas.openxmlformats.org/drawingml/2006/main"/>
-          <a:lstStyle xmlns:a="http://schemas.openxmlformats.org/drawingml/2006/main"/>
-          <a:p xmlns:a="http://schemas.openxmlformats.org/drawingml/2006/main">
+          <a:bodyPr/>
+          <a:lstStyle/>
+          <a:p>
             <a:endParaRPr/>
           </a:p>
         </p:txBody>
@@ -2745,14 +2611,14 @@
       <p:sp>
         <p:nvSpPr>
           <p:cNvPr id="9" name="Slide Number Placeholder 8">
-            <a:extLst xmlns:a="http://schemas.openxmlformats.org/drawingml/2006/main">
+            <a:extLst>
               <a:ext uri="{FF2B5EF4-FFF2-40B4-BE49-F238E27FC236}">
                 <a16:creationId xmlns:a16="http://schemas.microsoft.com/office/drawing/2014/main" id="{55F689E8-388D-4ACE-ABC7-5B8DDAD5525A}"/>
               </a:ext>
             </a:extLst>
           </p:cNvPr>
           <p:cNvSpPr>
-            <a:spLocks xmlns:a="http://schemas.openxmlformats.org/drawingml/2006/main" noGrp="1"/>
+            <a:spLocks noGrp="1"/>
           </p:cNvSpPr>
           <p:nvPr>
             <p:ph type="sldNum" idx="12"/>
@@ -2760,9 +2626,9 @@
         </p:nvSpPr>
         <p:spPr/>
         <p:txBody>
-          <a:bodyPr xmlns:a="http://schemas.openxmlformats.org/drawingml/2006/main"/>
-          <a:lstStyle xmlns:a="http://schemas.openxmlformats.org/drawingml/2006/main"/>
-          <a:p xmlns:a="http://schemas.openxmlformats.org/drawingml/2006/main">
+          <a:bodyPr/>
+          <a:lstStyle/>
+          <a:p>
             <a:fld id="{B6F15528-21DE-4FAA-801E-634DDDAF4B2B}" type="slidenum">
               <a:t>‹#›</a:t>
             </a:fld>
@@ -2772,11 +2638,14 @@
       </p:sp>
     </p:spTree>
   </p:cSld>
+  <p:clrMapOvr>
+    <a:masterClrMapping/>
+  </p:clrMapOvr>
 </p:sldLayout>
 </file>
 
 <file path=ppt/slideLayouts/slideLayout6.xml><?xml version="1.0" encoding="utf-8"?>
-<p:sldLayout xmlns:p="http://schemas.openxmlformats.org/presentationml/2006/main" type="titleOnly" preserve="1">
+<p:sldLayout xmlns:a="http://schemas.openxmlformats.org/drawingml/2006/main" xmlns:r="http://schemas.openxmlformats.org/officeDocument/2006/relationships" xmlns:p="http://schemas.openxmlformats.org/presentationml/2006/main" type="titleOnly" preserve="1">
   <p:cSld name="Title Only">
     <p:spTree>
       <p:nvGrpSpPr>
@@ -2785,29 +2654,34 @@
         <p:nvPr/>
       </p:nvGrpSpPr>
       <p:grpSpPr>
-        <a:xfrm xmlns:a="http://schemas.openxmlformats.org/drawingml/2006/main"/>
+        <a:xfrm>
+          <a:off x="0" y="0"/>
+          <a:ext cx="0" cy="0"/>
+          <a:chOff x="0" y="0"/>
+          <a:chExt cx="0" cy="0"/>
+        </a:xfrm>
       </p:grpSpPr>
       <p:sp>
         <p:nvSpPr>
           <p:cNvPr id="2" name="Title 1">
-            <a:extLst xmlns:a="http://schemas.openxmlformats.org/drawingml/2006/main">
+            <a:extLst>
               <a:ext uri="{FF2B5EF4-FFF2-40B4-BE49-F238E27FC236}">
                 <a16:creationId xmlns:a16="http://schemas.microsoft.com/office/drawing/2014/main" id="{BEFEE046-6A5F-4CB5-8203-CF17E8A2BBAC}"/>
               </a:ext>
             </a:extLst>
           </p:cNvPr>
           <p:cNvSpPr>
-            <a:spLocks xmlns:a="http://schemas.openxmlformats.org/drawingml/2006/main" noGrp="1"/>
-          </p:cNvSpPr>
-          <p:nvPr>
-            <p:ph type="title" idx="0"/>
+            <a:spLocks noGrp="1"/>
+          </p:cNvSpPr>
+          <p:nvPr>
+            <p:ph type="title"/>
           </p:nvPr>
         </p:nvSpPr>
         <p:spPr/>
         <p:txBody>
-          <a:bodyPr xmlns:a="http://schemas.openxmlformats.org/drawingml/2006/main"/>
-          <a:lstStyle xmlns:a="http://schemas.openxmlformats.org/drawingml/2006/main"/>
-          <a:p xmlns:a="http://schemas.openxmlformats.org/drawingml/2006/main">
+          <a:bodyPr/>
+          <a:lstStyle/>
+          <a:p>
             <a:r>
               <a:t>Click to edit Master title style</a:t>
             </a:r>
@@ -2817,14 +2691,14 @@
       <p:sp>
         <p:nvSpPr>
           <p:cNvPr id="3" name="Date Placeholder 2">
-            <a:extLst xmlns:a="http://schemas.openxmlformats.org/drawingml/2006/main">
+            <a:extLst>
               <a:ext uri="{FF2B5EF4-FFF2-40B4-BE49-F238E27FC236}">
                 <a16:creationId xmlns:a16="http://schemas.microsoft.com/office/drawing/2014/main" id="{F868AFC3-1FBB-4126-9C7E-8D0A9A6207BD}"/>
               </a:ext>
             </a:extLst>
           </p:cNvPr>
           <p:cNvSpPr>
-            <a:spLocks xmlns:a="http://schemas.openxmlformats.org/drawingml/2006/main" noGrp="1"/>
+            <a:spLocks noGrp="1"/>
           </p:cNvSpPr>
           <p:nvPr>
             <p:ph type="dt" idx="10"/>
@@ -2832,11 +2706,11 @@
         </p:nvSpPr>
         <p:spPr/>
         <p:txBody>
-          <a:bodyPr xmlns:a="http://schemas.openxmlformats.org/drawingml/2006/main"/>
-          <a:lstStyle xmlns:a="http://schemas.openxmlformats.org/drawingml/2006/main"/>
-          <a:p xmlns:a="http://schemas.openxmlformats.org/drawingml/2006/main">
+          <a:bodyPr/>
+          <a:lstStyle/>
+          <a:p>
             <a:fld id="{1D8BD707-D9CF-40AE-B4C6-C98DA3205C09}" type="datetimeFigureOut">
-              <a:t>2026-09-30</a:t>
+              <a:t>2026-10-06</a:t>
             </a:fld>
             <a:endParaRPr/>
           </a:p>
@@ -2845,14 +2719,14 @@
       <p:sp>
         <p:nvSpPr>
           <p:cNvPr id="4" name="Footer Placeholder 3">
-            <a:extLst xmlns:a="http://schemas.openxmlformats.org/drawingml/2006/main">
+            <a:extLst>
               <a:ext uri="{FF2B5EF4-FFF2-40B4-BE49-F238E27FC236}">
                 <a16:creationId xmlns:a16="http://schemas.microsoft.com/office/drawing/2014/main" id="{06DD5A0A-4553-4491-89A4-60EC6EFC678B}"/>
               </a:ext>
             </a:extLst>
           </p:cNvPr>
           <p:cNvSpPr>
-            <a:spLocks xmlns:a="http://schemas.openxmlformats.org/drawingml/2006/main" noGrp="1"/>
+            <a:spLocks noGrp="1"/>
           </p:cNvSpPr>
           <p:nvPr>
             <p:ph type="ftr" idx="11"/>
@@ -2860,9 +2734,9 @@
         </p:nvSpPr>
         <p:spPr/>
         <p:txBody>
-          <a:bodyPr xmlns:a="http://schemas.openxmlformats.org/drawingml/2006/main"/>
-          <a:lstStyle xmlns:a="http://schemas.openxmlformats.org/drawingml/2006/main"/>
-          <a:p xmlns:a="http://schemas.openxmlformats.org/drawingml/2006/main">
+          <a:bodyPr/>
+          <a:lstStyle/>
+          <a:p>
             <a:endParaRPr/>
           </a:p>
         </p:txBody>
@@ -2870,14 +2744,14 @@
       <p:sp>
         <p:nvSpPr>
           <p:cNvPr id="5" name="Slide Number Placeholder 4">
-            <a:extLst xmlns:a="http://schemas.openxmlformats.org/drawingml/2006/main">
+            <a:extLst>
               <a:ext uri="{FF2B5EF4-FFF2-40B4-BE49-F238E27FC236}">
                 <a16:creationId xmlns:a16="http://schemas.microsoft.com/office/drawing/2014/main" id="{35ADC399-6799-4E75-A2A8-536E5A739E7B}"/>
               </a:ext>
             </a:extLst>
           </p:cNvPr>
           <p:cNvSpPr>
-            <a:spLocks xmlns:a="http://schemas.openxmlformats.org/drawingml/2006/main" noGrp="1"/>
+            <a:spLocks noGrp="1"/>
           </p:cNvSpPr>
           <p:nvPr>
             <p:ph type="sldNum" idx="12"/>
@@ -2885,9 +2759,9 @@
         </p:nvSpPr>
         <p:spPr/>
         <p:txBody>
-          <a:bodyPr xmlns:a="http://schemas.openxmlformats.org/drawingml/2006/main"/>
-          <a:lstStyle xmlns:a="http://schemas.openxmlformats.org/drawingml/2006/main"/>
-          <a:p xmlns:a="http://schemas.openxmlformats.org/drawingml/2006/main">
+          <a:bodyPr/>
+          <a:lstStyle/>
+          <a:p>
             <a:fld id="{B6F15528-21DE-4FAA-801E-634DDDAF4B2B}" type="slidenum">
               <a:t>‹#›</a:t>
             </a:fld>
@@ -2897,11 +2771,14 @@
       </p:sp>
     </p:spTree>
   </p:cSld>
+  <p:clrMapOvr>
+    <a:masterClrMapping/>
+  </p:clrMapOvr>
 </p:sldLayout>
 </file>
 
 <file path=ppt/slideLayouts/slideLayout7.xml><?xml version="1.0" encoding="utf-8"?>
-<p:sldLayout xmlns:p="http://schemas.openxmlformats.org/presentationml/2006/main" type="blank" preserve="1">
+<p:sldLayout xmlns:a="http://schemas.openxmlformats.org/drawingml/2006/main" xmlns:r="http://schemas.openxmlformats.org/officeDocument/2006/relationships" xmlns:p="http://schemas.openxmlformats.org/presentationml/2006/main" type="blank" preserve="1">
   <p:cSld name="Blank">
     <p:spTree>
       <p:nvGrpSpPr>
@@ -2910,19 +2787,24 @@
         <p:nvPr/>
       </p:nvGrpSpPr>
       <p:grpSpPr>
-        <a:xfrm xmlns:a="http://schemas.openxmlformats.org/drawingml/2006/main"/>
+        <a:xfrm>
+          <a:off x="0" y="0"/>
+          <a:ext cx="0" cy="0"/>
+          <a:chOff x="0" y="0"/>
+          <a:chExt cx="0" cy="0"/>
+        </a:xfrm>
       </p:grpSpPr>
       <p:sp>
         <p:nvSpPr>
           <p:cNvPr id="2" name="Date Placeholder 1">
-            <a:extLst xmlns:a="http://schemas.openxmlformats.org/drawingml/2006/main">
+            <a:extLst>
               <a:ext uri="{FF2B5EF4-FFF2-40B4-BE49-F238E27FC236}">
                 <a16:creationId xmlns:a16="http://schemas.microsoft.com/office/drawing/2014/main" id="{56C3BD86-6952-432E-AD7D-1D7045BFDF8F}"/>
               </a:ext>
             </a:extLst>
           </p:cNvPr>
           <p:cNvSpPr>
-            <a:spLocks xmlns:a="http://schemas.openxmlformats.org/drawingml/2006/main" noGrp="1"/>
+            <a:spLocks noGrp="1"/>
           </p:cNvSpPr>
           <p:nvPr>
             <p:ph type="dt" idx="10"/>
@@ -2930,11 +2812,11 @@
         </p:nvSpPr>
         <p:spPr/>
         <p:txBody>
-          <a:bodyPr xmlns:a="http://schemas.openxmlformats.org/drawingml/2006/main"/>
-          <a:lstStyle xmlns:a="http://schemas.openxmlformats.org/drawingml/2006/main"/>
-          <a:p xmlns:a="http://schemas.openxmlformats.org/drawingml/2006/main">
+          <a:bodyPr/>
+          <a:lstStyle/>
+          <a:p>
             <a:fld id="{1D8BD707-D9CF-40AE-B4C6-C98DA3205C09}" type="datetimeFigureOut">
-              <a:t>2026-09-30</a:t>
+              <a:t>2026-10-06</a:t>
             </a:fld>
             <a:endParaRPr/>
           </a:p>
@@ -2943,14 +2825,14 @@
       <p:sp>
         <p:nvSpPr>
           <p:cNvPr id="3" name="Footer Placeholder 2">
-            <a:extLst xmlns:a="http://schemas.openxmlformats.org/drawingml/2006/main">
+            <a:extLst>
               <a:ext uri="{FF2B5EF4-FFF2-40B4-BE49-F238E27FC236}">
                 <a16:creationId xmlns:a16="http://schemas.microsoft.com/office/drawing/2014/main" id="{B07F7F7D-D263-4E38-805B-5E7CFC083E46}"/>
               </a:ext>
             </a:extLst>
           </p:cNvPr>
           <p:cNvSpPr>
-            <a:spLocks xmlns:a="http://schemas.openxmlformats.org/drawingml/2006/main" noGrp="1"/>
+            <a:spLocks noGrp="1"/>
           </p:cNvSpPr>
           <p:nvPr>
             <p:ph type="ftr" idx="11"/>
@@ -2958,9 +2840,9 @@
         </p:nvSpPr>
         <p:spPr/>
         <p:txBody>
-          <a:bodyPr xmlns:a="http://schemas.openxmlformats.org/drawingml/2006/main"/>
-          <a:lstStyle xmlns:a="http://schemas.openxmlformats.org/drawingml/2006/main"/>
-          <a:p xmlns:a="http://schemas.openxmlformats.org/drawingml/2006/main">
+          <a:bodyPr/>
+          <a:lstStyle/>
+          <a:p>
             <a:endParaRPr/>
           </a:p>
         </p:txBody>
@@ -2968,14 +2850,14 @@
       <p:sp>
         <p:nvSpPr>
           <p:cNvPr id="4" name="Slide Number Placeholder 3">
-            <a:extLst xmlns:a="http://schemas.openxmlformats.org/drawingml/2006/main">
+            <a:extLst>
               <a:ext uri="{FF2B5EF4-FFF2-40B4-BE49-F238E27FC236}">
                 <a16:creationId xmlns:a16="http://schemas.microsoft.com/office/drawing/2014/main" id="{B5B0A035-5FB4-435D-BB33-738E60F2EAA0}"/>
               </a:ext>
             </a:extLst>
           </p:cNvPr>
           <p:cNvSpPr>
-            <a:spLocks xmlns:a="http://schemas.openxmlformats.org/drawingml/2006/main" noGrp="1"/>
+            <a:spLocks noGrp="1"/>
           </p:cNvSpPr>
           <p:nvPr>
             <p:ph type="sldNum" idx="12"/>
@@ -2983,9 +2865,9 @@
         </p:nvSpPr>
         <p:spPr/>
         <p:txBody>
-          <a:bodyPr xmlns:a="http://schemas.openxmlformats.org/drawingml/2006/main"/>
-          <a:lstStyle xmlns:a="http://schemas.openxmlformats.org/drawingml/2006/main"/>
-          <a:p xmlns:a="http://schemas.openxmlformats.org/drawingml/2006/main">
+          <a:bodyPr/>
+          <a:lstStyle/>
+          <a:p>
             <a:fld id="{B6F15528-21DE-4FAA-801E-634DDDAF4B2B}" type="slidenum">
               <a:t>‹#›</a:t>
             </a:fld>
@@ -2995,11 +2877,14 @@
       </p:sp>
     </p:spTree>
   </p:cSld>
+  <p:clrMapOvr>
+    <a:masterClrMapping/>
+  </p:clrMapOvr>
 </p:sldLayout>
 </file>
 
 <file path=ppt/slideLayouts/slideLayout8.xml><?xml version="1.0" encoding="utf-8"?>
-<p:sldLayout xmlns:p="http://schemas.openxmlformats.org/presentationml/2006/main" type="objTx" preserve="1">
+<p:sldLayout xmlns:a="http://schemas.openxmlformats.org/drawingml/2006/main" xmlns:r="http://schemas.openxmlformats.org/officeDocument/2006/relationships" xmlns:p="http://schemas.openxmlformats.org/presentationml/2006/main" type="objTx" preserve="1">
   <p:cSld name="Content with Caption">
     <p:spTree>
       <p:nvGrpSpPr>
@@ -3008,39 +2893,44 @@
         <p:nvPr/>
       </p:nvGrpSpPr>
       <p:grpSpPr>
-        <a:xfrm xmlns:a="http://schemas.openxmlformats.org/drawingml/2006/main"/>
+        <a:xfrm>
+          <a:off x="0" y="0"/>
+          <a:ext cx="0" cy="0"/>
+          <a:chOff x="0" y="0"/>
+          <a:chExt cx="0" cy="0"/>
+        </a:xfrm>
       </p:grpSpPr>
       <p:sp>
         <p:nvSpPr>
           <p:cNvPr id="2" name="Title 1">
-            <a:extLst xmlns:a="http://schemas.openxmlformats.org/drawingml/2006/main">
+            <a:extLst>
               <a:ext uri="{FF2B5EF4-FFF2-40B4-BE49-F238E27FC236}">
                 <a16:creationId xmlns:a16="http://schemas.microsoft.com/office/drawing/2014/main" id="{C0941C1F-B167-4509-9A77-F72B962BC4DC}"/>
               </a:ext>
             </a:extLst>
           </p:cNvPr>
           <p:cNvSpPr>
-            <a:spLocks xmlns:a="http://schemas.openxmlformats.org/drawingml/2006/main" noGrp="1"/>
-          </p:cNvSpPr>
-          <p:nvPr>
-            <p:ph type="title" idx="0"/>
+            <a:spLocks noGrp="1"/>
+          </p:cNvSpPr>
+          <p:nvPr>
+            <p:ph type="title"/>
           </p:nvPr>
         </p:nvSpPr>
         <p:spPr>
-          <a:xfrm xmlns:a="http://schemas.openxmlformats.org/drawingml/2006/main">
+          <a:xfrm>
             <a:off x="457200" y="273050"/>
             <a:ext cx="3008313" cy="1162050"/>
           </a:xfrm>
         </p:spPr>
         <p:txBody>
-          <a:bodyPr xmlns:a="http://schemas.openxmlformats.org/drawingml/2006/main" anchor="b"/>
-          <a:lstStyle xmlns:a="http://schemas.openxmlformats.org/drawingml/2006/main">
+          <a:bodyPr anchor="b"/>
+          <a:lstStyle>
             <a:lvl1pPr algn="l">
               <a:buNone/>
               <a:defRPr sz="2000" b="1"/>
             </a:lvl1pPr>
           </a:lstStyle>
-          <a:p xmlns:a="http://schemas.openxmlformats.org/drawingml/2006/main">
+          <a:p>
             <a:r>
               <a:t>Click to edit Master title style</a:t>
             </a:r>
@@ -3050,28 +2940,28 @@
       <p:sp>
         <p:nvSpPr>
           <p:cNvPr id="3" name="Content Placeholder 2">
-            <a:extLst xmlns:a="http://schemas.openxmlformats.org/drawingml/2006/main">
+            <a:extLst>
               <a:ext uri="{FF2B5EF4-FFF2-40B4-BE49-F238E27FC236}">
                 <a16:creationId xmlns:a16="http://schemas.microsoft.com/office/drawing/2014/main" id="{56DAD8A7-65B3-4C7C-B26E-CB3A1325CD7D}"/>
               </a:ext>
             </a:extLst>
           </p:cNvPr>
           <p:cNvSpPr>
-            <a:spLocks xmlns:a="http://schemas.openxmlformats.org/drawingml/2006/main" noGrp="1"/>
+            <a:spLocks noGrp="1"/>
           </p:cNvSpPr>
           <p:nvPr>
             <p:ph idx="1"/>
           </p:nvPr>
         </p:nvSpPr>
         <p:spPr>
-          <a:xfrm xmlns:a="http://schemas.openxmlformats.org/drawingml/2006/main">
+          <a:xfrm>
             <a:off x="3575050" y="273050"/>
             <a:ext cx="5111750" cy="5853113"/>
           </a:xfrm>
         </p:spPr>
         <p:txBody>
-          <a:bodyPr xmlns:a="http://schemas.openxmlformats.org/drawingml/2006/main"/>
-          <a:lstStyle xmlns:a="http://schemas.openxmlformats.org/drawingml/2006/main">
+          <a:bodyPr/>
+          <a:lstStyle>
             <a:lvl1pPr>
               <a:buNone/>
               <a:defRPr sz="3200"/>
@@ -3109,7 +2999,7 @@
               <a:defRPr sz="2000"/>
             </a:lvl9pPr>
           </a:lstStyle>
-          <a:p xmlns:a="http://schemas.openxmlformats.org/drawingml/2006/main">
+          <a:p>
             <a:pPr lvl="0">
               <a:buNone/>
             </a:pPr>
@@ -3117,7 +3007,7 @@
               <a:t>Click to edit Master text styles</a:t>
             </a:r>
           </a:p>
-          <a:p xmlns:a="http://schemas.openxmlformats.org/drawingml/2006/main">
+          <a:p>
             <a:pPr lvl="1">
               <a:buNone/>
             </a:pPr>
@@ -3125,7 +3015,7 @@
               <a:t>Second level</a:t>
             </a:r>
           </a:p>
-          <a:p xmlns:a="http://schemas.openxmlformats.org/drawingml/2006/main">
+          <a:p>
             <a:pPr lvl="2">
               <a:buNone/>
             </a:pPr>
@@ -3133,7 +3023,7 @@
               <a:t>Third level</a:t>
             </a:r>
           </a:p>
-          <a:p xmlns:a="http://schemas.openxmlformats.org/drawingml/2006/main">
+          <a:p>
             <a:pPr lvl="3">
               <a:buNone/>
             </a:pPr>
@@ -3141,7 +3031,7 @@
               <a:t>Fourth level</a:t>
             </a:r>
           </a:p>
-          <a:p xmlns:a="http://schemas.openxmlformats.org/drawingml/2006/main">
+          <a:p>
             <a:pPr lvl="4">
               <a:buNone/>
             </a:pPr>
@@ -3154,28 +3044,28 @@
       <p:sp>
         <p:nvSpPr>
           <p:cNvPr id="4" name="Text Placeholder 3">
-            <a:extLst xmlns:a="http://schemas.openxmlformats.org/drawingml/2006/main">
+            <a:extLst>
               <a:ext uri="{FF2B5EF4-FFF2-40B4-BE49-F238E27FC236}">
                 <a16:creationId xmlns:a16="http://schemas.microsoft.com/office/drawing/2014/main" id="{E0AEB366-F88D-49B7-A636-B3F86721E641}"/>
               </a:ext>
             </a:extLst>
           </p:cNvPr>
           <p:cNvSpPr>
-            <a:spLocks xmlns:a="http://schemas.openxmlformats.org/drawingml/2006/main" noGrp="1"/>
+            <a:spLocks noGrp="1"/>
           </p:cNvSpPr>
           <p:nvPr>
             <p:ph type="body" idx="2"/>
           </p:nvPr>
         </p:nvSpPr>
         <p:spPr>
-          <a:xfrm xmlns:a="http://schemas.openxmlformats.org/drawingml/2006/main">
+          <a:xfrm>
             <a:off x="457200" y="1435100"/>
             <a:ext cx="3008313" cy="4691063"/>
           </a:xfrm>
         </p:spPr>
         <p:txBody>
-          <a:bodyPr xmlns:a="http://schemas.openxmlformats.org/drawingml/2006/main"/>
-          <a:lstStyle xmlns:a="http://schemas.openxmlformats.org/drawingml/2006/main">
+          <a:bodyPr/>
+          <a:lstStyle>
             <a:lvl1pPr marL="0" indent="0">
               <a:buNone/>
               <a:defRPr sz="1400"/>
@@ -3213,7 +3103,7 @@
               <a:defRPr sz="900"/>
             </a:lvl9pPr>
           </a:lstStyle>
-          <a:p xmlns:a="http://schemas.openxmlformats.org/drawingml/2006/main">
+          <a:p>
             <a:pPr lvl="0">
               <a:buNone/>
             </a:pPr>
@@ -3226,14 +3116,14 @@
       <p:sp>
         <p:nvSpPr>
           <p:cNvPr id="5" name="Date Placeholder 4">
-            <a:extLst xmlns:a="http://schemas.openxmlformats.org/drawingml/2006/main">
+            <a:extLst>
               <a:ext uri="{FF2B5EF4-FFF2-40B4-BE49-F238E27FC236}">
                 <a16:creationId xmlns:a16="http://schemas.microsoft.com/office/drawing/2014/main" id="{99631EC2-B6B4-4E6D-93E7-C61226AB939F}"/>
               </a:ext>
             </a:extLst>
           </p:cNvPr>
           <p:cNvSpPr>
-            <a:spLocks xmlns:a="http://schemas.openxmlformats.org/drawingml/2006/main" noGrp="1"/>
+            <a:spLocks noGrp="1"/>
           </p:cNvSpPr>
           <p:nvPr>
             <p:ph type="dt" idx="10"/>
@@ -3241,11 +3131,11 @@
         </p:nvSpPr>
         <p:spPr/>
         <p:txBody>
-          <a:bodyPr xmlns:a="http://schemas.openxmlformats.org/drawingml/2006/main"/>
-          <a:lstStyle xmlns:a="http://schemas.openxmlformats.org/drawingml/2006/main"/>
-          <a:p xmlns:a="http://schemas.openxmlformats.org/drawingml/2006/main">
+          <a:bodyPr/>
+          <a:lstStyle/>
+          <a:p>
             <a:fld id="{1D8BD707-D9CF-40AE-B4C6-C98DA3205C09}" type="datetimeFigureOut">
-              <a:t>2026-09-30</a:t>
+              <a:t>2026-10-06</a:t>
             </a:fld>
             <a:endParaRPr/>
           </a:p>
@@ -3254,14 +3144,14 @@
       <p:sp>
         <p:nvSpPr>
           <p:cNvPr id="6" name="Footer Placeholder 5">
-            <a:extLst xmlns:a="http://schemas.openxmlformats.org/drawingml/2006/main">
+            <a:extLst>
               <a:ext uri="{FF2B5EF4-FFF2-40B4-BE49-F238E27FC236}">
                 <a16:creationId xmlns:a16="http://schemas.microsoft.com/office/drawing/2014/main" id="{82936C33-F96F-4AF5-B4CA-EEA897E430E2}"/>
               </a:ext>
             </a:extLst>
           </p:cNvPr>
           <p:cNvSpPr>
-            <a:spLocks xmlns:a="http://schemas.openxmlformats.org/drawingml/2006/main" noGrp="1"/>
+            <a:spLocks noGrp="1"/>
           </p:cNvSpPr>
           <p:nvPr>
             <p:ph type="ftr" idx="11"/>
@@ -3269,9 +3159,9 @@
         </p:nvSpPr>
         <p:spPr/>
         <p:txBody>
-          <a:bodyPr xmlns:a="http://schemas.openxmlformats.org/drawingml/2006/main"/>
-          <a:lstStyle xmlns:a="http://schemas.openxmlformats.org/drawingml/2006/main"/>
-          <a:p xmlns:a="http://schemas.openxmlformats.org/drawingml/2006/main">
+          <a:bodyPr/>
+          <a:lstStyle/>
+          <a:p>
             <a:endParaRPr/>
           </a:p>
         </p:txBody>
@@ -3279,14 +3169,14 @@
       <p:sp>
         <p:nvSpPr>
           <p:cNvPr id="7" name="Slide Number Placeholder 6">
-            <a:extLst xmlns:a="http://schemas.openxmlformats.org/drawingml/2006/main">
+            <a:extLst>
               <a:ext uri="{FF2B5EF4-FFF2-40B4-BE49-F238E27FC236}">
                 <a16:creationId xmlns:a16="http://schemas.microsoft.com/office/drawing/2014/main" id="{162EC634-9929-433F-8A2F-20930EAC1CF8}"/>
               </a:ext>
             </a:extLst>
           </p:cNvPr>
           <p:cNvSpPr>
-            <a:spLocks xmlns:a="http://schemas.openxmlformats.org/drawingml/2006/main" noGrp="1"/>
+            <a:spLocks noGrp="1"/>
           </p:cNvSpPr>
           <p:nvPr>
             <p:ph type="sldNum" idx="12"/>
@@ -3294,9 +3184,9 @@
         </p:nvSpPr>
         <p:spPr/>
         <p:txBody>
-          <a:bodyPr xmlns:a="http://schemas.openxmlformats.org/drawingml/2006/main"/>
-          <a:lstStyle xmlns:a="http://schemas.openxmlformats.org/drawingml/2006/main"/>
-          <a:p xmlns:a="http://schemas.openxmlformats.org/drawingml/2006/main">
+          <a:bodyPr/>
+          <a:lstStyle/>
+          <a:p>
             <a:fld id="{B6F15528-21DE-4FAA-801E-634DDDAF4B2B}" type="slidenum">
               <a:t>‹#›</a:t>
             </a:fld>
@@ -3306,11 +3196,14 @@
       </p:sp>
     </p:spTree>
   </p:cSld>
+  <p:clrMapOvr>
+    <a:masterClrMapping/>
+  </p:clrMapOvr>
 </p:sldLayout>
 </file>
 
 <file path=ppt/slideLayouts/slideLayout9.xml><?xml version="1.0" encoding="utf-8"?>
-<p:sldLayout xmlns:p="http://schemas.openxmlformats.org/presentationml/2006/main" type="picTx" preserve="1">
+<p:sldLayout xmlns:a="http://schemas.openxmlformats.org/drawingml/2006/main" xmlns:r="http://schemas.openxmlformats.org/officeDocument/2006/relationships" xmlns:p="http://schemas.openxmlformats.org/presentationml/2006/main" type="picTx" preserve="1">
   <p:cSld name="Picture with Caption">
     <p:spTree>
       <p:nvGrpSpPr>
@@ -3319,39 +3212,44 @@
         <p:nvPr/>
       </p:nvGrpSpPr>
       <p:grpSpPr>
-        <a:xfrm xmlns:a="http://schemas.openxmlformats.org/drawingml/2006/main"/>
+        <a:xfrm>
+          <a:off x="0" y="0"/>
+          <a:ext cx="0" cy="0"/>
+          <a:chOff x="0" y="0"/>
+          <a:chExt cx="0" cy="0"/>
+        </a:xfrm>
       </p:grpSpPr>
       <p:sp>
         <p:nvSpPr>
           <p:cNvPr id="2" name="Title 1">
-            <a:extLst xmlns:a="http://schemas.openxmlformats.org/drawingml/2006/main">
+            <a:extLst>
               <a:ext uri="{FF2B5EF4-FFF2-40B4-BE49-F238E27FC236}">
                 <a16:creationId xmlns:a16="http://schemas.microsoft.com/office/drawing/2014/main" id="{419F6D10-65E5-4671-8B72-ED8073BADFF8}"/>
               </a:ext>
             </a:extLst>
           </p:cNvPr>
           <p:cNvSpPr>
-            <a:spLocks xmlns:a="http://schemas.openxmlformats.org/drawingml/2006/main" noGrp="1"/>
-          </p:cNvSpPr>
-          <p:nvPr>
-            <p:ph type="title" idx="0"/>
+            <a:spLocks noGrp="1"/>
+          </p:cNvSpPr>
+          <p:nvPr>
+            <p:ph type="title"/>
           </p:nvPr>
         </p:nvSpPr>
         <p:spPr>
-          <a:xfrm xmlns:a="http://schemas.openxmlformats.org/drawingml/2006/main">
+          <a:xfrm>
             <a:off x="1792288" y="4800600"/>
             <a:ext cx="5486400" cy="566738"/>
           </a:xfrm>
         </p:spPr>
         <p:txBody>
-          <a:bodyPr xmlns:a="http://schemas.openxmlformats.org/drawingml/2006/main" anchor="b"/>
-          <a:lstStyle xmlns:a="http://schemas.openxmlformats.org/drawingml/2006/main">
+          <a:bodyPr anchor="b"/>
+          <a:lstStyle>
             <a:lvl1pPr algn="l">
               <a:buNone/>
               <a:defRPr sz="2000" b="1"/>
             </a:lvl1pPr>
           </a:lstStyle>
-          <a:p xmlns:a="http://schemas.openxmlformats.org/drawingml/2006/main">
+          <a:p>
             <a:r>
               <a:t>Click to edit Master title style</a:t>
             </a:r>
@@ -3361,28 +3259,28 @@
       <p:sp>
         <p:nvSpPr>
           <p:cNvPr id="3" name="Picture Placeholder 2">
-            <a:extLst xmlns:a="http://schemas.openxmlformats.org/drawingml/2006/main">
+            <a:extLst>
               <a:ext uri="{FF2B5EF4-FFF2-40B4-BE49-F238E27FC236}">
                 <a16:creationId xmlns:a16="http://schemas.microsoft.com/office/drawing/2014/main" id="{0723242F-B909-4AB7-B144-745444BDA7B5}"/>
               </a:ext>
             </a:extLst>
           </p:cNvPr>
           <p:cNvSpPr>
-            <a:spLocks xmlns:a="http://schemas.openxmlformats.org/drawingml/2006/main" noGrp="1"/>
+            <a:spLocks noGrp="1"/>
           </p:cNvSpPr>
           <p:nvPr>
             <p:ph type="pic" idx="1"/>
           </p:nvPr>
         </p:nvSpPr>
         <p:spPr>
-          <a:xfrm xmlns:a="http://schemas.openxmlformats.org/drawingml/2006/main">
+          <a:xfrm>
             <a:off x="1792288" y="612775"/>
             <a:ext cx="5486400" cy="4114800"/>
           </a:xfrm>
         </p:spPr>
         <p:txBody>
-          <a:bodyPr xmlns:a="http://schemas.openxmlformats.org/drawingml/2006/main"/>
-          <a:lstStyle xmlns:a="http://schemas.openxmlformats.org/drawingml/2006/main">
+          <a:bodyPr/>
+          <a:lstStyle>
             <a:lvl1pPr marL="0" indent="0">
               <a:buNone/>
               <a:defRPr sz="3200"/>
@@ -3420,7 +3318,7 @@
               <a:defRPr sz="2000"/>
             </a:lvl9pPr>
           </a:lstStyle>
-          <a:p xmlns:a="http://schemas.openxmlformats.org/drawingml/2006/main">
+          <a:p>
             <a:endParaRPr/>
           </a:p>
         </p:txBody>
@@ -3428,28 +3326,28 @@
       <p:sp>
         <p:nvSpPr>
           <p:cNvPr id="4" name="Text Placeholder 3">
-            <a:extLst xmlns:a="http://schemas.openxmlformats.org/drawingml/2006/main">
+            <a:extLst>
               <a:ext uri="{FF2B5EF4-FFF2-40B4-BE49-F238E27FC236}">
                 <a16:creationId xmlns:a16="http://schemas.microsoft.com/office/drawing/2014/main" id="{14E41341-DDA0-4846-9E2F-CF137539A5AA}"/>
               </a:ext>
             </a:extLst>
           </p:cNvPr>
           <p:cNvSpPr>
-            <a:spLocks xmlns:a="http://schemas.openxmlformats.org/drawingml/2006/main" noGrp="1"/>
+            <a:spLocks noGrp="1"/>
           </p:cNvSpPr>
           <p:nvPr>
             <p:ph type="body" idx="2"/>
           </p:nvPr>
         </p:nvSpPr>
         <p:spPr>
-          <a:xfrm xmlns:a="http://schemas.openxmlformats.org/drawingml/2006/main">
+          <a:xfrm>
             <a:off x="1792288" y="5367338"/>
             <a:ext cx="5486400" cy="804862"/>
           </a:xfrm>
         </p:spPr>
         <p:txBody>
-          <a:bodyPr xmlns:a="http://schemas.openxmlformats.org/drawingml/2006/main"/>
-          <a:lstStyle xmlns:a="http://schemas.openxmlformats.org/drawingml/2006/main">
+          <a:bodyPr/>
+          <a:lstStyle>
             <a:lvl1pPr marL="0" indent="0">
               <a:buNone/>
               <a:defRPr sz="1400"/>
@@ -3487,7 +3385,7 @@
               <a:defRPr sz="900"/>
             </a:lvl9pPr>
           </a:lstStyle>
-          <a:p xmlns:a="http://schemas.openxmlformats.org/drawingml/2006/main">
+          <a:p>
             <a:pPr lvl="0">
               <a:buNone/>
             </a:pPr>
@@ -3500,14 +3398,14 @@
       <p:sp>
         <p:nvSpPr>
           <p:cNvPr id="5" name="Date Placeholder 4">
-            <a:extLst xmlns:a="http://schemas.openxmlformats.org/drawingml/2006/main">
+            <a:extLst>
               <a:ext uri="{FF2B5EF4-FFF2-40B4-BE49-F238E27FC236}">
                 <a16:creationId xmlns:a16="http://schemas.microsoft.com/office/drawing/2014/main" id="{2C8EB21D-4461-447C-B6A8-858C242B9440}"/>
               </a:ext>
             </a:extLst>
           </p:cNvPr>
           <p:cNvSpPr>
-            <a:spLocks xmlns:a="http://schemas.openxmlformats.org/drawingml/2006/main" noGrp="1"/>
+            <a:spLocks noGrp="1"/>
           </p:cNvSpPr>
           <p:nvPr>
             <p:ph type="dt" idx="10"/>
@@ -3515,11 +3413,11 @@
         </p:nvSpPr>
         <p:spPr/>
         <p:txBody>
-          <a:bodyPr xmlns:a="http://schemas.openxmlformats.org/drawingml/2006/main"/>
-          <a:lstStyle xmlns:a="http://schemas.openxmlformats.org/drawingml/2006/main"/>
-          <a:p xmlns:a="http://schemas.openxmlformats.org/drawingml/2006/main">
+          <a:bodyPr/>
+          <a:lstStyle/>
+          <a:p>
             <a:fld id="{1D8BD707-D9CF-40AE-B4C6-C98DA3205C09}" type="datetimeFigureOut">
-              <a:t>2026-09-30</a:t>
+              <a:t>2026-10-06</a:t>
             </a:fld>
             <a:endParaRPr/>
           </a:p>
@@ -3528,14 +3426,14 @@
       <p:sp>
         <p:nvSpPr>
           <p:cNvPr id="6" name="Footer Placeholder 5">
-            <a:extLst xmlns:a="http://schemas.openxmlformats.org/drawingml/2006/main">
+            <a:extLst>
               <a:ext uri="{FF2B5EF4-FFF2-40B4-BE49-F238E27FC236}">
                 <a16:creationId xmlns:a16="http://schemas.microsoft.com/office/drawing/2014/main" id="{F3F63C18-D3E4-45DA-95C9-4F3B03E423DC}"/>
               </a:ext>
             </a:extLst>
           </p:cNvPr>
           <p:cNvSpPr>
-            <a:spLocks xmlns:a="http://schemas.openxmlformats.org/drawingml/2006/main" noGrp="1"/>
+            <a:spLocks noGrp="1"/>
           </p:cNvSpPr>
           <p:nvPr>
             <p:ph type="ftr" idx="11"/>
@@ -3543,9 +3441,9 @@
         </p:nvSpPr>
         <p:spPr/>
         <p:txBody>
-          <a:bodyPr xmlns:a="http://schemas.openxmlformats.org/drawingml/2006/main"/>
-          <a:lstStyle xmlns:a="http://schemas.openxmlformats.org/drawingml/2006/main"/>
-          <a:p xmlns:a="http://schemas.openxmlformats.org/drawingml/2006/main">
+          <a:bodyPr/>
+          <a:lstStyle/>
+          <a:p>
             <a:endParaRPr/>
           </a:p>
         </p:txBody>
@@ -3553,14 +3451,14 @@
       <p:sp>
         <p:nvSpPr>
           <p:cNvPr id="7" name="Slide Number Placeholder 6">
-            <a:extLst xmlns:a="http://schemas.openxmlformats.org/drawingml/2006/main">
+            <a:extLst>
               <a:ext uri="{FF2B5EF4-FFF2-40B4-BE49-F238E27FC236}">
                 <a16:creationId xmlns:a16="http://schemas.microsoft.com/office/drawing/2014/main" id="{7B3A7AD8-E5DF-432B-AA68-C1E9A9DDD738}"/>
               </a:ext>
             </a:extLst>
           </p:cNvPr>
           <p:cNvSpPr>
-            <a:spLocks xmlns:a="http://schemas.openxmlformats.org/drawingml/2006/main" noGrp="1"/>
+            <a:spLocks noGrp="1"/>
           </p:cNvSpPr>
           <p:nvPr>
             <p:ph type="sldNum" idx="12"/>
@@ -3568,9 +3466,9 @@
         </p:nvSpPr>
         <p:spPr/>
         <p:txBody>
-          <a:bodyPr xmlns:a="http://schemas.openxmlformats.org/drawingml/2006/main"/>
-          <a:lstStyle xmlns:a="http://schemas.openxmlformats.org/drawingml/2006/main"/>
-          <a:p xmlns:a="http://schemas.openxmlformats.org/drawingml/2006/main">
+          <a:bodyPr/>
+          <a:lstStyle/>
+          <a:p>
             <a:fld id="{B6F15528-21DE-4FAA-801E-634DDDAF4B2B}" type="slidenum">
               <a:t>‹#›</a:t>
             </a:fld>
@@ -3580,15 +3478,18 @@
       </p:sp>
     </p:spTree>
   </p:cSld>
+  <p:clrMapOvr>
+    <a:masterClrMapping/>
+  </p:clrMapOvr>
 </p:sldLayout>
 </file>
 
 <file path=ppt/slideMasters/slideMaster1.xml><?xml version="1.0" encoding="utf-8"?>
-<p:sldMaster xmlns:p="http://schemas.openxmlformats.org/presentationml/2006/main">
+<p:sldMaster xmlns:a="http://schemas.openxmlformats.org/drawingml/2006/main" xmlns:r="http://schemas.openxmlformats.org/officeDocument/2006/relationships" xmlns:p="http://schemas.openxmlformats.org/presentationml/2006/main">
   <p:cSld>
     <p:bg>
       <p:bgRef idx="1001">
-        <a:schemeClr xmlns:a="http://schemas.openxmlformats.org/drawingml/2006/main" val="bg1"/>
+        <a:schemeClr val="bg1"/>
       </p:bgRef>
     </p:bg>
     <p:spTree>
@@ -3598,39 +3499,44 @@
         <p:nvPr/>
       </p:nvGrpSpPr>
       <p:grpSpPr>
-        <a:xfrm xmlns:a="http://schemas.openxmlformats.org/drawingml/2006/main"/>
+        <a:xfrm>
+          <a:off x="0" y="0"/>
+          <a:ext cx="0" cy="0"/>
+          <a:chOff x="0" y="0"/>
+          <a:chExt cx="0" cy="0"/>
+        </a:xfrm>
       </p:grpSpPr>
       <p:sp>
         <p:nvSpPr>
           <p:cNvPr id="2" name="Title Placeholder 1">
-            <a:extLst xmlns:a="http://schemas.openxmlformats.org/drawingml/2006/main">
+            <a:extLst>
               <a:ext uri="{FF2B5EF4-FFF2-40B4-BE49-F238E27FC236}">
                 <a16:creationId xmlns:a16="http://schemas.microsoft.com/office/drawing/2014/main" id="{EEEF4F6A-8DDC-4519-BACA-506FA2AE3E03}"/>
               </a:ext>
             </a:extLst>
           </p:cNvPr>
           <p:cNvSpPr>
-            <a:spLocks xmlns:a="http://schemas.openxmlformats.org/drawingml/2006/main" noGrp="1"/>
-          </p:cNvSpPr>
-          <p:nvPr>
-            <p:ph type="title" idx="0"/>
+            <a:spLocks noGrp="1"/>
+          </p:cNvSpPr>
+          <p:nvPr>
+            <p:ph type="title"/>
           </p:nvPr>
         </p:nvSpPr>
         <p:spPr>
-          <a:xfrm xmlns:a="http://schemas.openxmlformats.org/drawingml/2006/main">
+          <a:xfrm>
             <a:off x="457200" y="274638"/>
             <a:ext cx="8229600" cy="1143000"/>
           </a:xfrm>
-          <a:prstGeom xmlns:a="http://schemas.openxmlformats.org/drawingml/2006/main" prst="rect">
+          <a:prstGeom prst="rect">
             <a:avLst/>
           </a:prstGeom>
         </p:spPr>
         <p:txBody>
-          <a:bodyPr xmlns:a="http://schemas.openxmlformats.org/drawingml/2006/main" vert="horz" lIns="91440" tIns="45720" rIns="91440" bIns="45720" anchor="ctr">
+          <a:bodyPr vert="horz" lIns="91440" tIns="45720" rIns="91440" bIns="45720" anchor="ctr">
             <a:normAutofit/>
           </a:bodyPr>
-          <a:lstStyle xmlns:a="http://schemas.openxmlformats.org/drawingml/2006/main"/>
-          <a:p xmlns:a="http://schemas.openxmlformats.org/drawingml/2006/main">
+          <a:lstStyle/>
+          <a:p>
             <a:r>
               <a:t>Click to edit Master title style</a:t>
             </a:r>
@@ -3640,34 +3546,34 @@
       <p:sp>
         <p:nvSpPr>
           <p:cNvPr id="3" name="Text Placeholder 2">
-            <a:extLst xmlns:a="http://schemas.openxmlformats.org/drawingml/2006/main">
+            <a:extLst>
               <a:ext uri="{FF2B5EF4-FFF2-40B4-BE49-F238E27FC236}">
                 <a16:creationId xmlns:a16="http://schemas.microsoft.com/office/drawing/2014/main" id="{BCE59996-6039-4762-951A-DF33E9DF7390}"/>
               </a:ext>
             </a:extLst>
           </p:cNvPr>
           <p:cNvSpPr>
-            <a:spLocks xmlns:a="http://schemas.openxmlformats.org/drawingml/2006/main" noGrp="1"/>
+            <a:spLocks noGrp="1"/>
           </p:cNvSpPr>
           <p:nvPr>
             <p:ph type="body" idx="1"/>
           </p:nvPr>
         </p:nvSpPr>
         <p:spPr>
-          <a:xfrm xmlns:a="http://schemas.openxmlformats.org/drawingml/2006/main">
+          <a:xfrm>
             <a:off x="457200" y="1600200"/>
             <a:ext cx="8229600" cy="4525963"/>
           </a:xfrm>
-          <a:prstGeom xmlns:a="http://schemas.openxmlformats.org/drawingml/2006/main" prst="rect">
+          <a:prstGeom prst="rect">
             <a:avLst/>
           </a:prstGeom>
         </p:spPr>
         <p:txBody>
-          <a:bodyPr xmlns:a="http://schemas.openxmlformats.org/drawingml/2006/main" vert="horz" lIns="91440" tIns="45720" rIns="91440" bIns="45720">
+          <a:bodyPr vert="horz" lIns="91440" tIns="45720" rIns="91440" bIns="45720">
             <a:normAutofit/>
           </a:bodyPr>
-          <a:lstStyle xmlns:a="http://schemas.openxmlformats.org/drawingml/2006/main"/>
-          <a:p xmlns:a="http://schemas.openxmlformats.org/drawingml/2006/main">
+          <a:lstStyle/>
+          <a:p>
             <a:pPr lvl="0">
               <a:buNone/>
             </a:pPr>
@@ -3675,7 +3581,7 @@
               <a:t>Click to edit Master text styles</a:t>
             </a:r>
           </a:p>
-          <a:p xmlns:a="http://schemas.openxmlformats.org/drawingml/2006/main">
+          <a:p>
             <a:pPr lvl="1">
               <a:buNone/>
             </a:pPr>
@@ -3683,7 +3589,7 @@
               <a:t>Second level</a:t>
             </a:r>
           </a:p>
-          <a:p xmlns:a="http://schemas.openxmlformats.org/drawingml/2006/main">
+          <a:p>
             <a:pPr lvl="2">
               <a:buNone/>
             </a:pPr>
@@ -3691,7 +3597,7 @@
               <a:t>Third level</a:t>
             </a:r>
           </a:p>
-          <a:p xmlns:a="http://schemas.openxmlformats.org/drawingml/2006/main">
+          <a:p>
             <a:pPr lvl="3">
               <a:buNone/>
             </a:pPr>
@@ -3699,7 +3605,7 @@
               <a:t>Fourth level</a:t>
             </a:r>
           </a:p>
-          <a:p xmlns:a="http://schemas.openxmlformats.org/drawingml/2006/main">
+          <a:p>
             <a:pPr lvl="4">
               <a:buNone/>
             </a:pPr>
@@ -3712,31 +3618,31 @@
       <p:sp>
         <p:nvSpPr>
           <p:cNvPr id="4" name="Date Placeholder 3">
-            <a:extLst xmlns:a="http://schemas.openxmlformats.org/drawingml/2006/main">
+            <a:extLst>
               <a:ext uri="{FF2B5EF4-FFF2-40B4-BE49-F238E27FC236}">
                 <a16:creationId xmlns:a16="http://schemas.microsoft.com/office/drawing/2014/main" id="{44C110C4-C525-40AC-BC43-E53240D306D4}"/>
               </a:ext>
             </a:extLst>
           </p:cNvPr>
           <p:cNvSpPr>
-            <a:spLocks xmlns:a="http://schemas.openxmlformats.org/drawingml/2006/main" noGrp="1"/>
+            <a:spLocks noGrp="1"/>
           </p:cNvSpPr>
           <p:nvPr>
             <p:ph type="dt" idx="2"/>
           </p:nvPr>
         </p:nvSpPr>
         <p:spPr>
-          <a:xfrm xmlns:a="http://schemas.openxmlformats.org/drawingml/2006/main">
+          <a:xfrm>
             <a:off x="457200" y="6356350"/>
             <a:ext cx="2133600" cy="365125"/>
           </a:xfrm>
-          <a:prstGeom xmlns:a="http://schemas.openxmlformats.org/drawingml/2006/main" prst="rect">
+          <a:prstGeom prst="rect">
             <a:avLst/>
           </a:prstGeom>
         </p:spPr>
         <p:txBody>
-          <a:bodyPr xmlns:a="http://schemas.openxmlformats.org/drawingml/2006/main" vert="horz" lIns="91440" tIns="45720" rIns="91440" bIns="45720" anchor="ctr"/>
-          <a:lstStyle xmlns:a="http://schemas.openxmlformats.org/drawingml/2006/main">
+          <a:bodyPr vert="horz" lIns="91440" tIns="45720" rIns="91440" bIns="45720" anchor="ctr"/>
+          <a:lstStyle>
             <a:lvl1pPr algn="l">
               <a:buNone/>
               <a:defRPr sz="1200">
@@ -3748,9 +3654,9 @@
               </a:defRPr>
             </a:lvl1pPr>
           </a:lstStyle>
-          <a:p xmlns:a="http://schemas.openxmlformats.org/drawingml/2006/main">
+          <a:p>
             <a:fld id="{1D8BD707-D9CF-40AE-B4C6-C98DA3205C09}" type="datetimeFigureOut">
-              <a:t>2026-09-30</a:t>
+              <a:t>2026-10-06</a:t>
             </a:fld>
             <a:endParaRPr/>
           </a:p>
@@ -3759,31 +3665,31 @@
       <p:sp>
         <p:nvSpPr>
           <p:cNvPr id="5" name="Footer Placeholder 4">
-            <a:extLst xmlns:a="http://schemas.openxmlformats.org/drawingml/2006/main">
+            <a:extLst>
               <a:ext uri="{FF2B5EF4-FFF2-40B4-BE49-F238E27FC236}">
                 <a16:creationId xmlns:a16="http://schemas.microsoft.com/office/drawing/2014/main" id="{AD021863-D0EE-4433-9AEF-CFE0B49B16BB}"/>
               </a:ext>
             </a:extLst>
           </p:cNvPr>
           <p:cNvSpPr>
-            <a:spLocks xmlns:a="http://schemas.openxmlformats.org/drawingml/2006/main" noGrp="1"/>
+            <a:spLocks noGrp="1"/>
           </p:cNvSpPr>
           <p:nvPr>
             <p:ph type="ftr" idx="3"/>
           </p:nvPr>
         </p:nvSpPr>
         <p:spPr>
-          <a:xfrm xmlns:a="http://schemas.openxmlformats.org/drawingml/2006/main">
+          <a:xfrm>
             <a:off x="3124200" y="6356350"/>
             <a:ext cx="2895600" cy="365125"/>
           </a:xfrm>
-          <a:prstGeom xmlns:a="http://schemas.openxmlformats.org/drawingml/2006/main" prst="rect">
+          <a:prstGeom prst="rect">
             <a:avLst/>
           </a:prstGeom>
         </p:spPr>
         <p:txBody>
-          <a:bodyPr xmlns:a="http://schemas.openxmlformats.org/drawingml/2006/main" vert="horz" lIns="91440" tIns="45720" rIns="91440" bIns="45720" anchor="ctr"/>
-          <a:lstStyle xmlns:a="http://schemas.openxmlformats.org/drawingml/2006/main">
+          <a:bodyPr vert="horz" lIns="91440" tIns="45720" rIns="91440" bIns="45720" anchor="ctr"/>
+          <a:lstStyle>
             <a:lvl1pPr algn="ctr">
               <a:buNone/>
               <a:defRPr sz="1200">
@@ -3795,7 +3701,7 @@
               </a:defRPr>
             </a:lvl1pPr>
           </a:lstStyle>
-          <a:p xmlns:a="http://schemas.openxmlformats.org/drawingml/2006/main">
+          <a:p>
             <a:endParaRPr/>
           </a:p>
         </p:txBody>
@@ -3803,31 +3709,31 @@
       <p:sp>
         <p:nvSpPr>
           <p:cNvPr id="6" name="Slide Number Placeholder 5">
-            <a:extLst xmlns:a="http://schemas.openxmlformats.org/drawingml/2006/main">
+            <a:extLst>
               <a:ext uri="{FF2B5EF4-FFF2-40B4-BE49-F238E27FC236}">
                 <a16:creationId xmlns:a16="http://schemas.microsoft.com/office/drawing/2014/main" id="{2EA05B46-1A11-44F1-B165-F34A952F16C5}"/>
               </a:ext>
             </a:extLst>
           </p:cNvPr>
           <p:cNvSpPr>
-            <a:spLocks xmlns:a="http://schemas.openxmlformats.org/drawingml/2006/main" noGrp="1"/>
+            <a:spLocks noGrp="1"/>
           </p:cNvSpPr>
           <p:nvPr>
             <p:ph type="sldNum" idx="4"/>
           </p:nvPr>
         </p:nvSpPr>
         <p:spPr>
-          <a:xfrm xmlns:a="http://schemas.openxmlformats.org/drawingml/2006/main">
+          <a:xfrm>
             <a:off x="6553200" y="6356350"/>
             <a:ext cx="2133600" cy="365125"/>
           </a:xfrm>
-          <a:prstGeom xmlns:a="http://schemas.openxmlformats.org/drawingml/2006/main" prst="rect">
+          <a:prstGeom prst="rect">
             <a:avLst/>
           </a:prstGeom>
         </p:spPr>
         <p:txBody>
-          <a:bodyPr xmlns:a="http://schemas.openxmlformats.org/drawingml/2006/main" vert="horz" lIns="91440" tIns="45720" rIns="91440" bIns="45720" anchor="ctr"/>
-          <a:lstStyle xmlns:a="http://schemas.openxmlformats.org/drawingml/2006/main">
+          <a:bodyPr vert="horz" lIns="91440" tIns="45720" rIns="91440" bIns="45720" anchor="ctr"/>
+          <a:lstStyle>
             <a:lvl1pPr algn="r">
               <a:buNone/>
               <a:defRPr sz="1200">
@@ -3839,7 +3745,7 @@
               </a:defRPr>
             </a:lvl1pPr>
           </a:lstStyle>
-          <a:p xmlns:a="http://schemas.openxmlformats.org/drawingml/2006/main">
+          <a:p>
             <a:fld id="{B6F15528-21DE-4FAA-801E-634DDDAF4B2B}" type="slidenum">
               <a:t>‹#›</a:t>
             </a:fld>
@@ -3851,21 +3757,21 @@
   </p:cSld>
   <p:clrMap bg1="lt1" tx1="dk1" bg2="lt2" tx2="dk2" accent1="accent1" accent2="accent2" accent3="accent3" accent4="accent4" accent5="accent5" accent6="accent6" hlink="hlink" folHlink="folHlink"/>
   <p:sldLayoutIdLst>
-    <p:sldLayoutId xmlns:r="http://schemas.openxmlformats.org/officeDocument/2006/relationships" id="2147483649" r:id="R727f49b0377e440e"/>
-    <p:sldLayoutId xmlns:r="http://schemas.openxmlformats.org/officeDocument/2006/relationships" id="2147483650" r:id="R6c5cfd141c8e4f04"/>
-    <p:sldLayoutId xmlns:r="http://schemas.openxmlformats.org/officeDocument/2006/relationships" id="2147483651" r:id="R59738f9f235b4d72"/>
-    <p:sldLayoutId xmlns:r="http://schemas.openxmlformats.org/officeDocument/2006/relationships" id="2147483652" r:id="Reb0da42cb31e48ec"/>
-    <p:sldLayoutId xmlns:r="http://schemas.openxmlformats.org/officeDocument/2006/relationships" id="2147483653" r:id="R9e51a8df3c7348b3"/>
-    <p:sldLayoutId xmlns:r="http://schemas.openxmlformats.org/officeDocument/2006/relationships" id="2147483654" r:id="R8b03163b5f544cf2"/>
-    <p:sldLayoutId xmlns:r="http://schemas.openxmlformats.org/officeDocument/2006/relationships" id="2147483655" r:id="Ra3f7881f9d7047eb"/>
-    <p:sldLayoutId xmlns:r="http://schemas.openxmlformats.org/officeDocument/2006/relationships" id="2147483656" r:id="R003b6a10ebc049b8"/>
-    <p:sldLayoutId xmlns:r="http://schemas.openxmlformats.org/officeDocument/2006/relationships" id="2147483657" r:id="Ra502084a9fc64d3d"/>
-    <p:sldLayoutId xmlns:r="http://schemas.openxmlformats.org/officeDocument/2006/relationships" id="2147483658" r:id="R2bc90c7f951d463c"/>
-    <p:sldLayoutId xmlns:r="http://schemas.openxmlformats.org/officeDocument/2006/relationships" id="2147483659" r:id="R574535f07846412c"/>
+    <p:sldLayoutId id="2147483649" r:id="rId1"/>
+    <p:sldLayoutId id="2147483650" r:id="rId2"/>
+    <p:sldLayoutId id="2147483651" r:id="rId3"/>
+    <p:sldLayoutId id="2147483652" r:id="rId4"/>
+    <p:sldLayoutId id="2147483653" r:id="rId5"/>
+    <p:sldLayoutId id="2147483654" r:id="rId6"/>
+    <p:sldLayoutId id="2147483655" r:id="rId7"/>
+    <p:sldLayoutId id="2147483656" r:id="rId8"/>
+    <p:sldLayoutId id="2147483657" r:id="rId9"/>
+    <p:sldLayoutId id="2147483658" r:id="rId10"/>
+    <p:sldLayoutId id="2147483659" r:id="rId11"/>
   </p:sldLayoutIdLst>
   <p:txStyles>
     <p:titleStyle>
-      <a:lvl1pPr xmlns:a="http://schemas.openxmlformats.org/drawingml/2006/main" algn="ctr" defTabSz="914400">
+      <a:lvl1pPr algn="ctr" defTabSz="914400">
         <a:spcBef>
           <a:spcPct val="0"/>
         </a:spcBef>
@@ -3881,7 +3787,7 @@
       </a:lvl1pPr>
     </p:titleStyle>
     <p:bodyStyle>
-      <a:lvl1pPr xmlns:a="http://schemas.openxmlformats.org/drawingml/2006/main" marL="342900" indent="-342900" algn="l" defTabSz="914400">
+      <a:lvl1pPr marL="342900" indent="-342900" algn="l" defTabSz="914400">
         <a:spcBef>
           <a:spcPct val="20000"/>
         </a:spcBef>
@@ -3896,7 +3802,7 @@
           <a:cs typeface="+mn-lt"/>
         </a:defRPr>
       </a:lvl1pPr>
-      <a:lvl2pPr xmlns:a="http://schemas.openxmlformats.org/drawingml/2006/main" marL="742950" indent="-285750" algn="l" defTabSz="914400">
+      <a:lvl2pPr marL="742950" indent="-285750" algn="l" defTabSz="914400">
         <a:spcBef>
           <a:spcPct val="20000"/>
         </a:spcBef>
@@ -3911,7 +3817,7 @@
           <a:cs typeface="+mn-lt"/>
         </a:defRPr>
       </a:lvl2pPr>
-      <a:lvl3pPr xmlns:a="http://schemas.openxmlformats.org/drawingml/2006/main" marL="1143000" indent="-228600" algn="l" defTabSz="914400">
+      <a:lvl3pPr marL="1143000" indent="-228600" algn="l" defTabSz="914400">
         <a:spcBef>
           <a:spcPct val="20000"/>
         </a:spcBef>
@@ -3926,7 +3832,7 @@
           <a:cs typeface="+mn-lt"/>
         </a:defRPr>
       </a:lvl3pPr>
-      <a:lvl4pPr xmlns:a="http://schemas.openxmlformats.org/drawingml/2006/main" marL="1600200" indent="-228600" algn="l" defTabSz="914400">
+      <a:lvl4pPr marL="1600200" indent="-228600" algn="l" defTabSz="914400">
         <a:spcBef>
           <a:spcPct val="20000"/>
         </a:spcBef>
@@ -3941,7 +3847,7 @@
           <a:cs typeface="+mn-lt"/>
         </a:defRPr>
       </a:lvl4pPr>
-      <a:lvl5pPr xmlns:a="http://schemas.openxmlformats.org/drawingml/2006/main" marL="2057400" indent="-228600" algn="l" defTabSz="914400">
+      <a:lvl5pPr marL="2057400" indent="-228600" algn="l" defTabSz="914400">
         <a:spcBef>
           <a:spcPct val="20000"/>
         </a:spcBef>
@@ -3956,7 +3862,7 @@
           <a:cs typeface="+mn-lt"/>
         </a:defRPr>
       </a:lvl5pPr>
-      <a:lvl6pPr xmlns:a="http://schemas.openxmlformats.org/drawingml/2006/main" marL="2514600" indent="-228600" algn="l" defTabSz="914400">
+      <a:lvl6pPr marL="2514600" indent="-228600" algn="l" defTabSz="914400">
         <a:spcBef>
           <a:spcPct val="20000"/>
         </a:spcBef>
@@ -3971,7 +3877,7 @@
           <a:cs typeface="+mn-lt"/>
         </a:defRPr>
       </a:lvl6pPr>
-      <a:lvl7pPr xmlns:a="http://schemas.openxmlformats.org/drawingml/2006/main" marL="2971800" indent="-228600" algn="l" defTabSz="914400">
+      <a:lvl7pPr marL="2971800" indent="-228600" algn="l" defTabSz="914400">
         <a:spcBef>
           <a:spcPct val="20000"/>
         </a:spcBef>
@@ -3986,7 +3892,7 @@
           <a:cs typeface="+mn-lt"/>
         </a:defRPr>
       </a:lvl7pPr>
-      <a:lvl8pPr xmlns:a="http://schemas.openxmlformats.org/drawingml/2006/main" marL="3429000" indent="-228600" algn="l" defTabSz="914400">
+      <a:lvl8pPr marL="3429000" indent="-228600" algn="l" defTabSz="914400">
         <a:spcBef>
           <a:spcPct val="20000"/>
         </a:spcBef>
@@ -4001,7 +3907,7 @@
           <a:cs typeface="+mn-lt"/>
         </a:defRPr>
       </a:lvl8pPr>
-      <a:lvl9pPr xmlns:a="http://schemas.openxmlformats.org/drawingml/2006/main" marL="3886200" indent="-228600" algn="l" defTabSz="914400">
+      <a:lvl9pPr marL="3886200" indent="-228600" algn="l" defTabSz="914400">
         <a:spcBef>
           <a:spcPct val="20000"/>
         </a:spcBef>
@@ -4018,7 +3924,7 @@
       </a:lvl9pPr>
     </p:bodyStyle>
     <p:otherStyle>
-      <a:lvl1pPr xmlns:a="http://schemas.openxmlformats.org/drawingml/2006/main" marL="0" algn="l" defTabSz="914400">
+      <a:lvl1pPr marL="0" algn="l" defTabSz="914400">
         <a:buNone/>
         <a:defRPr sz="1800" kern="1200">
           <a:solidFill>
@@ -4029,7 +3935,7 @@
           <a:cs typeface="+mn-lt"/>
         </a:defRPr>
       </a:lvl1pPr>
-      <a:lvl2pPr xmlns:a="http://schemas.openxmlformats.org/drawingml/2006/main" marL="457200" algn="l" defTabSz="914400">
+      <a:lvl2pPr marL="457200" algn="l" defTabSz="914400">
         <a:buNone/>
         <a:defRPr sz="1800" kern="1200">
           <a:solidFill>
@@ -4040,7 +3946,7 @@
           <a:cs typeface="+mn-lt"/>
         </a:defRPr>
       </a:lvl2pPr>
-      <a:lvl3pPr xmlns:a="http://schemas.openxmlformats.org/drawingml/2006/main" marL="914400" algn="l" defTabSz="914400">
+      <a:lvl3pPr marL="914400" algn="l" defTabSz="914400">
         <a:buNone/>
         <a:defRPr sz="1800" kern="1200">
           <a:solidFill>
@@ -4051,7 +3957,7 @@
           <a:cs typeface="+mn-lt"/>
         </a:defRPr>
       </a:lvl3pPr>
-      <a:lvl4pPr xmlns:a="http://schemas.openxmlformats.org/drawingml/2006/main" marL="1371600" algn="l" defTabSz="914400">
+      <a:lvl4pPr marL="1371600" algn="l" defTabSz="914400">
         <a:buNone/>
         <a:defRPr sz="1800" kern="1200">
           <a:solidFill>
@@ -4062,7 +3968,7 @@
           <a:cs typeface="+mn-lt"/>
         </a:defRPr>
       </a:lvl4pPr>
-      <a:lvl5pPr xmlns:a="http://schemas.openxmlformats.org/drawingml/2006/main" marL="1828800" algn="l" defTabSz="914400">
+      <a:lvl5pPr marL="1828800" algn="l" defTabSz="914400">
         <a:buNone/>
         <a:defRPr sz="1800" kern="1200">
           <a:solidFill>
@@ -4073,7 +3979,7 @@
           <a:cs typeface="+mn-lt"/>
         </a:defRPr>
       </a:lvl5pPr>
-      <a:lvl6pPr xmlns:a="http://schemas.openxmlformats.org/drawingml/2006/main" marL="2286000" algn="l" defTabSz="914400">
+      <a:lvl6pPr marL="2286000" algn="l" defTabSz="914400">
         <a:buNone/>
         <a:defRPr sz="1800" kern="1200">
           <a:solidFill>
@@ -4084,7 +3990,7 @@
           <a:cs typeface="+mn-lt"/>
         </a:defRPr>
       </a:lvl6pPr>
-      <a:lvl7pPr xmlns:a="http://schemas.openxmlformats.org/drawingml/2006/main" marL="2743200" algn="l" defTabSz="914400">
+      <a:lvl7pPr marL="2743200" algn="l" defTabSz="914400">
         <a:buNone/>
         <a:defRPr sz="1800" kern="1200">
           <a:solidFill>
@@ -4095,7 +4001,7 @@
           <a:cs typeface="+mn-lt"/>
         </a:defRPr>
       </a:lvl7pPr>
-      <a:lvl8pPr xmlns:a="http://schemas.openxmlformats.org/drawingml/2006/main" marL="3200400" algn="l" defTabSz="914400">
+      <a:lvl8pPr marL="3200400" algn="l" defTabSz="914400">
         <a:buNone/>
         <a:defRPr sz="1800" kern="1200">
           <a:solidFill>
@@ -4106,7 +4012,7 @@
           <a:cs typeface="+mn-lt"/>
         </a:defRPr>
       </a:lvl8pPr>
-      <a:lvl9pPr xmlns:a="http://schemas.openxmlformats.org/drawingml/2006/main" marL="3657600" algn="l" defTabSz="914400">
+      <a:lvl9pPr marL="3657600" algn="l" defTabSz="914400">
         <a:buNone/>
         <a:defRPr sz="1800" kern="1200">
           <a:solidFill>
@@ -4122,284 +4028,15 @@
 </p:sldMaster>
 </file>
 
-<file path=ppt/slideMasters/theme/theme2.xml><?xml version="1.0" encoding="utf-8"?>
-<a:theme xmlns:a="http://schemas.openxmlformats.org/drawingml/2006/main" name="Office Theme">
-  <a:themeElements>
-    <a:clrScheme name="Office">
-      <a:dk1>
-        <a:sysClr val="windowText" lastClr="000000"/>
-      </a:dk1>
-      <a:lt1>
-        <a:sysClr val="window" lastClr="FFFFFF"/>
-      </a:lt1>
-      <a:dk2>
-        <a:srgbClr val="1F497D"/>
-      </a:dk2>
-      <a:lt2>
-        <a:srgbClr val="EEECE1"/>
-      </a:lt2>
-      <a:accent1>
-        <a:srgbClr val="4F81BD"/>
-      </a:accent1>
-      <a:accent2>
-        <a:srgbClr val="C0504D"/>
-      </a:accent2>
-      <a:accent3>
-        <a:srgbClr val="9BBB59"/>
-      </a:accent3>
-      <a:accent4>
-        <a:srgbClr val="8064A2"/>
-      </a:accent4>
-      <a:accent5>
-        <a:srgbClr val="4BACC6"/>
-      </a:accent5>
-      <a:accent6>
-        <a:srgbClr val="F79646"/>
-      </a:accent6>
-      <a:hlink>
-        <a:srgbClr val="0000FF"/>
-      </a:hlink>
-      <a:folHlink>
-        <a:srgbClr val="800080"/>
-      </a:folHlink>
-    </a:clrScheme>
-    <a:fontScheme name="Office">
-      <a:majorFont>
-        <a:latin typeface="Calibri"/>
-        <a:ea typeface=""/>
-        <a:cs typeface=""/>
-        <a:font script="Jpan" typeface="ＭＳ Ｐゴシック"/>
-        <a:font script="Hang" typeface="맑은 고딕"/>
-        <a:font script="Hans" typeface="宋体"/>
-        <a:font script="Hant" typeface="新細明體"/>
-        <a:font script="Arab" typeface="Times New Roman"/>
-        <a:font script="Hebr" typeface="Times New Roman"/>
-        <a:font script="Thai" typeface="Angsana New"/>
-        <a:font script="Ethi" typeface="Nyala"/>
-        <a:font script="Beng" typeface="Vrinda"/>
-        <a:font script="Gujr" typeface="Shruti"/>
-        <a:font script="Khmr" typeface="MoolBoran"/>
-        <a:font script="Knda" typeface="Tunga"/>
-        <a:font script="Guru" typeface="Raavi"/>
-        <a:font script="Cans" typeface="Euphemia"/>
-        <a:font script="Cher" typeface="Plantagenet Cherokee"/>
-        <a:font script="Yiii" typeface="Microsoft Yi Baiti"/>
-        <a:font script="Tibt" typeface="Microsoft Himalaya"/>
-        <a:font script="Thaa" typeface="MV Boli"/>
-        <a:font script="Deva" typeface="Mangal"/>
-        <a:font script="Telu" typeface="Gautami"/>
-        <a:font script="Taml" typeface="Latha"/>
-        <a:font script="Syrc" typeface="Estrangelo Edessa"/>
-        <a:font script="Orya" typeface="Kalinga"/>
-        <a:font script="Mlym" typeface="Kartika"/>
-        <a:font script="Laoo" typeface="DokChampa"/>
-        <a:font script="Sinh" typeface="Iskoola Pota"/>
-        <a:font script="Mong" typeface="Mongolian Baiti"/>
-        <a:font script="Viet" typeface="Times New Roman"/>
-        <a:font script="Uigh" typeface="Microsoft Uighur"/>
-      </a:majorFont>
-      <a:minorFont>
-        <a:latin typeface="Calibri"/>
-        <a:ea typeface=""/>
-        <a:cs typeface=""/>
-        <a:font script="Jpan" typeface="ＭＳ Ｐゴシック"/>
-        <a:font script="Hang" typeface="맑은 고딕"/>
-        <a:font script="Hans" typeface="宋体"/>
-        <a:font script="Hant" typeface="新細明體"/>
-        <a:font script="Arab" typeface="Arial"/>
-        <a:font script="Hebr" typeface="Arial"/>
-        <a:font script="Thai" typeface="Cordia New"/>
-        <a:font script="Ethi" typeface="Nyala"/>
-        <a:font script="Beng" typeface="Vrinda"/>
-        <a:font script="Gujr" typeface="Shruti"/>
-        <a:font script="Khmr" typeface="DaunPenh"/>
-        <a:font script="Knda" typeface="Tunga"/>
-        <a:font script="Guru" typeface="Raavi"/>
-        <a:font script="Cans" typeface="Euphemia"/>
-        <a:font script="Cher" typeface="Plantagenet Cherokee"/>
-        <a:font script="Yiii" typeface="Microsoft Yi Baiti"/>
-        <a:font script="Tibt" typeface="Microsoft Himalaya"/>
-        <a:font script="Thaa" typeface="MV Boli"/>
-        <a:font script="Deva" typeface="Mangal"/>
-        <a:font script="Telu" typeface="Gautami"/>
-        <a:font script="Taml" typeface="Latha"/>
-        <a:font script="Syrc" typeface="Estrangelo Edessa"/>
-        <a:font script="Orya" typeface="Kalinga"/>
-        <a:font script="Mlym" typeface="Kartika"/>
-        <a:font script="Laoo" typeface="DokChampa"/>
-        <a:font script="Sinh" typeface="Iskoola Pota"/>
-        <a:font script="Mong" typeface="Mongolian Baiti"/>
-        <a:font script="Viet" typeface="Arial"/>
-        <a:font script="Uigh" typeface="Microsoft Uighur"/>
-      </a:minorFont>
-    </a:fontScheme>
-    <a:fmtScheme name="Office">
-      <a:fillStyleLst>
-        <a:solidFill>
-          <a:schemeClr val="phClr"/>
-        </a:solidFill>
-        <a:gradFill rotWithShape="1">
-          <a:gsLst>
-            <a:gs pos="0">
-              <a:schemeClr val="phClr">
-                <a:tint val="50000"/>
-                <a:satMod val="300000"/>
-              </a:schemeClr>
-            </a:gs>
-            <a:gs pos="35000">
-              <a:schemeClr val="phClr">
-                <a:tint val="37000"/>
-                <a:satMod val="300000"/>
-              </a:schemeClr>
-            </a:gs>
-            <a:gs pos="100000">
-              <a:schemeClr val="phClr">
-                <a:tint val="15000"/>
-                <a:satMod val="350000"/>
-              </a:schemeClr>
-            </a:gs>
-          </a:gsLst>
-          <a:lin ang="16200000" scaled="1"/>
-        </a:gradFill>
-        <a:gradFill rotWithShape="1">
-          <a:gsLst>
-            <a:gs pos="0">
-              <a:schemeClr val="phClr">
-                <a:shade val="51000"/>
-                <a:satMod val="130000"/>
-              </a:schemeClr>
-            </a:gs>
-            <a:gs pos="80000">
-              <a:schemeClr val="phClr">
-                <a:shade val="93000"/>
-                <a:satMod val="130000"/>
-              </a:schemeClr>
-            </a:gs>
-            <a:gs pos="100000">
-              <a:schemeClr val="phClr">
-                <a:shade val="94000"/>
-                <a:satMod val="135000"/>
-              </a:schemeClr>
-            </a:gs>
-          </a:gsLst>
-          <a:lin ang="16200000" scaled="0"/>
-        </a:gradFill>
-      </a:fillStyleLst>
-      <a:lnStyleLst>
-        <a:ln w="9525">
-          <a:solidFill>
-            <a:schemeClr val="phClr">
-              <a:shade val="95000"/>
-              <a:satMod val="105000"/>
-            </a:schemeClr>
-          </a:solidFill>
-          <a:prstDash val="solid"/>
-        </a:ln>
-        <a:ln w="25400">
-          <a:solidFill>
-            <a:schemeClr val="phClr"/>
-          </a:solidFill>
-          <a:prstDash val="solid"/>
-        </a:ln>
-        <a:ln w="38100">
-          <a:solidFill>
-            <a:schemeClr val="phClr"/>
-          </a:solidFill>
-          <a:prstDash val="solid"/>
-        </a:ln>
-      </a:lnStyleLst>
-      <a:effectStyleLst>
-        <a:effectStyle>
-          <a:effectLst>
-            <a:outerShdw blurRad="40000" dist="20000" dir="5400000" rotWithShape="0">
-              <a:srgbClr val="000000">
-                <a:alpha val="38000"/>
-              </a:srgbClr>
-            </a:outerShdw>
-          </a:effectLst>
-        </a:effectStyle>
-        <a:effectStyle>
-          <a:effectLst>
-            <a:outerShdw blurRad="40000" dist="23000" dir="5400000" rotWithShape="0">
-              <a:srgbClr val="000000">
-                <a:alpha val="35000"/>
-              </a:srgbClr>
-            </a:outerShdw>
-          </a:effectLst>
-        </a:effectStyle>
-        <a:effectStyle>
-          <a:effectLst>
-            <a:outerShdw blurRad="40000" dist="23000" dir="5400000" rotWithShape="0">
-              <a:srgbClr val="000000">
-                <a:alpha val="35000"/>
-              </a:srgbClr>
-            </a:outerShdw>
-          </a:effectLst>
-        </a:effectStyle>
-      </a:effectStyleLst>
-      <a:bgFillStyleLst>
-        <a:solidFill>
-          <a:schemeClr val="phClr"/>
-        </a:solidFill>
-        <a:gradFill rotWithShape="1">
-          <a:gsLst>
-            <a:gs pos="0">
-              <a:schemeClr val="phClr">
-                <a:tint val="40000"/>
-                <a:satMod val="350000"/>
-              </a:schemeClr>
-            </a:gs>
-            <a:gs pos="40000">
-              <a:schemeClr val="phClr">
-                <a:tint val="45000"/>
-                <a:shade val="99000"/>
-                <a:satMod val="350000"/>
-              </a:schemeClr>
-            </a:gs>
-            <a:gs pos="100000">
-              <a:schemeClr val="phClr">
-                <a:shade val="20000"/>
-                <a:satMod val="255000"/>
-              </a:schemeClr>
-            </a:gs>
-          </a:gsLst>
-          <a:path path="circle">
-            <a:fillToRect l="50000" t="-80000" r="50000" b="180000"/>
-          </a:path>
-        </a:gradFill>
-        <a:gradFill rotWithShape="1">
-          <a:gsLst>
-            <a:gs pos="0">
-              <a:schemeClr val="phClr">
-                <a:tint val="80000"/>
-                <a:satMod val="300000"/>
-              </a:schemeClr>
-            </a:gs>
-            <a:gs pos="100000">
-              <a:schemeClr val="phClr">
-                <a:shade val="30000"/>
-                <a:satMod val="200000"/>
-              </a:schemeClr>
-            </a:gs>
-          </a:gsLst>
-          <a:path path="circle">
-            <a:fillToRect l="50000" t="50000" r="50000" b="50000"/>
-          </a:path>
-        </a:gradFill>
-      </a:bgFillStyleLst>
-    </a:fmtScheme>
-  </a:themeElements>
-</a:theme>
-</file>
-
 <file path=ppt/slides/slide1.xml><?xml version="1.0" encoding="utf-8"?>
-<p:sld xmlns:p="http://schemas.openxmlformats.org/presentationml/2006/main">
+<p:sld xmlns:a="http://schemas.openxmlformats.org/drawingml/2006/main" xmlns:r="http://schemas.openxmlformats.org/officeDocument/2006/relationships" xmlns:p="http://schemas.openxmlformats.org/presentationml/2006/main">
   <p:cSld>
     <p:bg>
       <p:bgPr>
-        <a:solidFill xmlns:a="http://schemas.openxmlformats.org/drawingml/2006/main">
+        <a:solidFill>
           <a:srgbClr val="DACEB9"/>
         </a:solidFill>
+        <a:effectLst/>
       </p:bgPr>
     </p:bg>
     <p:spTree>
@@ -4409,37 +4046,42 @@
         <p:nvPr/>
       </p:nvGrpSpPr>
       <p:grpSpPr>
-        <a:xfrm xmlns:a="http://schemas.openxmlformats.org/drawingml/2006/main"/>
+        <a:xfrm>
+          <a:off x="0" y="0"/>
+          <a:ext cx="0" cy="0"/>
+          <a:chOff x="0" y="0"/>
+          <a:chExt cx="0" cy="0"/>
+        </a:xfrm>
       </p:grpSpPr>
       <p:pic>
         <p:nvPicPr>
           <p:cNvPr id="48" name="Picture 2"/>
           <p:cNvPicPr>
-            <a:picLocks xmlns:a="http://schemas.openxmlformats.org/drawingml/2006/main" noChangeAspect="1"/>
+            <a:picLocks noChangeAspect="1"/>
           </p:cNvPicPr>
           <p:nvPr/>
         </p:nvPicPr>
         <p:blipFill>
-          <a:blip xmlns:r="http://schemas.openxmlformats.org/officeDocument/2006/relationships" xmlns:a="http://schemas.openxmlformats.org/drawingml/2006/main" r:embed="R4cc3c55b8e02486b">
+          <a:blip r:embed="rId3">
             <a:extLst>
               <a:ext uri="{96DAC541-7B7A-43D3-8B79-37D633B846F1}">
-                <asvg:svgBlip xmlns:asvg="http://schemas.microsoft.com/office/drawing/2016/SVG/main" r:embed="Rc178d677bd6c48b8"/>
+                <asvg:svgBlip xmlns:asvg="http://schemas.microsoft.com/office/drawing/2016/SVG/main" r:embed="rId4"/>
               </a:ext>
             </a:extLst>
           </a:blip>
-          <a:stretch xmlns:a="http://schemas.openxmlformats.org/drawingml/2006/main">
-            <a:fillRect l="0" t="0" r="0" b="0"/>
+          <a:stretch>
+            <a:fillRect/>
           </a:stretch>
         </p:blipFill>
         <p:spPr>
-          <a:xfrm xmlns:a="http://schemas.openxmlformats.org/drawingml/2006/main">
+          <a:xfrm>
             <a:off x="469900" y="469900"/>
             <a:ext cx="17360900" cy="9359900"/>
           </a:xfrm>
-          <a:prstGeom xmlns:a="http://schemas.openxmlformats.org/drawingml/2006/main" prst="rect">
+          <a:prstGeom prst="rect">
             <a:avLst/>
           </a:prstGeom>
-          <a:effectLst xmlns:a="http://schemas.openxmlformats.org/drawingml/2006/main">
+          <a:effectLst>
             <a:outerShdw blurRad="561213" dist="359752" dir="2700000">
               <a:srgbClr val="3E372E">
                 <a:alpha val="43000"/>
@@ -4451,36 +4093,36 @@
       <p:sp>
         <p:nvSpPr>
           <p:cNvPr id="43" name="직사각형 42">
-            <a:extLst xmlns:a="http://schemas.openxmlformats.org/drawingml/2006/main">
+            <a:extLst>
               <a:ext uri="{FF2B5EF4-FFF2-40B4-BE49-F238E27FC236}">
                 <a16:creationId xmlns:a16="http://schemas.microsoft.com/office/drawing/2014/main" id="{B0FCD3FA-D35D-43A7-8295-9880C04A5168}"/>
               </a:ext>
             </a:extLst>
           </p:cNvPr>
           <p:cNvSpPr>
-            <a:spLocks xmlns:a="http://schemas.openxmlformats.org/drawingml/2006/main" noGrp="1"/>
+            <a:spLocks noGrp="1"/>
           </p:cNvSpPr>
           <p:nvPr/>
         </p:nvSpPr>
         <p:spPr>
-          <a:xfrm xmlns:a="http://schemas.openxmlformats.org/drawingml/2006/main">
+          <a:xfrm>
             <a:off x="1428750" y="1619250"/>
             <a:ext cx="15049500" cy="714375"/>
           </a:xfrm>
-          <a:prstGeom xmlns:a="http://schemas.openxmlformats.org/drawingml/2006/main" prst="rect">
+          <a:prstGeom prst="rect">
             <a:avLst/>
           </a:prstGeom>
-          <a:noFill xmlns:a="http://schemas.openxmlformats.org/drawingml/2006/main"/>
-          <a:ln xmlns:a="http://schemas.openxmlformats.org/drawingml/2006/main" w="0">
+          <a:noFill/>
+          <a:ln w="0">
             <a:noFill/>
           </a:ln>
         </p:spPr>
         <p:txBody>
-          <a:bodyPr xmlns:a="http://schemas.openxmlformats.org/drawingml/2006/main">
+          <a:bodyPr>
             <a:noAutofit/>
           </a:bodyPr>
-          <a:lstStyle xmlns:a="http://schemas.openxmlformats.org/drawingml/2006/main"/>
-          <a:p xmlns:a="http://schemas.openxmlformats.org/drawingml/2006/main">
+          <a:lstStyle/>
+          <a:p>
             <a:pPr>
               <a:buNone/>
               <a:defRPr sz="2550" b="1">
@@ -4509,36 +4151,36 @@
       <p:sp>
         <p:nvSpPr>
           <p:cNvPr id="44" name="직사각형 43">
-            <a:extLst xmlns:a="http://schemas.openxmlformats.org/drawingml/2006/main">
+            <a:extLst>
               <a:ext uri="{FF2B5EF4-FFF2-40B4-BE49-F238E27FC236}">
                 <a16:creationId xmlns:a16="http://schemas.microsoft.com/office/drawing/2014/main" id="{CCE85BBC-5BFD-4991-99F6-217E2768F082}"/>
               </a:ext>
             </a:extLst>
           </p:cNvPr>
           <p:cNvSpPr>
-            <a:spLocks xmlns:a="http://schemas.openxmlformats.org/drawingml/2006/main" noGrp="1"/>
+            <a:spLocks noGrp="1"/>
           </p:cNvSpPr>
           <p:nvPr/>
         </p:nvSpPr>
         <p:spPr>
-          <a:xfrm xmlns:a="http://schemas.openxmlformats.org/drawingml/2006/main">
+          <a:xfrm>
             <a:off x="1333500" y="3286125"/>
             <a:ext cx="15240000" cy="1809750"/>
           </a:xfrm>
-          <a:prstGeom xmlns:a="http://schemas.openxmlformats.org/drawingml/2006/main" prst="rect">
+          <a:prstGeom prst="rect">
             <a:avLst/>
           </a:prstGeom>
-          <a:noFill xmlns:a="http://schemas.openxmlformats.org/drawingml/2006/main"/>
-          <a:ln xmlns:a="http://schemas.openxmlformats.org/drawingml/2006/main" w="0">
+          <a:noFill/>
+          <a:ln w="0">
             <a:noFill/>
           </a:ln>
         </p:spPr>
         <p:txBody>
-          <a:bodyPr xmlns:a="http://schemas.openxmlformats.org/drawingml/2006/main">
+          <a:bodyPr>
             <a:noAutofit/>
           </a:bodyPr>
-          <a:lstStyle xmlns:a="http://schemas.openxmlformats.org/drawingml/2006/main"/>
-          <a:p xmlns:a="http://schemas.openxmlformats.org/drawingml/2006/main">
+          <a:lstStyle/>
+          <a:p>
             <a:pPr>
               <a:buNone/>
               <a:defRPr sz="11100" b="1">
@@ -4567,36 +4209,36 @@
       <p:sp>
         <p:nvSpPr>
           <p:cNvPr id="45" name="직사각형 44">
-            <a:extLst xmlns:a="http://schemas.openxmlformats.org/drawingml/2006/main">
+            <a:extLst>
               <a:ext uri="{FF2B5EF4-FFF2-40B4-BE49-F238E27FC236}">
                 <a16:creationId xmlns:a16="http://schemas.microsoft.com/office/drawing/2014/main" id="{F3090683-5045-4D8F-9E02-D82B0D1DEFA2}"/>
               </a:ext>
             </a:extLst>
           </p:cNvPr>
           <p:cNvSpPr>
-            <a:spLocks xmlns:a="http://schemas.openxmlformats.org/drawingml/2006/main" noGrp="1"/>
+            <a:spLocks noGrp="1"/>
           </p:cNvSpPr>
           <p:nvPr/>
         </p:nvSpPr>
         <p:spPr>
-          <a:xfrm xmlns:a="http://schemas.openxmlformats.org/drawingml/2006/main">
+          <a:xfrm>
             <a:off x="1428750" y="5524500"/>
             <a:ext cx="15240000" cy="904875"/>
           </a:xfrm>
-          <a:prstGeom xmlns:a="http://schemas.openxmlformats.org/drawingml/2006/main" prst="rect">
+          <a:prstGeom prst="rect">
             <a:avLst/>
           </a:prstGeom>
-          <a:noFill xmlns:a="http://schemas.openxmlformats.org/drawingml/2006/main"/>
-          <a:ln xmlns:a="http://schemas.openxmlformats.org/drawingml/2006/main" w="0">
+          <a:noFill/>
+          <a:ln w="0">
             <a:noFill/>
           </a:ln>
         </p:spPr>
         <p:txBody>
-          <a:bodyPr xmlns:a="http://schemas.openxmlformats.org/drawingml/2006/main">
+          <a:bodyPr>
             <a:noAutofit/>
           </a:bodyPr>
-          <a:lstStyle xmlns:a="http://schemas.openxmlformats.org/drawingml/2006/main"/>
-          <a:p xmlns:a="http://schemas.openxmlformats.org/drawingml/2006/main">
+          <a:lstStyle/>
+          <a:p>
             <a:pPr>
               <a:buNone/>
               <a:defRPr sz="3750" b="1">
@@ -4625,36 +4267,36 @@
       <p:sp>
         <p:nvSpPr>
           <p:cNvPr id="46" name="직사각형 45">
-            <a:extLst xmlns:a="http://schemas.openxmlformats.org/drawingml/2006/main">
+            <a:extLst>
               <a:ext uri="{FF2B5EF4-FFF2-40B4-BE49-F238E27FC236}">
                 <a16:creationId xmlns:a16="http://schemas.microsoft.com/office/drawing/2014/main" id="{676E2625-2471-4664-B20C-FB4DE02265BB}"/>
               </a:ext>
             </a:extLst>
           </p:cNvPr>
           <p:cNvSpPr>
-            <a:spLocks xmlns:a="http://schemas.openxmlformats.org/drawingml/2006/main" noGrp="1"/>
+            <a:spLocks noGrp="1"/>
           </p:cNvSpPr>
           <p:nvPr/>
         </p:nvSpPr>
         <p:spPr>
-          <a:xfrm xmlns:a="http://schemas.openxmlformats.org/drawingml/2006/main">
+          <a:xfrm>
             <a:off x="1428750" y="7858125"/>
             <a:ext cx="13811250" cy="714375"/>
           </a:xfrm>
-          <a:prstGeom xmlns:a="http://schemas.openxmlformats.org/drawingml/2006/main" prst="rect">
+          <a:prstGeom prst="rect">
             <a:avLst/>
           </a:prstGeom>
-          <a:noFill xmlns:a="http://schemas.openxmlformats.org/drawingml/2006/main"/>
-          <a:ln xmlns:a="http://schemas.openxmlformats.org/drawingml/2006/main" w="0">
+          <a:noFill/>
+          <a:ln w="0">
             <a:noFill/>
           </a:ln>
         </p:spPr>
         <p:txBody>
-          <a:bodyPr xmlns:a="http://schemas.openxmlformats.org/drawingml/2006/main">
+          <a:bodyPr>
             <a:noAutofit/>
           </a:bodyPr>
-          <a:lstStyle xmlns:a="http://schemas.openxmlformats.org/drawingml/2006/main"/>
-          <a:p xmlns:a="http://schemas.openxmlformats.org/drawingml/2006/main">
+          <a:lstStyle/>
+          <a:p>
             <a:pPr>
               <a:buNone/>
               <a:defRPr sz="2775" b="0">
@@ -4687,17 +4329,21 @@
       </p:ext>
     </p:extLst>
   </p:cSld>
+  <p:clrMapOvr>
+    <a:masterClrMapping/>
+  </p:clrMapOvr>
 </p:sld>
 </file>
 
 <file path=ppt/slides/slide2.xml><?xml version="1.0" encoding="utf-8"?>
-<p:sld xmlns:p="http://schemas.openxmlformats.org/presentationml/2006/main">
+<p:sld xmlns:a="http://schemas.openxmlformats.org/drawingml/2006/main" xmlns:r="http://schemas.openxmlformats.org/officeDocument/2006/relationships" xmlns:p="http://schemas.openxmlformats.org/presentationml/2006/main">
   <p:cSld>
     <p:bg>
       <p:bgPr>
-        <a:solidFill xmlns:a="http://schemas.openxmlformats.org/drawingml/2006/main">
+        <a:solidFill>
           <a:srgbClr val="DACEB9"/>
         </a:solidFill>
+        <a:effectLst/>
       </p:bgPr>
     </p:bg>
     <p:spTree>
@@ -4707,37 +4353,42 @@
         <p:nvPr/>
       </p:nvGrpSpPr>
       <p:grpSpPr>
-        <a:xfrm xmlns:a="http://schemas.openxmlformats.org/drawingml/2006/main"/>
+        <a:xfrm>
+          <a:off x="0" y="0"/>
+          <a:ext cx="0" cy="0"/>
+          <a:chOff x="0" y="0"/>
+          <a:chExt cx="0" cy="0"/>
+        </a:xfrm>
       </p:grpSpPr>
       <p:pic>
         <p:nvPicPr>
           <p:cNvPr id="60" name="Picture 2"/>
           <p:cNvPicPr>
-            <a:picLocks xmlns:a="http://schemas.openxmlformats.org/drawingml/2006/main" noChangeAspect="1"/>
+            <a:picLocks noChangeAspect="1"/>
           </p:cNvPicPr>
           <p:nvPr/>
         </p:nvPicPr>
         <p:blipFill>
-          <a:blip xmlns:r="http://schemas.openxmlformats.org/officeDocument/2006/relationships" xmlns:a="http://schemas.openxmlformats.org/drawingml/2006/main" r:embed="R6135b78432b64543">
+          <a:blip r:embed="rId3">
             <a:extLst>
               <a:ext uri="{96DAC541-7B7A-43D3-8B79-37D633B846F1}">
-                <asvg:svgBlip xmlns:asvg="http://schemas.microsoft.com/office/drawing/2016/SVG/main" r:embed="R74e164d816914d25"/>
+                <asvg:svgBlip xmlns:asvg="http://schemas.microsoft.com/office/drawing/2016/SVG/main" r:embed="rId4"/>
               </a:ext>
             </a:extLst>
           </a:blip>
-          <a:stretch xmlns:a="http://schemas.openxmlformats.org/drawingml/2006/main">
-            <a:fillRect l="0" t="0" r="0" b="0"/>
+          <a:stretch>
+            <a:fillRect/>
           </a:stretch>
         </p:blipFill>
         <p:spPr>
-          <a:xfrm xmlns:a="http://schemas.openxmlformats.org/drawingml/2006/main">
+          <a:xfrm>
             <a:off x="469900" y="431800"/>
             <a:ext cx="17360900" cy="9359900"/>
           </a:xfrm>
-          <a:prstGeom xmlns:a="http://schemas.openxmlformats.org/drawingml/2006/main" prst="rect">
+          <a:prstGeom prst="rect">
             <a:avLst/>
           </a:prstGeom>
-          <a:effectLst xmlns:a="http://schemas.openxmlformats.org/drawingml/2006/main">
+          <a:effectLst>
             <a:outerShdw blurRad="561213" dist="359752" dir="2700000">
               <a:srgbClr val="3E372E">
                 <a:alpha val="43000"/>
@@ -4750,20 +4401,20 @@
         <p:nvPicPr>
           <p:cNvPr id="61" name="그림 58"/>
           <p:cNvPicPr>
-            <a:picLocks xmlns:a="http://schemas.openxmlformats.org/drawingml/2006/main" noChangeAspect="1"/>
+            <a:picLocks noChangeAspect="1"/>
           </p:cNvPicPr>
           <p:nvPr/>
         </p:nvPicPr>
         <p:blipFill>
-          <a:blip xmlns:r="http://schemas.openxmlformats.org/officeDocument/2006/relationships" xmlns:a="http://schemas.openxmlformats.org/drawingml/2006/main" r:embed="R30c620fd56704d19"/>
-          <a:stretch xmlns:a="http://schemas.openxmlformats.org/drawingml/2006/main"/>
+          <a:blip r:embed="rId5"/>
+          <a:stretch/>
         </p:blipFill>
         <p:spPr>
-          <a:xfrm xmlns:a="http://schemas.openxmlformats.org/drawingml/2006/main">
+          <a:xfrm>
             <a:off x="11068785" y="2428875"/>
             <a:ext cx="4865805" cy="6572250"/>
           </a:xfrm>
-          <a:prstGeom xmlns:a="http://schemas.openxmlformats.org/drawingml/2006/main" prst="rect">
+          <a:prstGeom prst="rect">
             <a:avLst/>
           </a:prstGeom>
         </p:spPr>
@@ -4771,36 +4422,36 @@
       <p:sp>
         <p:nvSpPr>
           <p:cNvPr id="56" name="직사각형 55">
-            <a:extLst xmlns:a="http://schemas.openxmlformats.org/drawingml/2006/main">
+            <a:extLst>
               <a:ext uri="{FF2B5EF4-FFF2-40B4-BE49-F238E27FC236}">
                 <a16:creationId xmlns:a16="http://schemas.microsoft.com/office/drawing/2014/main" id="{1E5115D4-9A7F-4302-9ED7-EBABD1444D46}"/>
               </a:ext>
             </a:extLst>
           </p:cNvPr>
           <p:cNvSpPr>
-            <a:spLocks xmlns:a="http://schemas.openxmlformats.org/drawingml/2006/main" noGrp="1"/>
+            <a:spLocks noGrp="1"/>
           </p:cNvSpPr>
           <p:nvPr/>
         </p:nvSpPr>
         <p:spPr>
-          <a:xfrm xmlns:a="http://schemas.openxmlformats.org/drawingml/2006/main">
+          <a:xfrm>
             <a:off x="1285875" y="1238250"/>
             <a:ext cx="15716250" cy="1000125"/>
           </a:xfrm>
-          <a:prstGeom xmlns:a="http://schemas.openxmlformats.org/drawingml/2006/main" prst="rect">
+          <a:prstGeom prst="rect">
             <a:avLst/>
           </a:prstGeom>
-          <a:noFill xmlns:a="http://schemas.openxmlformats.org/drawingml/2006/main"/>
-          <a:ln xmlns:a="http://schemas.openxmlformats.org/drawingml/2006/main" w="0">
+          <a:noFill/>
+          <a:ln w="0">
             <a:noFill/>
           </a:ln>
         </p:spPr>
         <p:txBody>
-          <a:bodyPr xmlns:a="http://schemas.openxmlformats.org/drawingml/2006/main">
+          <a:bodyPr>
             <a:noAutofit/>
           </a:bodyPr>
-          <a:lstStyle xmlns:a="http://schemas.openxmlformats.org/drawingml/2006/main"/>
-          <a:p xmlns:a="http://schemas.openxmlformats.org/drawingml/2006/main">
+          <a:lstStyle/>
+          <a:p>
             <a:pPr>
               <a:buNone/>
               <a:defRPr sz="4875" b="1">
@@ -4830,19 +4481,37 @@
         <p:nvGraphicFramePr>
           <p:cNvPr id="63" name="표 60"/>
           <p:cNvGraphicFramePr/>
-          <p:nvPr/>
+          <p:nvPr>
+            <p:extLst>
+              <p:ext uri="{D42A27DB-BD31-4B8C-83A1-F6EECF244321}">
+                <p14:modId xmlns:p14="http://schemas.microsoft.com/office/powerpoint/2010/main" val="429859561"/>
+              </p:ext>
+            </p:extLst>
+          </p:nvPr>
         </p:nvGraphicFramePr>
         <p:xfrm>
-          <a:off xmlns:a="http://schemas.openxmlformats.org/drawingml/2006/main" x="1285875" y="2762250"/>
-          <a:ext xmlns:a="http://schemas.openxmlformats.org/drawingml/2006/main" cx="8334375" cy="6048375"/>
+          <a:off x="1285875" y="2762250"/>
+          <a:ext cx="8334375" cy="6048375"/>
         </p:xfrm>
-        <a:graphic xmlns:a="http://schemas.openxmlformats.org/drawingml/2006/main">
+        <a:graphic>
           <a:graphicData uri="http://schemas.openxmlformats.org/drawingml/2006/table">
             <a:tbl>
               <a:tblPr/>
               <a:tblGrid>
-                <a:gridCol w="1857375"/>
-                <a:gridCol w="6477000"/>
+                <a:gridCol w="2013916">
+                  <a:extLst>
+                    <a:ext uri="{9D8B030D-6E8A-4147-A177-3AD203B41FA5}">
+                      <a16:colId xmlns:a16="http://schemas.microsoft.com/office/drawing/2014/main" val="20000"/>
+                    </a:ext>
+                  </a:extLst>
+                </a:gridCol>
+                <a:gridCol w="6320459">
+                  <a:extLst>
+                    <a:ext uri="{9D8B030D-6E8A-4147-A177-3AD203B41FA5}">
+                      <a16:colId xmlns:a16="http://schemas.microsoft.com/office/drawing/2014/main" val="20001"/>
+                    </a:ext>
+                  </a:extLst>
+                </a:gridCol>
               </a:tblGrid>
               <a:tr h="762000">
                 <a:tc>
@@ -4893,6 +4562,11 @@
                     </a:solidFill>
                   </a:tcPr>
                 </a:tc>
+                <a:extLst>
+                  <a:ext uri="{0D108BD9-81ED-4DB2-BD59-A6C34878D82A}">
+                    <a16:rowId xmlns:a16="http://schemas.microsoft.com/office/drawing/2014/main" val="10000"/>
+                  </a:ext>
+                </a:extLst>
               </a:tr>
               <a:tr h="1762125">
                 <a:tc>
@@ -4901,7 +4575,7 @@
                     <a:lstStyle/>
                     <a:p>
                       <a:r>
-                        <a:rPr sz="2700" b="1">
+                        <a:rPr sz="2700" b="1" dirty="0" err="1">
                           <a:solidFill>
                             <a:srgbClr val="253E36"/>
                           </a:solidFill>
@@ -4909,8 +4583,38 @@
                           <a:ea typeface="Malgun Gothic"/>
                           <a:cs typeface="Malgun Gothic"/>
                         </a:rPr>
-                        <a:t>제작 목적</a:t>
+                        <a:t>제작</a:t>
                       </a:r>
+                      <a:r>
+                        <a:rPr sz="2700" b="1" dirty="0">
+                          <a:solidFill>
+                            <a:srgbClr val="253E36"/>
+                          </a:solidFill>
+                          <a:latin typeface="Malgun Gothic"/>
+                          <a:ea typeface="Malgun Gothic"/>
+                          <a:cs typeface="Malgun Gothic"/>
+                        </a:rPr>
+                        <a:t> </a:t>
+                      </a:r>
+                      <a:r>
+                        <a:rPr sz="2700" b="1" dirty="0" err="1">
+                          <a:solidFill>
+                            <a:srgbClr val="253E36"/>
+                          </a:solidFill>
+                          <a:latin typeface="Malgun Gothic"/>
+                          <a:ea typeface="Malgun Gothic"/>
+                          <a:cs typeface="Malgun Gothic"/>
+                        </a:rPr>
+                        <a:t>목적</a:t>
+                      </a:r>
+                      <a:endParaRPr sz="2700" b="1" dirty="0">
+                        <a:solidFill>
+                          <a:srgbClr val="253E36"/>
+                        </a:solidFill>
+                        <a:latin typeface="Malgun Gothic"/>
+                        <a:ea typeface="Malgun Gothic"/>
+                        <a:cs typeface="Malgun Gothic"/>
+                      </a:endParaRPr>
                     </a:p>
                   </a:txBody>
                   <a:tcPr marL="228600" marR="228600" marT="171450" marB="171450" anchor="ctr">
@@ -4925,7 +4629,7 @@
                     <a:lstStyle/>
                     <a:p>
                       <a:r>
-                        <a:rPr sz="2700" b="0">
+                        <a:rPr sz="2700" b="0" dirty="0" err="1">
                           <a:solidFill>
                             <a:srgbClr val="253E36"/>
                           </a:solidFill>
@@ -4933,12 +4637,10 @@
                           <a:ea typeface="Malgun Gothic"/>
                           <a:cs typeface="Malgun Gothic"/>
                         </a:rPr>
-                        <a:t>상품 사진과 등록 카테고리가</a:t>
+                        <a:t>상품</a:t>
                       </a:r>
-                    </a:p>
-                    <a:p>
                       <a:r>
-                        <a:rPr sz="2700" b="0">
+                        <a:rPr sz="2700" b="0" dirty="0">
                           <a:solidFill>
                             <a:srgbClr val="253E36"/>
                           </a:solidFill>
@@ -4946,7 +4648,138 @@
                           <a:ea typeface="Malgun Gothic"/>
                           <a:cs typeface="Malgun Gothic"/>
                         </a:rPr>
-                        <a:t>다른 항목을 확인합니다.</a:t>
+                        <a:t> </a:t>
+                      </a:r>
+                      <a:r>
+                        <a:rPr sz="2700" b="0" dirty="0" err="1">
+                          <a:solidFill>
+                            <a:srgbClr val="253E36"/>
+                          </a:solidFill>
+                          <a:latin typeface="Malgun Gothic"/>
+                          <a:ea typeface="Malgun Gothic"/>
+                          <a:cs typeface="Malgun Gothic"/>
+                        </a:rPr>
+                        <a:t>사진과</a:t>
+                      </a:r>
+                      <a:r>
+                        <a:rPr sz="2700" b="0" dirty="0">
+                          <a:solidFill>
+                            <a:srgbClr val="253E36"/>
+                          </a:solidFill>
+                          <a:latin typeface="Malgun Gothic"/>
+                          <a:ea typeface="Malgun Gothic"/>
+                          <a:cs typeface="Malgun Gothic"/>
+                        </a:rPr>
+                        <a:t> </a:t>
+                      </a:r>
+                      <a:r>
+                        <a:rPr sz="2700" b="0" dirty="0" err="1">
+                          <a:solidFill>
+                            <a:srgbClr val="253E36"/>
+                          </a:solidFill>
+                          <a:latin typeface="Malgun Gothic"/>
+                          <a:ea typeface="Malgun Gothic"/>
+                          <a:cs typeface="Malgun Gothic"/>
+                        </a:rPr>
+                        <a:t>등록</a:t>
+                      </a:r>
+                      <a:r>
+                        <a:rPr sz="2700" b="0" dirty="0">
+                          <a:solidFill>
+                            <a:srgbClr val="253E36"/>
+                          </a:solidFill>
+                          <a:latin typeface="Malgun Gothic"/>
+                          <a:ea typeface="Malgun Gothic"/>
+                          <a:cs typeface="Malgun Gothic"/>
+                        </a:rPr>
+                        <a:t> </a:t>
+                      </a:r>
+                      <a:r>
+                        <a:rPr sz="2700" b="0" dirty="0" err="1">
+                          <a:solidFill>
+                            <a:srgbClr val="253E36"/>
+                          </a:solidFill>
+                          <a:latin typeface="Malgun Gothic"/>
+                          <a:ea typeface="Malgun Gothic"/>
+                          <a:cs typeface="Malgun Gothic"/>
+                        </a:rPr>
+                        <a:t>카테고리가</a:t>
+                      </a:r>
+                      <a:endParaRPr sz="2700" b="0" dirty="0">
+                        <a:solidFill>
+                          <a:srgbClr val="253E36"/>
+                        </a:solidFill>
+                        <a:latin typeface="Malgun Gothic"/>
+                        <a:ea typeface="Malgun Gothic"/>
+                        <a:cs typeface="Malgun Gothic"/>
+                      </a:endParaRPr>
+                    </a:p>
+                    <a:p>
+                      <a:r>
+                        <a:rPr sz="2700" b="0" dirty="0" err="1">
+                          <a:solidFill>
+                            <a:srgbClr val="253E36"/>
+                          </a:solidFill>
+                          <a:latin typeface="Malgun Gothic"/>
+                          <a:ea typeface="Malgun Gothic"/>
+                          <a:cs typeface="Malgun Gothic"/>
+                        </a:rPr>
+                        <a:t>다른</a:t>
+                      </a:r>
+                      <a:r>
+                        <a:rPr sz="2700" b="0" dirty="0">
+                          <a:solidFill>
+                            <a:srgbClr val="253E36"/>
+                          </a:solidFill>
+                          <a:latin typeface="Malgun Gothic"/>
+                          <a:ea typeface="Malgun Gothic"/>
+                          <a:cs typeface="Malgun Gothic"/>
+                        </a:rPr>
+                        <a:t> </a:t>
+                      </a:r>
+                      <a:r>
+                        <a:rPr sz="2700" b="0" dirty="0" err="1">
+                          <a:solidFill>
+                            <a:srgbClr val="253E36"/>
+                          </a:solidFill>
+                          <a:latin typeface="Malgun Gothic"/>
+                          <a:ea typeface="Malgun Gothic"/>
+                          <a:cs typeface="Malgun Gothic"/>
+                        </a:rPr>
+                        <a:t>항목을</a:t>
+                      </a:r>
+                      <a:r>
+                        <a:rPr sz="2700" b="0" dirty="0">
+                          <a:solidFill>
+                            <a:srgbClr val="253E36"/>
+                          </a:solidFill>
+                          <a:latin typeface="Malgun Gothic"/>
+                          <a:ea typeface="Malgun Gothic"/>
+                          <a:cs typeface="Malgun Gothic"/>
+                        </a:rPr>
+                        <a:t> </a:t>
+                      </a:r>
+                      <a:r>
+                        <a:rPr sz="2700" b="0" dirty="0" err="1">
+                          <a:solidFill>
+                            <a:srgbClr val="253E36"/>
+                          </a:solidFill>
+                          <a:latin typeface="Malgun Gothic"/>
+                          <a:ea typeface="Malgun Gothic"/>
+                          <a:cs typeface="Malgun Gothic"/>
+                        </a:rPr>
+                        <a:t>확인합니다</a:t>
+                      </a:r>
+                      <a:r>
+                        <a:rPr sz="2700" b="0" dirty="0">
+                          <a:solidFill>
+                            <a:srgbClr val="253E36"/>
+                          </a:solidFill>
+                          <a:latin typeface="Malgun Gothic"/>
+                          <a:ea typeface="Malgun Gothic"/>
+                          <a:cs typeface="Malgun Gothic"/>
+                        </a:rPr>
+                        <a:t>.</a:t>
                       </a:r>
                     </a:p>
                   </a:txBody>
@@ -4956,6 +4789,11 @@
                     </a:solidFill>
                   </a:tcPr>
                 </a:tc>
+                <a:extLst>
+                  <a:ext uri="{0D108BD9-81ED-4DB2-BD59-A6C34878D82A}">
+                    <a16:rowId xmlns:a16="http://schemas.microsoft.com/office/drawing/2014/main" val="10001"/>
+                  </a:ext>
+                </a:extLst>
               </a:tr>
               <a:tr h="1762125">
                 <a:tc>
@@ -4964,7 +4802,7 @@
                     <a:lstStyle/>
                     <a:p>
                       <a:r>
-                        <a:rPr sz="2700" b="1">
+                        <a:rPr sz="2700" b="1" dirty="0" err="1">
                           <a:solidFill>
                             <a:srgbClr val="253E36"/>
                           </a:solidFill>
@@ -4974,6 +4812,14 @@
                         </a:rPr>
                         <a:t>입력</a:t>
                       </a:r>
+                      <a:endParaRPr sz="2700" b="1" dirty="0">
+                        <a:solidFill>
+                          <a:srgbClr val="253E36"/>
+                        </a:solidFill>
+                        <a:latin typeface="Malgun Gothic"/>
+                        <a:ea typeface="Malgun Gothic"/>
+                        <a:cs typeface="Malgun Gothic"/>
+                      </a:endParaRPr>
                     </a:p>
                   </a:txBody>
                   <a:tcPr marL="228600" marR="228600" marT="171450" marB="171450" anchor="ctr">
@@ -5019,6 +4865,11 @@
                     </a:solidFill>
                   </a:tcPr>
                 </a:tc>
+                <a:extLst>
+                  <a:ext uri="{0D108BD9-81ED-4DB2-BD59-A6C34878D82A}">
+                    <a16:rowId xmlns:a16="http://schemas.microsoft.com/office/drawing/2014/main" val="10002"/>
+                  </a:ext>
+                </a:extLst>
               </a:tr>
               <a:tr h="1762125">
                 <a:tc>
@@ -5051,7 +4902,7 @@
                     <a:lstStyle/>
                     <a:p>
                       <a:r>
-                        <a:rPr sz="2700" b="0">
+                        <a:rPr sz="2700" b="0" dirty="0" err="1">
                           <a:solidFill>
                             <a:srgbClr val="253E36"/>
                           </a:solidFill>
@@ -5059,12 +4910,10 @@
                           <a:ea typeface="Malgun Gothic"/>
                           <a:cs typeface="Malgun Gothic"/>
                         </a:rPr>
-                        <a:t>일치·불일치·판단 보류</a:t>
+                        <a:t>일치·불일치·판단</a:t>
                       </a:r>
-                    </a:p>
-                    <a:p>
                       <a:r>
-                        <a:rPr sz="2700" b="0">
+                        <a:rPr sz="2700" b="0" dirty="0">
                           <a:solidFill>
                             <a:srgbClr val="253E36"/>
                           </a:solidFill>
@@ -5072,8 +4921,114 @@
                           <a:ea typeface="Malgun Gothic"/>
                           <a:cs typeface="Malgun Gothic"/>
                         </a:rPr>
-                        <a:t>후보별 점수와 판정 근거</a:t>
+                        <a:t> </a:t>
                       </a:r>
+                      <a:r>
+                        <a:rPr sz="2700" b="0" dirty="0" err="1">
+                          <a:solidFill>
+                            <a:srgbClr val="253E36"/>
+                          </a:solidFill>
+                          <a:latin typeface="Malgun Gothic"/>
+                          <a:ea typeface="Malgun Gothic"/>
+                          <a:cs typeface="Malgun Gothic"/>
+                        </a:rPr>
+                        <a:t>보류</a:t>
+                      </a:r>
+                      <a:endParaRPr sz="2700" b="0" dirty="0">
+                        <a:solidFill>
+                          <a:srgbClr val="253E36"/>
+                        </a:solidFill>
+                        <a:latin typeface="Malgun Gothic"/>
+                        <a:ea typeface="Malgun Gothic"/>
+                        <a:cs typeface="Malgun Gothic"/>
+                      </a:endParaRPr>
+                    </a:p>
+                    <a:p>
+                      <a:r>
+                        <a:rPr sz="2700" b="0" dirty="0" err="1">
+                          <a:solidFill>
+                            <a:srgbClr val="253E36"/>
+                          </a:solidFill>
+                          <a:latin typeface="Malgun Gothic"/>
+                          <a:ea typeface="Malgun Gothic"/>
+                          <a:cs typeface="Malgun Gothic"/>
+                        </a:rPr>
+                        <a:t>후보별</a:t>
+                      </a:r>
+                      <a:r>
+                        <a:rPr sz="2700" b="0" dirty="0">
+                          <a:solidFill>
+                            <a:srgbClr val="253E36"/>
+                          </a:solidFill>
+                          <a:latin typeface="Malgun Gothic"/>
+                          <a:ea typeface="Malgun Gothic"/>
+                          <a:cs typeface="Malgun Gothic"/>
+                        </a:rPr>
+                        <a:t> </a:t>
+                      </a:r>
+                      <a:r>
+                        <a:rPr sz="2700" b="0" dirty="0" err="1">
+                          <a:solidFill>
+                            <a:srgbClr val="253E36"/>
+                          </a:solidFill>
+                          <a:latin typeface="Malgun Gothic"/>
+                          <a:ea typeface="Malgun Gothic"/>
+                          <a:cs typeface="Malgun Gothic"/>
+                        </a:rPr>
+                        <a:t>점수와</a:t>
+                      </a:r>
+                      <a:r>
+                        <a:rPr sz="2700" b="0" dirty="0">
+                          <a:solidFill>
+                            <a:srgbClr val="253E36"/>
+                          </a:solidFill>
+                          <a:latin typeface="Malgun Gothic"/>
+                          <a:ea typeface="Malgun Gothic"/>
+                          <a:cs typeface="Malgun Gothic"/>
+                        </a:rPr>
+                        <a:t> </a:t>
+                      </a:r>
+                      <a:r>
+                        <a:rPr sz="2700" b="0" dirty="0" err="1">
+                          <a:solidFill>
+                            <a:srgbClr val="253E36"/>
+                          </a:solidFill>
+                          <a:latin typeface="Malgun Gothic"/>
+                          <a:ea typeface="Malgun Gothic"/>
+                          <a:cs typeface="Malgun Gothic"/>
+                        </a:rPr>
+                        <a:t>판정</a:t>
+                      </a:r>
+                      <a:r>
+                        <a:rPr sz="2700" b="0" dirty="0">
+                          <a:solidFill>
+                            <a:srgbClr val="253E36"/>
+                          </a:solidFill>
+                          <a:latin typeface="Malgun Gothic"/>
+                          <a:ea typeface="Malgun Gothic"/>
+                          <a:cs typeface="Malgun Gothic"/>
+                        </a:rPr>
+                        <a:t> </a:t>
+                      </a:r>
+                      <a:r>
+                        <a:rPr sz="2700" b="0" dirty="0" err="1">
+                          <a:solidFill>
+                            <a:srgbClr val="253E36"/>
+                          </a:solidFill>
+                          <a:latin typeface="Malgun Gothic"/>
+                          <a:ea typeface="Malgun Gothic"/>
+                          <a:cs typeface="Malgun Gothic"/>
+                        </a:rPr>
+                        <a:t>근거</a:t>
+                      </a:r>
+                      <a:endParaRPr sz="2700" b="0" dirty="0">
+                        <a:solidFill>
+                          <a:srgbClr val="253E36"/>
+                        </a:solidFill>
+                        <a:latin typeface="Malgun Gothic"/>
+                        <a:ea typeface="Malgun Gothic"/>
+                        <a:cs typeface="Malgun Gothic"/>
+                      </a:endParaRPr>
                     </a:p>
                   </a:txBody>
                   <a:tcPr marL="228600" marR="228600" marT="171450" marB="171450" anchor="ctr">
@@ -5082,6 +5037,11 @@
                     </a:solidFill>
                   </a:tcPr>
                 </a:tc>
+                <a:extLst>
+                  <a:ext uri="{0D108BD9-81ED-4DB2-BD59-A6C34878D82A}">
+                    <a16:rowId xmlns:a16="http://schemas.microsoft.com/office/drawing/2014/main" val="10003"/>
+                  </a:ext>
+                </a:extLst>
               </a:tr>
             </a:tbl>
           </a:graphicData>
@@ -5094,17 +5054,21 @@
       </p:ext>
     </p:extLst>
   </p:cSld>
+  <p:clrMapOvr>
+    <a:masterClrMapping/>
+  </p:clrMapOvr>
 </p:sld>
 </file>
 
 <file path=ppt/slides/slide3.xml><?xml version="1.0" encoding="utf-8"?>
-<p:sld xmlns:p="http://schemas.openxmlformats.org/presentationml/2006/main">
+<p:sld xmlns:a="http://schemas.openxmlformats.org/drawingml/2006/main" xmlns:r="http://schemas.openxmlformats.org/officeDocument/2006/relationships" xmlns:p="http://schemas.openxmlformats.org/presentationml/2006/main">
   <p:cSld>
     <p:bg>
       <p:bgPr>
-        <a:solidFill xmlns:a="http://schemas.openxmlformats.org/drawingml/2006/main">
+        <a:solidFill>
           <a:srgbClr val="DACEB9"/>
         </a:solidFill>
+        <a:effectLst/>
       </p:bgPr>
     </p:bg>
     <p:spTree>
@@ -5114,37 +5078,42 @@
         <p:nvPr/>
       </p:nvGrpSpPr>
       <p:grpSpPr>
-        <a:xfrm xmlns:a="http://schemas.openxmlformats.org/drawingml/2006/main"/>
+        <a:xfrm>
+          <a:off x="0" y="0"/>
+          <a:ext cx="0" cy="0"/>
+          <a:chOff x="0" y="0"/>
+          <a:chExt cx="0" cy="0"/>
+        </a:xfrm>
       </p:grpSpPr>
       <p:pic>
         <p:nvPicPr>
           <p:cNvPr id="75" name="Picture 2"/>
           <p:cNvPicPr>
-            <a:picLocks xmlns:a="http://schemas.openxmlformats.org/drawingml/2006/main" noChangeAspect="1"/>
+            <a:picLocks noChangeAspect="1"/>
           </p:cNvPicPr>
           <p:nvPr/>
         </p:nvPicPr>
         <p:blipFill>
-          <a:blip xmlns:r="http://schemas.openxmlformats.org/officeDocument/2006/relationships" xmlns:a="http://schemas.openxmlformats.org/drawingml/2006/main" r:embed="R355e45d038ae4ea4">
+          <a:blip r:embed="rId3">
             <a:extLst>
               <a:ext uri="{96DAC541-7B7A-43D3-8B79-37D633B846F1}">
-                <asvg:svgBlip xmlns:asvg="http://schemas.microsoft.com/office/drawing/2016/SVG/main" r:embed="Rff22655853204b9d"/>
+                <asvg:svgBlip xmlns:asvg="http://schemas.microsoft.com/office/drawing/2016/SVG/main" r:embed="rId4"/>
               </a:ext>
             </a:extLst>
           </a:blip>
-          <a:stretch xmlns:a="http://schemas.openxmlformats.org/drawingml/2006/main">
-            <a:fillRect l="0" t="0" r="0" b="0"/>
+          <a:stretch>
+            <a:fillRect/>
           </a:stretch>
         </p:blipFill>
         <p:spPr>
-          <a:xfrm xmlns:a="http://schemas.openxmlformats.org/drawingml/2006/main">
+          <a:xfrm>
             <a:off x="469900" y="431800"/>
             <a:ext cx="17360900" cy="9359900"/>
           </a:xfrm>
-          <a:prstGeom xmlns:a="http://schemas.openxmlformats.org/drawingml/2006/main" prst="rect">
+          <a:prstGeom prst="rect">
             <a:avLst/>
           </a:prstGeom>
-          <a:effectLst xmlns:a="http://schemas.openxmlformats.org/drawingml/2006/main">
+          <a:effectLst>
             <a:outerShdw blurRad="561213" dist="359752" dir="2700000">
               <a:srgbClr val="3E372E">
                 <a:alpha val="43000"/>
@@ -5157,21 +5126,21 @@
         <p:nvPicPr>
           <p:cNvPr id="76" name="그림 71"/>
           <p:cNvPicPr>
-            <a:picLocks xmlns:a="http://schemas.openxmlformats.org/drawingml/2006/main" noChangeAspect="1"/>
+            <a:picLocks noChangeAspect="1"/>
           </p:cNvPicPr>
           <p:nvPr/>
         </p:nvPicPr>
         <p:blipFill>
-          <a:blip xmlns:r="http://schemas.openxmlformats.org/officeDocument/2006/relationships" xmlns:a="http://schemas.openxmlformats.org/drawingml/2006/main" r:embed="Reeca0c5811c248b6"/>
-          <a:srcRect xmlns:a="http://schemas.openxmlformats.org/drawingml/2006/main" l="0" t="0" r="0" b="40000"/>
-          <a:stretch xmlns:a="http://schemas.openxmlformats.org/drawingml/2006/main"/>
+          <a:blip r:embed="rId5"/>
+          <a:srcRect b="40000"/>
+          <a:stretch/>
         </p:blipFill>
         <p:spPr>
-          <a:xfrm xmlns:a="http://schemas.openxmlformats.org/drawingml/2006/main">
+          <a:xfrm>
             <a:off x="1238250" y="2619375"/>
             <a:ext cx="7524750" cy="5953125"/>
           </a:xfrm>
-          <a:prstGeom xmlns:a="http://schemas.openxmlformats.org/drawingml/2006/main" prst="rect">
+          <a:prstGeom prst="rect">
             <a:avLst/>
           </a:prstGeom>
         </p:spPr>
@@ -5179,36 +5148,36 @@
       <p:sp>
         <p:nvSpPr>
           <p:cNvPr id="66" name="직사각형 65">
-            <a:extLst xmlns:a="http://schemas.openxmlformats.org/drawingml/2006/main">
+            <a:extLst>
               <a:ext uri="{FF2B5EF4-FFF2-40B4-BE49-F238E27FC236}">
                 <a16:creationId xmlns:a16="http://schemas.microsoft.com/office/drawing/2014/main" id="{58CD9AF7-FDBC-4DAA-982C-9B9F17AFBBBF}"/>
               </a:ext>
             </a:extLst>
           </p:cNvPr>
           <p:cNvSpPr>
-            <a:spLocks xmlns:a="http://schemas.openxmlformats.org/drawingml/2006/main" noGrp="1"/>
+            <a:spLocks noGrp="1"/>
           </p:cNvSpPr>
           <p:nvPr/>
         </p:nvSpPr>
         <p:spPr>
-          <a:xfrm xmlns:a="http://schemas.openxmlformats.org/drawingml/2006/main">
+          <a:xfrm>
             <a:off x="1285875" y="1190625"/>
             <a:ext cx="15716250" cy="952500"/>
           </a:xfrm>
-          <a:prstGeom xmlns:a="http://schemas.openxmlformats.org/drawingml/2006/main" prst="rect">
+          <a:prstGeom prst="rect">
             <a:avLst/>
           </a:prstGeom>
-          <a:noFill xmlns:a="http://schemas.openxmlformats.org/drawingml/2006/main"/>
-          <a:ln xmlns:a="http://schemas.openxmlformats.org/drawingml/2006/main" w="0">
+          <a:noFill/>
+          <a:ln w="0">
             <a:noFill/>
           </a:ln>
         </p:spPr>
         <p:txBody>
-          <a:bodyPr xmlns:a="http://schemas.openxmlformats.org/drawingml/2006/main">
+          <a:bodyPr>
             <a:noAutofit/>
           </a:bodyPr>
-          <a:lstStyle xmlns:a="http://schemas.openxmlformats.org/drawingml/2006/main"/>
-          <a:p xmlns:a="http://schemas.openxmlformats.org/drawingml/2006/main">
+          <a:lstStyle/>
+          <a:p>
             <a:pPr>
               <a:buNone/>
               <a:defRPr sz="4875" b="1">
@@ -5241,17 +5210,35 @@
           <p:nvPr/>
         </p:nvGraphicFramePr>
         <p:xfrm>
-          <a:off xmlns:a="http://schemas.openxmlformats.org/drawingml/2006/main" x="9239250" y="2714625"/>
-          <a:ext xmlns:a="http://schemas.openxmlformats.org/drawingml/2006/main" cx="7762875" cy="4143375"/>
+          <a:off x="9239250" y="2714625"/>
+          <a:ext cx="7762875" cy="4143375"/>
         </p:xfrm>
-        <a:graphic xmlns:a="http://schemas.openxmlformats.org/drawingml/2006/main">
+        <a:graphic>
           <a:graphicData uri="http://schemas.openxmlformats.org/drawingml/2006/table">
             <a:tbl>
               <a:tblPr/>
               <a:tblGrid>
-                <a:gridCol w="2333625"/>
-                <a:gridCol w="2714625"/>
-                <a:gridCol w="2714625"/>
+                <a:gridCol w="2333625">
+                  <a:extLst>
+                    <a:ext uri="{9D8B030D-6E8A-4147-A177-3AD203B41FA5}">
+                      <a16:colId xmlns:a16="http://schemas.microsoft.com/office/drawing/2014/main" val="20000"/>
+                    </a:ext>
+                  </a:extLst>
+                </a:gridCol>
+                <a:gridCol w="2714625">
+                  <a:extLst>
+                    <a:ext uri="{9D8B030D-6E8A-4147-A177-3AD203B41FA5}">
+                      <a16:colId xmlns:a16="http://schemas.microsoft.com/office/drawing/2014/main" val="20001"/>
+                    </a:ext>
+                  </a:extLst>
+                </a:gridCol>
+                <a:gridCol w="2714625">
+                  <a:extLst>
+                    <a:ext uri="{9D8B030D-6E8A-4147-A177-3AD203B41FA5}">
+                      <a16:colId xmlns:a16="http://schemas.microsoft.com/office/drawing/2014/main" val="20002"/>
+                    </a:ext>
+                  </a:extLst>
+                </a:gridCol>
               </a:tblGrid>
               <a:tr h="809625">
                 <a:tc>
@@ -5326,6 +5313,11 @@
                     </a:solidFill>
                   </a:tcPr>
                 </a:tc>
+                <a:extLst>
+                  <a:ext uri="{0D108BD9-81ED-4DB2-BD59-A6C34878D82A}">
+                    <a16:rowId xmlns:a16="http://schemas.microsoft.com/office/drawing/2014/main" val="10000"/>
+                  </a:ext>
+                </a:extLst>
               </a:tr>
               <a:tr h="1666875">
                 <a:tc>
@@ -5358,7 +5350,7 @@
                     <a:lstStyle/>
                     <a:p>
                       <a:r>
-                        <a:rPr sz="2400" b="0">
+                        <a:rPr sz="2400" b="0" dirty="0">
                           <a:solidFill>
                             <a:srgbClr val="253E36"/>
                           </a:solidFill>
@@ -5413,6 +5405,11 @@
                     </a:solidFill>
                   </a:tcPr>
                 </a:tc>
+                <a:extLst>
+                  <a:ext uri="{0D108BD9-81ED-4DB2-BD59-A6C34878D82A}">
+                    <a16:rowId xmlns:a16="http://schemas.microsoft.com/office/drawing/2014/main" val="10001"/>
+                  </a:ext>
+                </a:extLst>
               </a:tr>
               <a:tr h="1666875">
                 <a:tc>
@@ -5469,7 +5466,7 @@
                     <a:lstStyle/>
                     <a:p>
                       <a:r>
-                        <a:rPr sz="2400" b="0">
+                        <a:rPr sz="2400" b="0" dirty="0">
                           <a:solidFill>
                             <a:srgbClr val="253E36"/>
                           </a:solidFill>
@@ -5477,12 +5474,31 @@
                           <a:ea typeface="Malgun Gothic"/>
                           <a:cs typeface="Malgun Gothic"/>
                         </a:rPr>
-                        <a:t>15%p 이상</a:t>
+                        <a:t>15%p </a:t>
                       </a:r>
+                      <a:r>
+                        <a:rPr sz="2400" b="0" dirty="0" err="1">
+                          <a:solidFill>
+                            <a:srgbClr val="253E36"/>
+                          </a:solidFill>
+                          <a:latin typeface="Malgun Gothic"/>
+                          <a:ea typeface="Malgun Gothic"/>
+                          <a:cs typeface="Malgun Gothic"/>
+                        </a:rPr>
+                        <a:t>이상</a:t>
+                      </a:r>
+                      <a:endParaRPr sz="2400" b="0" dirty="0">
+                        <a:solidFill>
+                          <a:srgbClr val="253E36"/>
+                        </a:solidFill>
+                        <a:latin typeface="Malgun Gothic"/>
+                        <a:ea typeface="Malgun Gothic"/>
+                        <a:cs typeface="Malgun Gothic"/>
+                      </a:endParaRPr>
                     </a:p>
                     <a:p>
                       <a:r>
-                        <a:rPr sz="2400" b="0">
+                        <a:rPr sz="2400" b="0" dirty="0" err="1">
                           <a:solidFill>
                             <a:srgbClr val="253E36"/>
                           </a:solidFill>
@@ -5492,6 +5508,14 @@
                         </a:rPr>
                         <a:t>충족</a:t>
                       </a:r>
+                      <a:endParaRPr sz="2400" b="0" dirty="0">
+                        <a:solidFill>
+                          <a:srgbClr val="253E36"/>
+                        </a:solidFill>
+                        <a:latin typeface="Malgun Gothic"/>
+                        <a:ea typeface="Malgun Gothic"/>
+                        <a:cs typeface="Malgun Gothic"/>
+                      </a:endParaRPr>
                     </a:p>
                   </a:txBody>
                   <a:tcPr marL="228600" marR="228600" marT="171450" marB="171450" anchor="ctr">
@@ -5500,6 +5524,11 @@
                     </a:solidFill>
                   </a:tcPr>
                 </a:tc>
+                <a:extLst>
+                  <a:ext uri="{0D108BD9-81ED-4DB2-BD59-A6C34878D82A}">
+                    <a16:rowId xmlns:a16="http://schemas.microsoft.com/office/drawing/2014/main" val="10002"/>
+                  </a:ext>
+                </a:extLst>
               </a:tr>
             </a:tbl>
           </a:graphicData>
@@ -5509,19 +5538,37 @@
         <p:nvGraphicFramePr>
           <p:cNvPr id="79" name="표 74"/>
           <p:cNvGraphicFramePr/>
-          <p:nvPr/>
+          <p:nvPr>
+            <p:extLst>
+              <p:ext uri="{D42A27DB-BD31-4B8C-83A1-F6EECF244321}">
+                <p14:modId xmlns:p14="http://schemas.microsoft.com/office/powerpoint/2010/main" val="2000471971"/>
+              </p:ext>
+            </p:extLst>
+          </p:nvPr>
         </p:nvGraphicFramePr>
         <p:xfrm>
-          <a:off xmlns:a="http://schemas.openxmlformats.org/drawingml/2006/main" x="9239250" y="7096125"/>
-          <a:ext xmlns:a="http://schemas.openxmlformats.org/drawingml/2006/main" cx="7762876" cy="1440180"/>
+          <a:off x="9239250" y="7096125"/>
+          <a:ext cx="7762876" cy="1440180"/>
         </p:xfrm>
-        <a:graphic xmlns:a="http://schemas.openxmlformats.org/drawingml/2006/main">
+        <a:graphic>
           <a:graphicData uri="http://schemas.openxmlformats.org/drawingml/2006/table">
             <a:tbl>
               <a:tblPr/>
               <a:tblGrid>
-                <a:gridCol w="3881438"/>
-                <a:gridCol w="3881438"/>
+                <a:gridCol w="3881438">
+                  <a:extLst>
+                    <a:ext uri="{9D8B030D-6E8A-4147-A177-3AD203B41FA5}">
+                      <a16:colId xmlns:a16="http://schemas.microsoft.com/office/drawing/2014/main" val="20000"/>
+                    </a:ext>
+                  </a:extLst>
+                </a:gridCol>
+                <a:gridCol w="3881438">
+                  <a:extLst>
+                    <a:ext uri="{9D8B030D-6E8A-4147-A177-3AD203B41FA5}">
+                      <a16:colId xmlns:a16="http://schemas.microsoft.com/office/drawing/2014/main" val="20001"/>
+                    </a:ext>
+                  </a:extLst>
+                </a:gridCol>
               </a:tblGrid>
               <a:tr h="571500">
                 <a:tc>
@@ -5572,6 +5619,11 @@
                     </a:solidFill>
                   </a:tcPr>
                 </a:tc>
+                <a:extLst>
+                  <a:ext uri="{0D108BD9-81ED-4DB2-BD59-A6C34878D82A}">
+                    <a16:rowId xmlns:a16="http://schemas.microsoft.com/office/drawing/2014/main" val="10000"/>
+                  </a:ext>
+                </a:extLst>
               </a:tr>
               <a:tr h="619125">
                 <a:tc>
@@ -5604,7 +5656,7 @@
                     <a:lstStyle/>
                     <a:p>
                       <a:r>
-                        <a:rPr sz="2475" b="0">
+                        <a:rPr sz="2475" b="0" dirty="0" err="1">
                           <a:solidFill>
                             <a:srgbClr val="253E36"/>
                           </a:solidFill>
@@ -5614,6 +5666,14 @@
                         </a:rPr>
                         <a:t>상의</a:t>
                       </a:r>
+                      <a:endParaRPr sz="2475" b="0" dirty="0">
+                        <a:solidFill>
+                          <a:srgbClr val="253E36"/>
+                        </a:solidFill>
+                        <a:latin typeface="Malgun Gothic"/>
+                        <a:ea typeface="Malgun Gothic"/>
+                        <a:cs typeface="Malgun Gothic"/>
+                      </a:endParaRPr>
                     </a:p>
                   </a:txBody>
                   <a:tcPr marL="228600" marR="228600" marT="171450" marB="171450" anchor="ctr">
@@ -5622,6 +5682,11 @@
                     </a:solidFill>
                   </a:tcPr>
                 </a:tc>
+                <a:extLst>
+                  <a:ext uri="{0D108BD9-81ED-4DB2-BD59-A6C34878D82A}">
+                    <a16:rowId xmlns:a16="http://schemas.microsoft.com/office/drawing/2014/main" val="10001"/>
+                  </a:ext>
+                </a:extLst>
               </a:tr>
             </a:tbl>
           </a:graphicData>
@@ -5630,36 +5695,36 @@
       <p:sp>
         <p:nvSpPr>
           <p:cNvPr id="69" name="직사각형 68">
-            <a:extLst xmlns:a="http://schemas.openxmlformats.org/drawingml/2006/main">
+            <a:extLst>
               <a:ext uri="{FF2B5EF4-FFF2-40B4-BE49-F238E27FC236}">
                 <a16:creationId xmlns:a16="http://schemas.microsoft.com/office/drawing/2014/main" id="{7FA0F55E-57DA-4934-9548-E924FDCF40B3}"/>
               </a:ext>
             </a:extLst>
           </p:cNvPr>
           <p:cNvSpPr>
-            <a:spLocks xmlns:a="http://schemas.openxmlformats.org/drawingml/2006/main" noGrp="1"/>
+            <a:spLocks noGrp="1"/>
           </p:cNvSpPr>
           <p:nvPr/>
         </p:nvSpPr>
         <p:spPr>
-          <a:xfrm xmlns:a="http://schemas.openxmlformats.org/drawingml/2006/main">
+          <a:xfrm>
             <a:off x="1333500" y="8715375"/>
             <a:ext cx="15621000" cy="619125"/>
           </a:xfrm>
-          <a:prstGeom xmlns:a="http://schemas.openxmlformats.org/drawingml/2006/main" prst="rect">
+          <a:prstGeom prst="rect">
             <a:avLst/>
           </a:prstGeom>
-          <a:noFill xmlns:a="http://schemas.openxmlformats.org/drawingml/2006/main"/>
-          <a:ln xmlns:a="http://schemas.openxmlformats.org/drawingml/2006/main" w="0">
+          <a:noFill/>
+          <a:ln w="0">
             <a:noFill/>
           </a:ln>
         </p:spPr>
         <p:txBody>
-          <a:bodyPr xmlns:a="http://schemas.openxmlformats.org/drawingml/2006/main">
+          <a:bodyPr>
             <a:noAutofit/>
           </a:bodyPr>
-          <a:lstStyle xmlns:a="http://schemas.openxmlformats.org/drawingml/2006/main"/>
-          <a:p xmlns:a="http://schemas.openxmlformats.org/drawingml/2006/main">
+          <a:lstStyle/>
+          <a:p>
             <a:pPr>
               <a:buNone/>
               <a:defRPr sz="2250" b="0">
@@ -5688,36 +5753,36 @@
       <p:sp>
         <p:nvSpPr>
           <p:cNvPr id="70" name="직사각형 69">
-            <a:extLst xmlns:a="http://schemas.openxmlformats.org/drawingml/2006/main">
+            <a:extLst>
               <a:ext uri="{FF2B5EF4-FFF2-40B4-BE49-F238E27FC236}">
                 <a16:creationId xmlns:a16="http://schemas.microsoft.com/office/drawing/2014/main" id="{4692E083-E433-4AAF-BBB7-9EF801FD38B8}"/>
               </a:ext>
             </a:extLst>
           </p:cNvPr>
           <p:cNvSpPr>
-            <a:spLocks xmlns:a="http://schemas.openxmlformats.org/drawingml/2006/main" noGrp="1"/>
+            <a:spLocks noGrp="1"/>
           </p:cNvSpPr>
           <p:nvPr/>
         </p:nvSpPr>
         <p:spPr>
-          <a:xfrm xmlns:a="http://schemas.openxmlformats.org/drawingml/2006/main">
+          <a:xfrm>
             <a:off x="1333500" y="9334500"/>
             <a:ext cx="15621000" cy="428625"/>
           </a:xfrm>
-          <a:prstGeom xmlns:a="http://schemas.openxmlformats.org/drawingml/2006/main" prst="rect">
+          <a:prstGeom prst="rect">
             <a:avLst/>
           </a:prstGeom>
-          <a:noFill xmlns:a="http://schemas.openxmlformats.org/drawingml/2006/main"/>
-          <a:ln xmlns:a="http://schemas.openxmlformats.org/drawingml/2006/main" w="0">
+          <a:noFill/>
+          <a:ln w="0">
             <a:noFill/>
           </a:ln>
         </p:spPr>
         <p:txBody>
-          <a:bodyPr xmlns:a="http://schemas.openxmlformats.org/drawingml/2006/main">
+          <a:bodyPr>
             <a:noAutofit/>
           </a:bodyPr>
-          <a:lstStyle xmlns:a="http://schemas.openxmlformats.org/drawingml/2006/main"/>
-          <a:p xmlns:a="http://schemas.openxmlformats.org/drawingml/2006/main">
+          <a:lstStyle/>
+          <a:p>
             <a:pPr>
               <a:buNone/>
               <a:defRPr sz="1875" b="0">
@@ -5730,7 +5795,7 @@
               </a:defRPr>
             </a:pPr>
             <a:r>
-              <a:rPr sz="1875" b="0">
+              <a:rPr sz="1875" b="0" dirty="0" err="1">
                 <a:solidFill>
                   <a:srgbClr val="52615A"/>
                 </a:solidFill>
@@ -5738,7 +5803,172 @@
                 <a:ea typeface="Malgun Gothic"/>
                 <a:cs typeface="Malgun Gothic"/>
               </a:rPr>
-              <a:t>점수는 정확도나 정답 확률이 아닙니다. 65%와 15%p는 시연용으로 정한 기준입니다.</a:t>
+              <a:t>점수는</a:t>
+            </a:r>
+            <a:r>
+              <a:rPr sz="1875" b="0" dirty="0">
+                <a:solidFill>
+                  <a:srgbClr val="52615A"/>
+                </a:solidFill>
+                <a:latin typeface="Malgun Gothic"/>
+                <a:ea typeface="Malgun Gothic"/>
+                <a:cs typeface="Malgun Gothic"/>
+              </a:rPr>
+              <a:t> </a:t>
+            </a:r>
+            <a:r>
+              <a:rPr sz="1875" b="0" dirty="0" err="1">
+                <a:solidFill>
+                  <a:srgbClr val="52615A"/>
+                </a:solidFill>
+                <a:latin typeface="Malgun Gothic"/>
+                <a:ea typeface="Malgun Gothic"/>
+                <a:cs typeface="Malgun Gothic"/>
+              </a:rPr>
+              <a:t>정확도나</a:t>
+            </a:r>
+            <a:r>
+              <a:rPr sz="1875" b="0" dirty="0">
+                <a:solidFill>
+                  <a:srgbClr val="52615A"/>
+                </a:solidFill>
+                <a:latin typeface="Malgun Gothic"/>
+                <a:ea typeface="Malgun Gothic"/>
+                <a:cs typeface="Malgun Gothic"/>
+              </a:rPr>
+              <a:t> </a:t>
+            </a:r>
+            <a:r>
+              <a:rPr sz="1875" b="0" dirty="0" err="1">
+                <a:solidFill>
+                  <a:srgbClr val="52615A"/>
+                </a:solidFill>
+                <a:latin typeface="Malgun Gothic"/>
+                <a:ea typeface="Malgun Gothic"/>
+                <a:cs typeface="Malgun Gothic"/>
+              </a:rPr>
+              <a:t>정답</a:t>
+            </a:r>
+            <a:r>
+              <a:rPr sz="1875" b="0" dirty="0">
+                <a:solidFill>
+                  <a:srgbClr val="52615A"/>
+                </a:solidFill>
+                <a:latin typeface="Malgun Gothic"/>
+                <a:ea typeface="Malgun Gothic"/>
+                <a:cs typeface="Malgun Gothic"/>
+              </a:rPr>
+              <a:t> </a:t>
+            </a:r>
+            <a:r>
+              <a:rPr sz="1875" b="0" dirty="0" err="1">
+                <a:solidFill>
+                  <a:srgbClr val="52615A"/>
+                </a:solidFill>
+                <a:latin typeface="Malgun Gothic"/>
+                <a:ea typeface="Malgun Gothic"/>
+                <a:cs typeface="Malgun Gothic"/>
+              </a:rPr>
+              <a:t>확률이</a:t>
+            </a:r>
+            <a:r>
+              <a:rPr sz="1875" b="0" dirty="0">
+                <a:solidFill>
+                  <a:srgbClr val="52615A"/>
+                </a:solidFill>
+                <a:latin typeface="Malgun Gothic"/>
+                <a:ea typeface="Malgun Gothic"/>
+                <a:cs typeface="Malgun Gothic"/>
+              </a:rPr>
+              <a:t> </a:t>
+            </a:r>
+            <a:r>
+              <a:rPr sz="1875" b="0" dirty="0" err="1">
+                <a:solidFill>
+                  <a:srgbClr val="52615A"/>
+                </a:solidFill>
+                <a:latin typeface="Malgun Gothic"/>
+                <a:ea typeface="Malgun Gothic"/>
+                <a:cs typeface="Malgun Gothic"/>
+              </a:rPr>
+              <a:t>아닙니다</a:t>
+            </a:r>
+            <a:r>
+              <a:rPr sz="1875" b="0" dirty="0">
+                <a:solidFill>
+                  <a:srgbClr val="52615A"/>
+                </a:solidFill>
+                <a:latin typeface="Malgun Gothic"/>
+                <a:ea typeface="Malgun Gothic"/>
+                <a:cs typeface="Malgun Gothic"/>
+              </a:rPr>
+              <a:t>. 65%와 15%p는 </a:t>
+            </a:r>
+            <a:r>
+              <a:rPr sz="1875" b="0" dirty="0" err="1">
+                <a:solidFill>
+                  <a:srgbClr val="52615A"/>
+                </a:solidFill>
+                <a:latin typeface="Malgun Gothic"/>
+                <a:ea typeface="Malgun Gothic"/>
+                <a:cs typeface="Malgun Gothic"/>
+              </a:rPr>
+              <a:t>시연용으로</a:t>
+            </a:r>
+            <a:r>
+              <a:rPr sz="1875" b="0" dirty="0">
+                <a:solidFill>
+                  <a:srgbClr val="52615A"/>
+                </a:solidFill>
+                <a:latin typeface="Malgun Gothic"/>
+                <a:ea typeface="Malgun Gothic"/>
+                <a:cs typeface="Malgun Gothic"/>
+              </a:rPr>
+              <a:t> </a:t>
+            </a:r>
+            <a:r>
+              <a:rPr sz="1875" b="0" dirty="0" err="1">
+                <a:solidFill>
+                  <a:srgbClr val="52615A"/>
+                </a:solidFill>
+                <a:latin typeface="Malgun Gothic"/>
+                <a:ea typeface="Malgun Gothic"/>
+                <a:cs typeface="Malgun Gothic"/>
+              </a:rPr>
+              <a:t>정한</a:t>
+            </a:r>
+            <a:r>
+              <a:rPr sz="1875" b="0" dirty="0">
+                <a:solidFill>
+                  <a:srgbClr val="52615A"/>
+                </a:solidFill>
+                <a:latin typeface="Malgun Gothic"/>
+                <a:ea typeface="Malgun Gothic"/>
+                <a:cs typeface="Malgun Gothic"/>
+              </a:rPr>
+              <a:t> </a:t>
+            </a:r>
+            <a:r>
+              <a:rPr sz="1875" b="0" dirty="0" err="1">
+                <a:solidFill>
+                  <a:srgbClr val="52615A"/>
+                </a:solidFill>
+                <a:latin typeface="Malgun Gothic"/>
+                <a:ea typeface="Malgun Gothic"/>
+                <a:cs typeface="Malgun Gothic"/>
+              </a:rPr>
+              <a:t>기준입니다</a:t>
+            </a:r>
+            <a:r>
+              <a:rPr sz="1875" b="0" dirty="0">
+                <a:solidFill>
+                  <a:srgbClr val="52615A"/>
+                </a:solidFill>
+                <a:latin typeface="Malgun Gothic"/>
+                <a:ea typeface="Malgun Gothic"/>
+                <a:cs typeface="Malgun Gothic"/>
+              </a:rPr>
+              <a:t>.</a:t>
             </a:r>
           </a:p>
         </p:txBody>
@@ -5750,17 +5980,21 @@
       </p:ext>
     </p:extLst>
   </p:cSld>
+  <p:clrMapOvr>
+    <a:masterClrMapping/>
+  </p:clrMapOvr>
 </p:sld>
 </file>
 
 <file path=ppt/slides/slide4.xml><?xml version="1.0" encoding="utf-8"?>
-<p:sld xmlns:p="http://schemas.openxmlformats.org/presentationml/2006/main">
+<p:sld xmlns:a="http://schemas.openxmlformats.org/drawingml/2006/main" xmlns:r="http://schemas.openxmlformats.org/officeDocument/2006/relationships" xmlns:p="http://schemas.openxmlformats.org/presentationml/2006/main">
   <p:cSld>
     <p:bg>
       <p:bgPr>
-        <a:solidFill xmlns:a="http://schemas.openxmlformats.org/drawingml/2006/main">
+        <a:solidFill>
           <a:srgbClr val="DACEB9"/>
         </a:solidFill>
+        <a:effectLst/>
       </p:bgPr>
     </p:bg>
     <p:spTree>
@@ -5770,37 +6004,42 @@
         <p:nvPr/>
       </p:nvGrpSpPr>
       <p:grpSpPr>
-        <a:xfrm xmlns:a="http://schemas.openxmlformats.org/drawingml/2006/main"/>
+        <a:xfrm>
+          <a:off x="0" y="0"/>
+          <a:ext cx="0" cy="0"/>
+          <a:chOff x="0" y="0"/>
+          <a:chExt cx="0" cy="0"/>
+        </a:xfrm>
       </p:grpSpPr>
       <p:pic>
         <p:nvPicPr>
           <p:cNvPr id="64" name="Picture 2"/>
           <p:cNvPicPr>
-            <a:picLocks xmlns:a="http://schemas.openxmlformats.org/drawingml/2006/main" noChangeAspect="1"/>
+            <a:picLocks noChangeAspect="1"/>
           </p:cNvPicPr>
           <p:nvPr/>
         </p:nvPicPr>
         <p:blipFill>
-          <a:blip xmlns:r="http://schemas.openxmlformats.org/officeDocument/2006/relationships" xmlns:a="http://schemas.openxmlformats.org/drawingml/2006/main" r:embed="Rb1aa5dca79c04b28">
+          <a:blip r:embed="rId3">
             <a:extLst>
               <a:ext uri="{96DAC541-7B7A-43D3-8B79-37D633B846F1}">
-                <asvg:svgBlip xmlns:asvg="http://schemas.microsoft.com/office/drawing/2016/SVG/main" r:embed="R75145a7f8c0345ad"/>
+                <asvg:svgBlip xmlns:asvg="http://schemas.microsoft.com/office/drawing/2016/SVG/main" r:embed="rId4"/>
               </a:ext>
             </a:extLst>
           </a:blip>
-          <a:stretch xmlns:a="http://schemas.openxmlformats.org/drawingml/2006/main">
-            <a:fillRect l="0" t="0" r="0" b="0"/>
+          <a:stretch>
+            <a:fillRect/>
           </a:stretch>
         </p:blipFill>
         <p:spPr>
-          <a:xfrm xmlns:a="http://schemas.openxmlformats.org/drawingml/2006/main">
+          <a:xfrm>
             <a:off x="469900" y="431800"/>
             <a:ext cx="17360900" cy="9359900"/>
           </a:xfrm>
-          <a:prstGeom xmlns:a="http://schemas.openxmlformats.org/drawingml/2006/main" prst="rect">
+          <a:prstGeom prst="rect">
             <a:avLst/>
           </a:prstGeom>
-          <a:effectLst xmlns:a="http://schemas.openxmlformats.org/drawingml/2006/main">
+          <a:effectLst>
             <a:outerShdw blurRad="561213" dist="359752" dir="2700000">
               <a:srgbClr val="3E372E">
                 <a:alpha val="43000"/>
@@ -5811,37 +6050,37 @@
       </p:pic>
       <p:sp>
         <p:nvSpPr>
-          <p:cNvPr id="62" name="">
-            <a:extLst xmlns:a="http://schemas.openxmlformats.org/drawingml/2006/main">
+          <p:cNvPr id="62" name="직사각형 61">
+            <a:extLst>
               <a:ext uri="{FF2B5EF4-FFF2-40B4-BE49-F238E27FC236}">
                 <a16:creationId xmlns:a16="http://schemas.microsoft.com/office/drawing/2014/main" id="{436D93F6-DE9E-4C15-A7B4-60067FAFC042}"/>
               </a:ext>
             </a:extLst>
           </p:cNvPr>
           <p:cNvSpPr>
-            <a:spLocks xmlns:a="http://schemas.openxmlformats.org/drawingml/2006/main" noGrp="1"/>
+            <a:spLocks noGrp="1"/>
           </p:cNvSpPr>
           <p:nvPr/>
         </p:nvSpPr>
         <p:spPr>
-          <a:xfrm xmlns:a="http://schemas.openxmlformats.org/drawingml/2006/main">
+          <a:xfrm>
             <a:off x="1285875" y="1143000"/>
             <a:ext cx="15716250" cy="952500"/>
           </a:xfrm>
-          <a:prstGeom xmlns:a="http://schemas.openxmlformats.org/drawingml/2006/main" prst="rect">
+          <a:prstGeom prst="rect">
             <a:avLst/>
           </a:prstGeom>
-          <a:noFill xmlns:a="http://schemas.openxmlformats.org/drawingml/2006/main"/>
-          <a:ln xmlns:a="http://schemas.openxmlformats.org/drawingml/2006/main" w="0">
+          <a:noFill/>
+          <a:ln w="0">
             <a:noFill/>
           </a:ln>
         </p:spPr>
         <p:txBody>
-          <a:bodyPr xmlns:a="http://schemas.openxmlformats.org/drawingml/2006/main">
+          <a:bodyPr>
             <a:noAutofit/>
           </a:bodyPr>
-          <a:lstStyle xmlns:a="http://schemas.openxmlformats.org/drawingml/2006/main"/>
-          <a:p xmlns:a="http://schemas.openxmlformats.org/drawingml/2006/main">
+          <a:lstStyle/>
+          <a:p>
             <a:pPr>
               <a:defRPr sz="4875" b="1">
                 <a:solidFill>
@@ -5868,28 +6107,38 @@
       </p:sp>
       <p:graphicFrame>
         <p:nvGraphicFramePr>
-          <p:cNvPr id="66" name=""/>
+          <p:cNvPr id="66" name="표 65"/>
           <p:cNvGraphicFramePr/>
           <p:nvPr/>
         </p:nvGraphicFramePr>
         <p:xfrm>
-          <a:off xmlns:a="http://schemas.openxmlformats.org/drawingml/2006/main" x="1285875" y="2381250"/>
-          <a:ext xmlns:a="http://schemas.openxmlformats.org/drawingml/2006/main" cx="15716250" cy="7000875"/>
+          <a:off x="1285875" y="2381250"/>
+          <a:ext cx="15716250" cy="7054215"/>
         </p:xfrm>
-        <a:graphic xmlns:a="http://schemas.openxmlformats.org/drawingml/2006/main">
+        <a:graphic>
           <a:graphicData uri="http://schemas.openxmlformats.org/drawingml/2006/table">
             <a:tbl>
               <a:tblPr/>
               <a:tblGrid>
-                <a:gridCol w="3000375"/>
-                <a:gridCol w="12715875"/>
+                <a:gridCol w="3000375">
+                  <a:extLst>
+                    <a:ext uri="{9D8B030D-6E8A-4147-A177-3AD203B41FA5}">
+                      <a16:colId xmlns:a16="http://schemas.microsoft.com/office/drawing/2014/main" val="20000"/>
+                    </a:ext>
+                  </a:extLst>
+                </a:gridCol>
+                <a:gridCol w="12715875">
+                  <a:extLst>
+                    <a:ext uri="{9D8B030D-6E8A-4147-A177-3AD203B41FA5}">
+                      <a16:colId xmlns:a16="http://schemas.microsoft.com/office/drawing/2014/main" val="20001"/>
+                    </a:ext>
+                  </a:extLst>
+                </a:gridCol>
               </a:tblGrid>
               <a:tr h="666750">
                 <a:tc>
                   <a:txBody>
-                    <a:bodyPr>
-                      <a:noAutofit/>
-                    </a:bodyPr>
+                    <a:bodyPr/>
                     <a:lstStyle/>
                     <a:p>
                       <a:r>
@@ -5913,9 +6162,7 @@
                 </a:tc>
                 <a:tc>
                   <a:txBody>
-                    <a:bodyPr>
-                      <a:noAutofit/>
-                    </a:bodyPr>
+                    <a:bodyPr/>
                     <a:lstStyle/>
                     <a:p>
                       <a:r>
@@ -5937,13 +6184,16 @@
                     </a:solidFill>
                   </a:tcPr>
                 </a:tc>
+                <a:extLst>
+                  <a:ext uri="{0D108BD9-81ED-4DB2-BD59-A6C34878D82A}">
+                    <a16:rowId xmlns:a16="http://schemas.microsoft.com/office/drawing/2014/main" val="10000"/>
+                  </a:ext>
+                </a:extLst>
               </a:tr>
               <a:tr h="809625">
                 <a:tc>
                   <a:txBody>
-                    <a:bodyPr>
-                      <a:noAutofit/>
-                    </a:bodyPr>
+                    <a:bodyPr/>
                     <a:lstStyle/>
                     <a:p>
                       <a:r>
@@ -5967,9 +6217,7 @@
                 </a:tc>
                 <a:tc>
                   <a:txBody>
-                    <a:bodyPr>
-                      <a:noAutofit/>
-                    </a:bodyPr>
+                    <a:bodyPr/>
                     <a:lstStyle/>
                     <a:p>
                       <a:r>
@@ -5991,13 +6239,16 @@
                     </a:solidFill>
                   </a:tcPr>
                 </a:tc>
+                <a:extLst>
+                  <a:ext uri="{0D108BD9-81ED-4DB2-BD59-A6C34878D82A}">
+                    <a16:rowId xmlns:a16="http://schemas.microsoft.com/office/drawing/2014/main" val="10001"/>
+                  </a:ext>
+                </a:extLst>
               </a:tr>
               <a:tr h="1524000">
                 <a:tc>
                   <a:txBody>
-                    <a:bodyPr>
-                      <a:noAutofit/>
-                    </a:bodyPr>
+                    <a:bodyPr/>
                     <a:lstStyle/>
                     <a:p>
                       <a:r>
@@ -6034,9 +6285,7 @@
                 </a:tc>
                 <a:tc>
                   <a:txBody>
-                    <a:bodyPr>
-                      <a:noAutofit/>
-                    </a:bodyPr>
+                    <a:bodyPr/>
                     <a:lstStyle/>
                     <a:p>
                       <a:r>
@@ -6084,13 +6333,16 @@
                     </a:solidFill>
                   </a:tcPr>
                 </a:tc>
+                <a:extLst>
+                  <a:ext uri="{0D108BD9-81ED-4DB2-BD59-A6C34878D82A}">
+                    <a16:rowId xmlns:a16="http://schemas.microsoft.com/office/drawing/2014/main" val="10002"/>
+                  </a:ext>
+                </a:extLst>
               </a:tr>
               <a:tr h="1238250">
                 <a:tc>
                   <a:txBody>
-                    <a:bodyPr>
-                      <a:noAutofit/>
-                    </a:bodyPr>
+                    <a:bodyPr/>
                     <a:lstStyle/>
                     <a:p>
                       <a:r>
@@ -6127,9 +6379,7 @@
                 </a:tc>
                 <a:tc>
                   <a:txBody>
-                    <a:bodyPr>
-                      <a:noAutofit/>
-                    </a:bodyPr>
+                    <a:bodyPr/>
                     <a:lstStyle/>
                     <a:p>
                       <a:r>
@@ -6164,13 +6414,16 @@
                     </a:solidFill>
                   </a:tcPr>
                 </a:tc>
+                <a:extLst>
+                  <a:ext uri="{0D108BD9-81ED-4DB2-BD59-A6C34878D82A}">
+                    <a16:rowId xmlns:a16="http://schemas.microsoft.com/office/drawing/2014/main" val="10003"/>
+                  </a:ext>
+                </a:extLst>
               </a:tr>
               <a:tr h="1619250">
                 <a:tc>
                   <a:txBody>
-                    <a:bodyPr>
-                      <a:noAutofit/>
-                    </a:bodyPr>
+                    <a:bodyPr/>
                     <a:lstStyle/>
                     <a:p>
                       <a:r>
@@ -6194,9 +6447,7 @@
                 </a:tc>
                 <a:tc>
                   <a:txBody>
-                    <a:bodyPr>
-                      <a:noAutofit/>
-                    </a:bodyPr>
+                    <a:bodyPr/>
                     <a:lstStyle/>
                     <a:p>
                       <a:r>
@@ -6244,13 +6495,16 @@
                     </a:solidFill>
                   </a:tcPr>
                 </a:tc>
+                <a:extLst>
+                  <a:ext uri="{0D108BD9-81ED-4DB2-BD59-A6C34878D82A}">
+                    <a16:rowId xmlns:a16="http://schemas.microsoft.com/office/drawing/2014/main" val="10004"/>
+                  </a:ext>
+                </a:extLst>
               </a:tr>
               <a:tr h="1143000">
                 <a:tc>
                   <a:txBody>
-                    <a:bodyPr>
-                      <a:noAutofit/>
-                    </a:bodyPr>
+                    <a:bodyPr/>
                     <a:lstStyle/>
                     <a:p>
                       <a:r>
@@ -6287,9 +6541,7 @@
                 </a:tc>
                 <a:tc>
                   <a:txBody>
-                    <a:bodyPr>
-                      <a:noAutofit/>
-                    </a:bodyPr>
+                    <a:bodyPr/>
                     <a:lstStyle/>
                     <a:p>
                       <a:r>
@@ -6324,6 +6576,11 @@
                     </a:solidFill>
                   </a:tcPr>
                 </a:tc>
+                <a:extLst>
+                  <a:ext uri="{0D108BD9-81ED-4DB2-BD59-A6C34878D82A}">
+                    <a16:rowId xmlns:a16="http://schemas.microsoft.com/office/drawing/2014/main" val="10005"/>
+                  </a:ext>
+                </a:extLst>
               </a:tr>
             </a:tbl>
           </a:graphicData>
@@ -6336,17 +6593,21 @@
       </p:ext>
     </p:extLst>
   </p:cSld>
+  <p:clrMapOvr>
+    <a:masterClrMapping/>
+  </p:clrMapOvr>
 </p:sld>
 </file>
 
 <file path=ppt/slides/slide5.xml><?xml version="1.0" encoding="utf-8"?>
-<p:sld xmlns:p="http://schemas.openxmlformats.org/presentationml/2006/main">
+<p:sld xmlns:a="http://schemas.openxmlformats.org/drawingml/2006/main" xmlns:r="http://schemas.openxmlformats.org/officeDocument/2006/relationships" xmlns:p="http://schemas.openxmlformats.org/presentationml/2006/main">
   <p:cSld>
     <p:bg>
       <p:bgPr>
-        <a:solidFill xmlns:a="http://schemas.openxmlformats.org/drawingml/2006/main">
+        <a:solidFill>
           <a:srgbClr val="DACEB9"/>
         </a:solidFill>
+        <a:effectLst/>
       </p:bgPr>
     </p:bg>
     <p:spTree>
@@ -6356,37 +6617,42 @@
         <p:nvPr/>
       </p:nvGrpSpPr>
       <p:grpSpPr>
-        <a:xfrm xmlns:a="http://schemas.openxmlformats.org/drawingml/2006/main"/>
+        <a:xfrm>
+          <a:off x="0" y="0"/>
+          <a:ext cx="0" cy="0"/>
+          <a:chOff x="0" y="0"/>
+          <a:chExt cx="0" cy="0"/>
+        </a:xfrm>
       </p:grpSpPr>
       <p:pic>
         <p:nvPicPr>
           <p:cNvPr id="31" name="Picture 2"/>
           <p:cNvPicPr>
-            <a:picLocks xmlns:a="http://schemas.openxmlformats.org/drawingml/2006/main" noChangeAspect="1"/>
+            <a:picLocks noChangeAspect="1"/>
           </p:cNvPicPr>
           <p:nvPr/>
         </p:nvPicPr>
         <p:blipFill>
-          <a:blip xmlns:r="http://schemas.openxmlformats.org/officeDocument/2006/relationships" xmlns:a="http://schemas.openxmlformats.org/drawingml/2006/main" r:embed="R5990335e085c4c88">
+          <a:blip r:embed="rId3">
             <a:extLst>
               <a:ext uri="{96DAC541-7B7A-43D3-8B79-37D633B846F1}">
-                <asvg:svgBlip xmlns:asvg="http://schemas.microsoft.com/office/drawing/2016/SVG/main" r:embed="Rdfbfd4e2e90d41b5"/>
+                <asvg:svgBlip xmlns:asvg="http://schemas.microsoft.com/office/drawing/2016/SVG/main" r:embed="rId4"/>
               </a:ext>
             </a:extLst>
           </a:blip>
-          <a:stretch xmlns:a="http://schemas.openxmlformats.org/drawingml/2006/main">
-            <a:fillRect l="0" t="0" r="0" b="0"/>
+          <a:stretch>
+            <a:fillRect/>
           </a:stretch>
         </p:blipFill>
         <p:spPr>
-          <a:xfrm xmlns:a="http://schemas.openxmlformats.org/drawingml/2006/main">
+          <a:xfrm>
             <a:off x="469900" y="431800"/>
             <a:ext cx="17360900" cy="9359900"/>
           </a:xfrm>
-          <a:prstGeom xmlns:a="http://schemas.openxmlformats.org/drawingml/2006/main" prst="rect">
+          <a:prstGeom prst="rect">
             <a:avLst/>
           </a:prstGeom>
-          <a:effectLst xmlns:a="http://schemas.openxmlformats.org/drawingml/2006/main">
+          <a:effectLst>
             <a:outerShdw blurRad="561213" dist="359752" dir="2700000">
               <a:srgbClr val="3E372E">
                 <a:alpha val="43000"/>
@@ -6398,36 +6664,36 @@
       <p:sp>
         <p:nvSpPr>
           <p:cNvPr id="26" name="직사각형 25">
-            <a:extLst xmlns:a="http://schemas.openxmlformats.org/drawingml/2006/main">
+            <a:extLst>
               <a:ext uri="{FF2B5EF4-FFF2-40B4-BE49-F238E27FC236}">
                 <a16:creationId xmlns:a16="http://schemas.microsoft.com/office/drawing/2014/main" id="{D4146A0B-7586-45A5-85D5-CF7347C3365B}"/>
               </a:ext>
             </a:extLst>
           </p:cNvPr>
           <p:cNvSpPr>
-            <a:spLocks xmlns:a="http://schemas.openxmlformats.org/drawingml/2006/main" noGrp="1"/>
+            <a:spLocks noGrp="1"/>
           </p:cNvSpPr>
           <p:nvPr/>
         </p:nvSpPr>
         <p:spPr>
-          <a:xfrm xmlns:a="http://schemas.openxmlformats.org/drawingml/2006/main">
+          <a:xfrm>
             <a:off x="1333500" y="3619500"/>
             <a:ext cx="15240000" cy="1714500"/>
           </a:xfrm>
-          <a:prstGeom xmlns:a="http://schemas.openxmlformats.org/drawingml/2006/main" prst="rect">
+          <a:prstGeom prst="rect">
             <a:avLst/>
           </a:prstGeom>
-          <a:noFill xmlns:a="http://schemas.openxmlformats.org/drawingml/2006/main"/>
-          <a:ln xmlns:a="http://schemas.openxmlformats.org/drawingml/2006/main" w="0">
+          <a:noFill/>
+          <a:ln w="0">
             <a:noFill/>
           </a:ln>
         </p:spPr>
         <p:txBody>
-          <a:bodyPr xmlns:a="http://schemas.openxmlformats.org/drawingml/2006/main">
+          <a:bodyPr>
             <a:noAutofit/>
           </a:bodyPr>
-          <a:lstStyle xmlns:a="http://schemas.openxmlformats.org/drawingml/2006/main"/>
-          <a:p xmlns:a="http://schemas.openxmlformats.org/drawingml/2006/main">
+          <a:lstStyle/>
+          <a:p>
             <a:pPr>
               <a:buNone/>
               <a:defRPr sz="9375" b="1">
@@ -6456,36 +6722,36 @@
       <p:sp>
         <p:nvSpPr>
           <p:cNvPr id="27" name="직사각형 26">
-            <a:extLst xmlns:a="http://schemas.openxmlformats.org/drawingml/2006/main">
+            <a:extLst>
               <a:ext uri="{FF2B5EF4-FFF2-40B4-BE49-F238E27FC236}">
                 <a16:creationId xmlns:a16="http://schemas.microsoft.com/office/drawing/2014/main" id="{3D69A7C7-B28A-4D82-97F8-A98E6F162A3B}"/>
               </a:ext>
             </a:extLst>
           </p:cNvPr>
           <p:cNvSpPr>
-            <a:spLocks xmlns:a="http://schemas.openxmlformats.org/drawingml/2006/main" noGrp="1"/>
+            <a:spLocks noGrp="1"/>
           </p:cNvSpPr>
           <p:nvPr/>
         </p:nvSpPr>
         <p:spPr>
-          <a:xfrm xmlns:a="http://schemas.openxmlformats.org/drawingml/2006/main">
+          <a:xfrm>
             <a:off x="1428750" y="5905500"/>
             <a:ext cx="14287500" cy="809625"/>
           </a:xfrm>
-          <a:prstGeom xmlns:a="http://schemas.openxmlformats.org/drawingml/2006/main" prst="rect">
+          <a:prstGeom prst="rect">
             <a:avLst/>
           </a:prstGeom>
-          <a:noFill xmlns:a="http://schemas.openxmlformats.org/drawingml/2006/main"/>
-          <a:ln xmlns:a="http://schemas.openxmlformats.org/drawingml/2006/main" w="0">
+          <a:noFill/>
+          <a:ln w="0">
             <a:noFill/>
           </a:ln>
         </p:spPr>
         <p:txBody>
-          <a:bodyPr xmlns:a="http://schemas.openxmlformats.org/drawingml/2006/main">
+          <a:bodyPr>
             <a:noAutofit/>
           </a:bodyPr>
-          <a:lstStyle xmlns:a="http://schemas.openxmlformats.org/drawingml/2006/main"/>
-          <a:p xmlns:a="http://schemas.openxmlformats.org/drawingml/2006/main">
+          <a:lstStyle/>
+          <a:p>
             <a:pPr>
               <a:buNone/>
               <a:defRPr sz="3000" b="0">
@@ -6514,36 +6780,36 @@
       <p:sp>
         <p:nvSpPr>
           <p:cNvPr id="28" name="직사각형 27">
-            <a:extLst xmlns:a="http://schemas.openxmlformats.org/drawingml/2006/main">
+            <a:extLst>
               <a:ext uri="{FF2B5EF4-FFF2-40B4-BE49-F238E27FC236}">
                 <a16:creationId xmlns:a16="http://schemas.microsoft.com/office/drawing/2014/main" id="{3BFF40F4-1FF6-435D-8FD0-AB820B1237DF}"/>
               </a:ext>
             </a:extLst>
           </p:cNvPr>
           <p:cNvSpPr>
-            <a:spLocks xmlns:a="http://schemas.openxmlformats.org/drawingml/2006/main" noGrp="1"/>
+            <a:spLocks noGrp="1"/>
           </p:cNvSpPr>
           <p:nvPr/>
         </p:nvSpPr>
         <p:spPr>
-          <a:xfrm xmlns:a="http://schemas.openxmlformats.org/drawingml/2006/main">
+          <a:xfrm>
             <a:off x="1428750" y="8096250"/>
             <a:ext cx="14287500" cy="619125"/>
           </a:xfrm>
-          <a:prstGeom xmlns:a="http://schemas.openxmlformats.org/drawingml/2006/main" prst="rect">
+          <a:prstGeom prst="rect">
             <a:avLst/>
           </a:prstGeom>
-          <a:noFill xmlns:a="http://schemas.openxmlformats.org/drawingml/2006/main"/>
-          <a:ln xmlns:a="http://schemas.openxmlformats.org/drawingml/2006/main" w="0">
+          <a:noFill/>
+          <a:ln w="0">
             <a:noFill/>
           </a:ln>
         </p:spPr>
         <p:txBody>
-          <a:bodyPr xmlns:a="http://schemas.openxmlformats.org/drawingml/2006/main">
+          <a:bodyPr>
             <a:noAutofit/>
           </a:bodyPr>
-          <a:lstStyle xmlns:a="http://schemas.openxmlformats.org/drawingml/2006/main"/>
-          <a:p xmlns:a="http://schemas.openxmlformats.org/drawingml/2006/main">
+          <a:lstStyle/>
+          <a:p>
             <a:pPr>
               <a:buNone/>
               <a:defRPr sz="2475" b="1">
@@ -6563,7 +6829,7 @@
                 <a:latin typeface="Malgun Gothic"/>
                 <a:ea typeface="Malgun Gothic"/>
                 <a:cs typeface="Malgun Gothic"/>
-                <a:hlinkClick xmlns:r="http://schemas.openxmlformats.org/officeDocument/2006/relationships" r:id="Rd55bcfcd3d644b1e"/>
+                <a:hlinkClick r:id="rId5"/>
               </a:rPr>
               <a:t>데모 실행하기</a:t>
             </a:r>
@@ -6573,36 +6839,36 @@
       <p:sp>
         <p:nvSpPr>
           <p:cNvPr id="29" name="직사각형 28">
-            <a:extLst xmlns:a="http://schemas.openxmlformats.org/drawingml/2006/main">
+            <a:extLst>
               <a:ext uri="{FF2B5EF4-FFF2-40B4-BE49-F238E27FC236}">
                 <a16:creationId xmlns:a16="http://schemas.microsoft.com/office/drawing/2014/main" id="{6EC6BA8F-0755-49BC-B285-8C93B38BD990}"/>
               </a:ext>
             </a:extLst>
           </p:cNvPr>
           <p:cNvSpPr>
-            <a:spLocks xmlns:a="http://schemas.openxmlformats.org/drawingml/2006/main" noGrp="1"/>
+            <a:spLocks noGrp="1"/>
           </p:cNvSpPr>
           <p:nvPr/>
         </p:nvSpPr>
         <p:spPr>
-          <a:xfrm xmlns:a="http://schemas.openxmlformats.org/drawingml/2006/main">
+          <a:xfrm>
             <a:off x="1428750" y="8858250"/>
             <a:ext cx="15430500" cy="619125"/>
           </a:xfrm>
-          <a:prstGeom xmlns:a="http://schemas.openxmlformats.org/drawingml/2006/main" prst="rect">
+          <a:prstGeom prst="rect">
             <a:avLst/>
           </a:prstGeom>
-          <a:noFill xmlns:a="http://schemas.openxmlformats.org/drawingml/2006/main"/>
-          <a:ln xmlns:a="http://schemas.openxmlformats.org/drawingml/2006/main" w="0">
+          <a:noFill/>
+          <a:ln w="0">
             <a:noFill/>
           </a:ln>
         </p:spPr>
         <p:txBody>
-          <a:bodyPr xmlns:a="http://schemas.openxmlformats.org/drawingml/2006/main">
+          <a:bodyPr>
             <a:noAutofit/>
           </a:bodyPr>
-          <a:lstStyle xmlns:a="http://schemas.openxmlformats.org/drawingml/2006/main"/>
-          <a:p xmlns:a="http://schemas.openxmlformats.org/drawingml/2006/main">
+          <a:lstStyle/>
+          <a:p>
             <a:pPr>
               <a:buNone/>
               <a:defRPr sz="2175" b="0">
@@ -6622,7 +6888,7 @@
                 <a:latin typeface="Malgun Gothic"/>
                 <a:ea typeface="Malgun Gothic"/>
                 <a:cs typeface="Malgun Gothic"/>
-                <a:hlinkClick xmlns:r="http://schemas.openxmlformats.org/officeDocument/2006/relationships" r:id="Rb498f6bf462c494c"/>
+                <a:hlinkClick r:id="rId5"/>
               </a:rPr>
               <a:t>https://huggingface.co/spaces/psy0635/fashion-image-check</a:t>
             </a:r>
@@ -6636,6 +6902,9 @@
       </p:ext>
     </p:extLst>
   </p:cSld>
+  <p:clrMapOvr>
+    <a:masterClrMapping/>
+  </p:clrMapOvr>
 </p:sld>
 </file>
 
@@ -6906,5 +7175,279 @@
       </a:bgFillStyleLst>
     </a:fmtScheme>
   </a:themeElements>
+  <a:objectDefaults/>
+  <a:extraClrSchemeLst/>
+</a:theme>
+</file>
+
+<file path=ppt/theme/theme2.xml><?xml version="1.0" encoding="utf-8"?>
+<a:theme xmlns:a="http://schemas.openxmlformats.org/drawingml/2006/main" name="Office Theme">
+  <a:themeElements>
+    <a:clrScheme name="Office">
+      <a:dk1>
+        <a:sysClr val="windowText" lastClr="000000"/>
+      </a:dk1>
+      <a:lt1>
+        <a:sysClr val="window" lastClr="FFFFFF"/>
+      </a:lt1>
+      <a:dk2>
+        <a:srgbClr val="1F497D"/>
+      </a:dk2>
+      <a:lt2>
+        <a:srgbClr val="EEECE1"/>
+      </a:lt2>
+      <a:accent1>
+        <a:srgbClr val="4F81BD"/>
+      </a:accent1>
+      <a:accent2>
+        <a:srgbClr val="C0504D"/>
+      </a:accent2>
+      <a:accent3>
+        <a:srgbClr val="9BBB59"/>
+      </a:accent3>
+      <a:accent4>
+        <a:srgbClr val="8064A2"/>
+      </a:accent4>
+      <a:accent5>
+        <a:srgbClr val="4BACC6"/>
+      </a:accent5>
+      <a:accent6>
+        <a:srgbClr val="F79646"/>
+      </a:accent6>
+      <a:hlink>
+        <a:srgbClr val="0000FF"/>
+      </a:hlink>
+      <a:folHlink>
+        <a:srgbClr val="800080"/>
+      </a:folHlink>
+    </a:clrScheme>
+    <a:fontScheme name="Office">
+      <a:majorFont>
+        <a:latin typeface="Calibri"/>
+        <a:ea typeface=""/>
+        <a:cs typeface=""/>
+        <a:font script="Jpan" typeface="ＭＳ Ｐゴシック"/>
+        <a:font script="Hang" typeface="맑은 고딕"/>
+        <a:font script="Hans" typeface="宋体"/>
+        <a:font script="Hant" typeface="新細明體"/>
+        <a:font script="Arab" typeface="Times New Roman"/>
+        <a:font script="Hebr" typeface="Times New Roman"/>
+        <a:font script="Thai" typeface="Angsana New"/>
+        <a:font script="Ethi" typeface="Nyala"/>
+        <a:font script="Beng" typeface="Vrinda"/>
+        <a:font script="Gujr" typeface="Shruti"/>
+        <a:font script="Khmr" typeface="MoolBoran"/>
+        <a:font script="Knda" typeface="Tunga"/>
+        <a:font script="Guru" typeface="Raavi"/>
+        <a:font script="Cans" typeface="Euphemia"/>
+        <a:font script="Cher" typeface="Plantagenet Cherokee"/>
+        <a:font script="Yiii" typeface="Microsoft Yi Baiti"/>
+        <a:font script="Tibt" typeface="Microsoft Himalaya"/>
+        <a:font script="Thaa" typeface="MV Boli"/>
+        <a:font script="Deva" typeface="Mangal"/>
+        <a:font script="Telu" typeface="Gautami"/>
+        <a:font script="Taml" typeface="Latha"/>
+        <a:font script="Syrc" typeface="Estrangelo Edessa"/>
+        <a:font script="Orya" typeface="Kalinga"/>
+        <a:font script="Mlym" typeface="Kartika"/>
+        <a:font script="Laoo" typeface="DokChampa"/>
+        <a:font script="Sinh" typeface="Iskoola Pota"/>
+        <a:font script="Mong" typeface="Mongolian Baiti"/>
+        <a:font script="Viet" typeface="Times New Roman"/>
+        <a:font script="Uigh" typeface="Microsoft Uighur"/>
+      </a:majorFont>
+      <a:minorFont>
+        <a:latin typeface="Calibri"/>
+        <a:ea typeface=""/>
+        <a:cs typeface=""/>
+        <a:font script="Jpan" typeface="ＭＳ Ｐゴシック"/>
+        <a:font script="Hang" typeface="맑은 고딕"/>
+        <a:font script="Hans" typeface="宋体"/>
+        <a:font script="Hant" typeface="新細明體"/>
+        <a:font script="Arab" typeface="Arial"/>
+        <a:font script="Hebr" typeface="Arial"/>
+        <a:font script="Thai" typeface="Cordia New"/>
+        <a:font script="Ethi" typeface="Nyala"/>
+        <a:font script="Beng" typeface="Vrinda"/>
+        <a:font script="Gujr" typeface="Shruti"/>
+        <a:font script="Khmr" typeface="DaunPenh"/>
+        <a:font script="Knda" typeface="Tunga"/>
+        <a:font script="Guru" typeface="Raavi"/>
+        <a:font script="Cans" typeface="Euphemia"/>
+        <a:font script="Cher" typeface="Plantagenet Cherokee"/>
+        <a:font script="Yiii" typeface="Microsoft Yi Baiti"/>
+        <a:font script="Tibt" typeface="Microsoft Himalaya"/>
+        <a:font script="Thaa" typeface="MV Boli"/>
+        <a:font script="Deva" typeface="Mangal"/>
+        <a:font script="Telu" typeface="Gautami"/>
+        <a:font script="Taml" typeface="Latha"/>
+        <a:font script="Syrc" typeface="Estrangelo Edessa"/>
+        <a:font script="Orya" typeface="Kalinga"/>
+        <a:font script="Mlym" typeface="Kartika"/>
+        <a:font script="Laoo" typeface="DokChampa"/>
+        <a:font script="Sinh" typeface="Iskoola Pota"/>
+        <a:font script="Mong" typeface="Mongolian Baiti"/>
+        <a:font script="Viet" typeface="Arial"/>
+        <a:font script="Uigh" typeface="Microsoft Uighur"/>
+      </a:minorFont>
+    </a:fontScheme>
+    <a:fmtScheme name="Office">
+      <a:fillStyleLst>
+        <a:solidFill>
+          <a:schemeClr val="phClr"/>
+        </a:solidFill>
+        <a:gradFill rotWithShape="1">
+          <a:gsLst>
+            <a:gs pos="0">
+              <a:schemeClr val="phClr">
+                <a:tint val="50000"/>
+                <a:satMod val="300000"/>
+              </a:schemeClr>
+            </a:gs>
+            <a:gs pos="35000">
+              <a:schemeClr val="phClr">
+                <a:tint val="37000"/>
+                <a:satMod val="300000"/>
+              </a:schemeClr>
+            </a:gs>
+            <a:gs pos="100000">
+              <a:schemeClr val="phClr">
+                <a:tint val="15000"/>
+                <a:satMod val="350000"/>
+              </a:schemeClr>
+            </a:gs>
+          </a:gsLst>
+          <a:lin ang="16200000" scaled="1"/>
+        </a:gradFill>
+        <a:gradFill rotWithShape="1">
+          <a:gsLst>
+            <a:gs pos="0">
+              <a:schemeClr val="phClr">
+                <a:shade val="51000"/>
+                <a:satMod val="130000"/>
+              </a:schemeClr>
+            </a:gs>
+            <a:gs pos="80000">
+              <a:schemeClr val="phClr">
+                <a:shade val="93000"/>
+                <a:satMod val="130000"/>
+              </a:schemeClr>
+            </a:gs>
+            <a:gs pos="100000">
+              <a:schemeClr val="phClr">
+                <a:shade val="94000"/>
+                <a:satMod val="135000"/>
+              </a:schemeClr>
+            </a:gs>
+          </a:gsLst>
+          <a:lin ang="16200000" scaled="0"/>
+        </a:gradFill>
+      </a:fillStyleLst>
+      <a:lnStyleLst>
+        <a:ln w="9525">
+          <a:solidFill>
+            <a:schemeClr val="phClr">
+              <a:shade val="95000"/>
+              <a:satMod val="105000"/>
+            </a:schemeClr>
+          </a:solidFill>
+          <a:prstDash val="solid"/>
+        </a:ln>
+        <a:ln w="25400">
+          <a:solidFill>
+            <a:schemeClr val="phClr"/>
+          </a:solidFill>
+          <a:prstDash val="solid"/>
+        </a:ln>
+        <a:ln w="38100">
+          <a:solidFill>
+            <a:schemeClr val="phClr"/>
+          </a:solidFill>
+          <a:prstDash val="solid"/>
+        </a:ln>
+      </a:lnStyleLst>
+      <a:effectStyleLst>
+        <a:effectStyle>
+          <a:effectLst>
+            <a:outerShdw blurRad="40000" dist="20000" dir="5400000" rotWithShape="0">
+              <a:srgbClr val="000000">
+                <a:alpha val="38000"/>
+              </a:srgbClr>
+            </a:outerShdw>
+          </a:effectLst>
+        </a:effectStyle>
+        <a:effectStyle>
+          <a:effectLst>
+            <a:outerShdw blurRad="40000" dist="23000" dir="5400000" rotWithShape="0">
+              <a:srgbClr val="000000">
+                <a:alpha val="35000"/>
+              </a:srgbClr>
+            </a:outerShdw>
+          </a:effectLst>
+        </a:effectStyle>
+        <a:effectStyle>
+          <a:effectLst>
+            <a:outerShdw blurRad="40000" dist="23000" dir="5400000" rotWithShape="0">
+              <a:srgbClr val="000000">
+                <a:alpha val="35000"/>
+              </a:srgbClr>
+            </a:outerShdw>
+          </a:effectLst>
+        </a:effectStyle>
+      </a:effectStyleLst>
+      <a:bgFillStyleLst>
+        <a:solidFill>
+          <a:schemeClr val="phClr"/>
+        </a:solidFill>
+        <a:gradFill rotWithShape="1">
+          <a:gsLst>
+            <a:gs pos="0">
+              <a:schemeClr val="phClr">
+                <a:tint val="40000"/>
+                <a:satMod val="350000"/>
+              </a:schemeClr>
+            </a:gs>
+            <a:gs pos="40000">
+              <a:schemeClr val="phClr">
+                <a:tint val="45000"/>
+                <a:shade val="99000"/>
+                <a:satMod val="350000"/>
+              </a:schemeClr>
+            </a:gs>
+            <a:gs pos="100000">
+              <a:schemeClr val="phClr">
+                <a:shade val="20000"/>
+                <a:satMod val="255000"/>
+              </a:schemeClr>
+            </a:gs>
+          </a:gsLst>
+          <a:path path="circle">
+            <a:fillToRect l="50000" t="-80000" r="50000" b="180000"/>
+          </a:path>
+        </a:gradFill>
+        <a:gradFill rotWithShape="1">
+          <a:gsLst>
+            <a:gs pos="0">
+              <a:schemeClr val="phClr">
+                <a:tint val="80000"/>
+                <a:satMod val="300000"/>
+              </a:schemeClr>
+            </a:gs>
+            <a:gs pos="100000">
+              <a:schemeClr val="phClr">
+                <a:shade val="30000"/>
+                <a:satMod val="200000"/>
+              </a:schemeClr>
+            </a:gs>
+          </a:gsLst>
+          <a:path path="circle">
+            <a:fillToRect l="50000" t="50000" r="50000" b="50000"/>
+          </a:path>
+        </a:gradFill>
+      </a:bgFillStyleLst>
+    </a:fmtScheme>
+  </a:themeElements>
+  <a:objectDefaults/>
+  <a:extraClrSchemeLst/>
 </a:theme>
 </file>